--- a/AI-Native-SDLC.pptx
+++ b/AI-Native-SDLC.pptx
@@ -19,9 +19,10 @@
     <p:sldId id="267" r:id="rId13"/>
     <p:sldId id="268" r:id="rId14"/>
     <p:sldId id="269" r:id="rId15"/>
+    <p:sldId id="270" r:id="rId16"/>
   </p:sldIdLst>
   <p:notesMasterIdLst>
-    <p:notesMasterId r:id="rId16"/>
+    <p:notesMasterId r:id="rId17"/>
   </p:notesMasterIdLst>
   <p:sldSz cx="12192000" cy="6858000"/>
   <p:notesSz cx="6858000" cy="12192000"/>
@@ -120,7 +121,7 @@
   <p:extLst>
     <p:ext uri="{521415D9-36F7-43E2-AB2F-B90AF26B5E84}">
       <p14:sectionLst xmlns:p14="http://schemas.microsoft.com/office/powerpoint/2010/main">
-        <p14:section name="Introduction" id="{d87cf569-d804-ced5-e07b-273ae7c37241}">
+        <p14:section name="Introduction" id="{5683cd6c-e0ee-6036-087c-42ea06f0dbb3}">
           <p14:sldIdLst>
             <p14:sldId id="256"/>
             <p14:sldId id="257"/>
@@ -129,7 +130,7 @@
             <p14:sldId id="260"/>
           </p14:sldIdLst>
         </p14:section>
-        <p14:section name="The six stages" id="{a8f3a717-92b3-8831-0e15-e1632eee02a9}">
+        <p14:section name="The six stages" id="{1825b71c-6b99-e437-15d4-173f119a967e}">
           <p14:sldIdLst>
             <p14:sldId id="261"/>
             <p14:sldId id="262"/>
@@ -138,12 +139,13 @@
             <p14:sldId id="265"/>
             <p14:sldId id="266"/>
             <p14:sldId id="267"/>
+            <p14:sldId id="268"/>
           </p14:sldIdLst>
         </p14:section>
-        <p14:section name="Wrap-up" id="{7cb31553-fa94-790a-b07d-a9501b467b17}">
+        <p14:section name="Wrap-up" id="{96fd3eba-6a65-922e-8892-8851f8159fe8}">
           <p14:sldIdLst>
-            <p14:sldId id="268"/>
             <p14:sldId id="269"/>
+            <p14:sldId id="270"/>
           </p14:sldIdLst>
         </p14:section>
       </p14:sectionLst>
@@ -638,7 +640,7 @@
           <a:p>
             <a:r>
               <a:rPr lang="en-US" dirty="0"/>
-              <a:t>Two kinds of checking. The feedback loop is the agent checking its own code while it works, like spell-check while you type. If a test fails, the agent fixes the code, never the test. Continuous evals check the agent itself: whenever we change its instructions, skills or hooks, we rerun a set of real tasks to make sure it still does good work.</a:t>
+              <a:t>Skills tell the agent how we do things; hooks make sure the rules are always followed. Parallel sessions are started by the engineer; subagents are started by the agent. The engineer's role shifts from writing every line to orchestrating this work. One caution: each subagent re-reads what it needs, so they cost more tokens.</a:t>
             </a:r>
             <a:endParaRPr lang="en-US" dirty="0"/>
           </a:p>
@@ -726,7 +728,7 @@
           <a:p>
             <a:r>
               <a:rPr lang="en-US" dirty="0"/>
-              <a:t>Review now runs on every PR the same way, guided by a REVIEW.md rulebook. The agent can also fix comments when someone tags it. Hooks turn required approvals into automatic gates. But the key point: the agent that wrote the code cannot approve it, and a human code owner always makes the final call.</a:t>
+              <a:t>Two kinds of checking. The feedback loop is the agent checking its own code while it works, like spell-check while you type. If a test fails, the agent fixes the code, never the test. Continuous evals check the agent itself: whenever we change its instructions, skills or hooks, we rerun a set of real tasks to make sure it still does good work.</a:t>
             </a:r>
             <a:endParaRPr lang="en-US" dirty="0"/>
           </a:p>
@@ -814,7 +816,7 @@
           <a:p>
             <a:r>
               <a:rPr lang="en-US" dirty="0"/>
-              <a:t>A control band is the normal range for a number, like body temperature. A plain script watches it, with no AI involved. The further outside normal the number goes, the more the agent is allowed to do, but even at the top tier it can only open a PR or run a pre-approved runbook. Its findings come back as a new intent.md. People no longer have to start the work; they triage and review it.</a:t>
+              <a:t>Review now runs on every PR the same way, guided by a REVIEW.md rulebook. Hooks turn required approvals into automatic gates. But the key point: the agent that wrote the code cannot approve it, and a human code owner always makes the final call.</a:t>
             </a:r>
             <a:endParaRPr lang="en-US" dirty="0"/>
           </a:p>
@@ -902,7 +904,7 @@
           <a:p>
             <a:r>
               <a:rPr lang="en-US" dirty="0"/>
-              <a:t>Put it all together and the stages form a loop. Each stage hands the next one a readable file. And instead of ending at Maintain, the problems found in production feed straight back into Plan as a new intent.</a:t>
+              <a:t>In Maintenance, the loop closes. A trigger starts the agent, with no person needed: a number moving outside its normal range, a ticket, a message in a team channel, or a schedule. The agent investigates and writes what it finds as a new intent.md, which then goes through all the phases again. It can only act through approved, safe routes, such as opening a pull request for review, so it can’t change production on its own. People sort and review the work. They no longer have to start it.</a:t>
             </a:r>
             <a:endParaRPr lang="en-US" dirty="0"/>
           </a:p>
@@ -990,7 +992,7 @@
           <a:p>
             <a:r>
               <a:rPr lang="en-US" dirty="0"/>
-              <a:t>If you remember three things: readable files at every stage, checking that never stops, and humans accountable for every judgement call. Then open it up for questions. The full details and examples are in the README in our AI-Native-SDLC repo.</a:t>
+              <a:t>Put it all together and the stages form a loop. Each stage hands the next one a readable file. And instead of ending at Maintain, the problems found in production feed straight back into Plan as a new intent.</a:t>
             </a:r>
             <a:endParaRPr lang="en-US" dirty="0"/>
           </a:p>
@@ -1014,6 +1016,94 @@
             <a:fld id="{F7021451-1387-4CA6-816F-3879F97B5CBC}" type="slidenum">
               <a:rPr lang="en-US"/>
               <a:t>14</a:t>
+            </a:fld>
+            <a:endParaRPr lang="en-US"/>
+          </a:p>
+        </p:txBody>
+      </p:sp>
+    </p:spTree>
+    <p:extLst>
+      <p:ext uri="{BB962C8B-B14F-4D97-AF65-F5344CB8AC3E}">
+        <p14:creationId xmlns:p14="http://schemas.microsoft.com/office/powerpoint/2010/main" val="1024086991"/>
+      </p:ext>
+    </p:extLst>
+  </p:cSld>
+  <p:clrMapOvr>
+    <a:masterClrMapping/>
+  </p:clrMapOvr>
+</p:notes>
+</file>
+
+<file path=ppt/notesSlides/notesSlide15.xml><?xml version="1.0" encoding="utf-8"?>
+<p:notes xmlns:a="http://schemas.openxmlformats.org/drawingml/2006/main" xmlns:r="http://schemas.openxmlformats.org/officeDocument/2006/relationships" xmlns:p="http://schemas.openxmlformats.org/presentationml/2006/main">
+  <p:cSld>
+    <p:spTree>
+      <p:nvGrpSpPr>
+        <p:cNvPr id="1" name=""/>
+        <p:cNvGrpSpPr/>
+        <p:nvPr/>
+      </p:nvGrpSpPr>
+      <p:grpSpPr>
+        <a:xfrm>
+          <a:off x="0" y="0"/>
+          <a:ext cx="0" cy="0"/>
+          <a:chOff x="0" y="0"/>
+          <a:chExt cx="0" cy="0"/>
+        </a:xfrm>
+      </p:grpSpPr>
+      <p:sp>
+        <p:nvSpPr>
+          <p:cNvPr id="2" name="Slide Image Placeholder 1"/>
+          <p:cNvSpPr>
+            <a:spLocks noGrp="1" noRot="1" noChangeAspect="1"/>
+          </p:cNvSpPr>
+          <p:nvPr>
+            <p:ph type="sldImg"/>
+          </p:nvPr>
+        </p:nvSpPr>
+        <p:spPr/>
+      </p:sp>
+      <p:sp>
+        <p:nvSpPr>
+          <p:cNvPr id="3" name="Notes Placeholder 2"/>
+          <p:cNvSpPr>
+            <a:spLocks noGrp="1"/>
+          </p:cNvSpPr>
+          <p:nvPr>
+            <p:ph type="body" idx="1"/>
+          </p:nvPr>
+        </p:nvSpPr>
+        <p:spPr/>
+        <p:txBody>
+          <a:bodyPr/>
+          <a:lstStyle/>
+          <a:p>
+            <a:r>
+              <a:rPr lang="en-US" dirty="0"/>
+              <a:t>If you remember three things: readable files at every stage, checking that never stops, and humans accountable for every judgement call. Then open it up for questions. The full details and examples are in the README in our AI-Native-SDLC repo.</a:t>
+            </a:r>
+            <a:endParaRPr lang="en-US" dirty="0"/>
+          </a:p>
+        </p:txBody>
+      </p:sp>
+      <p:sp>
+        <p:nvSpPr>
+          <p:cNvPr id="4" name="Slide Number Placeholder 3"/>
+          <p:cNvSpPr>
+            <a:spLocks noGrp="1"/>
+          </p:cNvSpPr>
+          <p:nvPr>
+            <p:ph type="sldNum" sz="quarter" idx="10"/>
+          </p:nvPr>
+        </p:nvSpPr>
+        <p:spPr/>
+        <p:txBody>
+          <a:bodyPr/>
+          <a:lstStyle/>
+          <a:p>
+            <a:fld id="{F7021451-1387-4CA6-816F-3879F97B5CBC}" type="slidenum">
+              <a:rPr lang="en-US"/>
+              <a:t>15</a:t>
             </a:fld>
             <a:endParaRPr lang="en-US"/>
           </a:p>
@@ -1430,7 +1520,7 @@
           <a:p>
             <a:r>
               <a:rPr lang="en-US" dirty="0"/>
-              <a:t>Planning starts with a conversation, not a committee. The agent keeps asking questions until the idea is concrete, then writes intent.md with five fixed headings. Anything nobody said goes into Open questions, so nothing is invented. We measure success by how fast we get to a committed intent, and how many intents the product owner accepts.</a:t>
+              <a:t>intent.md is what kicks off the software development process. Planning starts with a conversation, not a committee. The agent keeps asking questions until the idea is concrete, then writes intent.md with five fixed headings. Anything nobody said goes into Open questions, so nothing is invented. The product owner approves it: the accept or reject decision that sends the intent into Stage 2, Design, is recorded as the merge or the closing review. We measure success by how fast we get to a committed intent, and how many intents the product owner accepts. You don’t have to build the brainstorm yourself: Matt Pocock’s grill-me skill, a community skill on GitHub, questions you branch by branch until the plan is clear.</a:t>
             </a:r>
             <a:endParaRPr lang="en-US" dirty="0"/>
           </a:p>
@@ -1518,7 +1608,7 @@
           <a:p>
             <a:r>
               <a:rPr lang="en-US" dirty="0"/>
-              <a:t>Requirements and design used to be separate hand-offs. Now they happen in one session with an agent, and the organization's standards come in through skills. The agent says out loud where two policies conflict, instead of quietly picking one. Over time this goes from a manual prompt to a slash command, and finally to a job that runs on merge, so the product owner's first job is the review.</a:t>
+              <a:t>Requirements and design used to be separate hand-offs. Now they happen in one session with an agent, and the organization's standards come in through skills. The agent says out loud where two policies conflict, instead of quietly picking one. Over time this goes from a manual prompt to a slash command, and finally to a job that runs on merge, so the product owner's first job is the review. If you want a ready-made starting point, Matt Pocock’s to-spec skill on GitHub turns a conversation into a spec.</a:t>
             </a:r>
             <a:endParaRPr lang="en-US" dirty="0"/>
           </a:p>
@@ -1606,7 +1696,7 @@
           <a:p>
             <a:r>
               <a:rPr lang="en-US" dirty="0"/>
-              <a:t>Building starts in plan mode, using the spec and the intent. The engineer pushes on the plan before any code is written. AGENTS.md is where the team's knowledge lives: commands, conventions, architecture, and the mistakes the agent keeps making. Note for Claude Code: it reads CLAUDE.md, so add a CLAUDE.md that imports AGENTS.md.</a:t>
+              <a:t>Building starts in plan mode. In plan mode the agent reads the code and proposes a plan, but it doesn’t change anything until you approve. Give it the approved spec.md and intent.md. Then push back on the plan: what could break, which step is riskiest, and what other options there are. When you’re happy, commit it as plan.md. R1 to R4 point back to the numbered requirements in spec.md. If the build later drifts from the plan, update plan.md in the same commit, so the plan always matches the code.</a:t>
             </a:r>
             <a:endParaRPr lang="en-US" dirty="0"/>
           </a:p>
@@ -1694,7 +1784,7 @@
           <a:p>
             <a:r>
               <a:rPr lang="en-US" dirty="0"/>
-              <a:t>Skills tell the agent how we do things; hooks make sure the rules are always followed. Parallel sessions are started by the engineer; subagents are started by the agent. The engineer's role shifts from writing every line to orchestrating this work. One caution: each subagent re-reads what it needs, so they cost more tokens.</a:t>
+              <a:t>AGENTS.md is where the team’s knowledge lives: the commands, the conventions, the architecture, and the mistakes the agent keeps making. Knowledge that used to sit in people’s heads or on wikis becomes a file the agent reads at the start of every session. The whole team maintains it. A note for Claude Code users: it reads CLAUDE.md, so add a CLAUDE.md that imports AGENTS.md.</a:t>
             </a:r>
             <a:endParaRPr lang="en-US" dirty="0"/>
           </a:p>
@@ -2720,7 +2810,7 @@
                   <a:schemeClr val="accent2"/>
                 </a:solidFill>
               </a:rPr>
-              <a:t>STAGE 4 · TEST</a:t>
+              <a:t>STAGE 3 · BUILD TOOLKIT</a:t>
             </a:r>
             <a:endParaRPr lang="en-US" sz="1400" dirty="0"/>
           </a:p>
@@ -2758,7 +2848,7 @@
                   <a:schemeClr val="tx1"/>
                 </a:solidFill>
               </a:rPr>
-              <a:t>Checks run all the time, not just at the doors</a:t>
+              <a:t>Four tools carry the team’s way of working</a:t>
             </a:r>
             <a:endParaRPr lang="en-US" sz="3400" dirty="0"/>
           </a:p>
@@ -2766,26 +2856,26 @@
       </p:sp>
       <p:sp>
         <p:nvSpPr>
-          <p:cNvPr id="4" name="Feedback loop card"/>
+          <p:cNvPr id="4" name="Skills card"/>
           <p:cNvSpPr/>
           <p:nvPr/>
         </p:nvSpPr>
         <p:spPr>
           <a:xfrm>
-            <a:off x="548640" y="1828800"/>
-            <a:ext cx="5410048" cy="4389120"/>
+            <a:off x="548640" y="1920240"/>
+            <a:ext cx="2567864" cy="3108960"/>
           </a:xfrm>
           <a:prstGeom prst="roundRect">
             <a:avLst>
-              <a:gd name="adj" fmla="val 2500"/>
+              <a:gd name="adj" fmla="val 4273"/>
             </a:avLst>
           </a:prstGeom>
           <a:solidFill>
-            <a:schemeClr val="bg2"/>
+            <a:schemeClr val="bg1"/>
           </a:solidFill>
           <a:ln w="12700">
             <a:solidFill>
-              <a:schemeClr val="bg2"/>
+              <a:schemeClr val="bg1"/>
             </a:solidFill>
             <a:prstDash val="solid"/>
           </a:ln>
@@ -2793,207 +2883,63 @@
       </p:sp>
       <p:sp>
         <p:nvSpPr>
-          <p:cNvPr id="5" name="Text 3"/>
-          <p:cNvSpPr txBox="1"/>
-          <p:nvPr/>
-        </p:nvSpPr>
-        <p:spPr>
-          <a:xfrm>
-            <a:off x="960120" y="2148840"/>
-            <a:ext cx="4587088" cy="274320"/>
-          </a:xfrm>
-          <a:prstGeom prst="rect">
-            <a:avLst/>
-          </a:prstGeom>
-          <a:noFill/>
-          <a:ln/>
-        </p:spPr>
-        <p:txBody>
-          <a:bodyPr wrap="square" lIns="0" tIns="0" rIns="0" bIns="0" rtlCol="0" anchor="ctr"/>
-          <a:lstStyle/>
-          <a:p>
-            <a:pPr indent="0" marL="0">
-              <a:buNone/>
-            </a:pPr>
-            <a:r>
-              <a:rPr lang="en-US" sz="1200" b="1" spc="200" kern="0" dirty="0">
-                <a:solidFill>
-                  <a:schemeClr val="accent2"/>
-                </a:solidFill>
-              </a:rPr>
-              <a:t>TESTS THE CODE</a:t>
-            </a:r>
-            <a:endParaRPr lang="en-US" sz="1200" dirty="0"/>
-          </a:p>
-        </p:txBody>
-      </p:sp>
-      <p:sp>
-        <p:nvSpPr>
-          <p:cNvPr id="6" name="Text 4"/>
-          <p:cNvSpPr txBox="1"/>
-          <p:nvPr/>
-        </p:nvSpPr>
-        <p:spPr>
-          <a:xfrm>
-            <a:off x="960120" y="2514600"/>
-            <a:ext cx="4587088" cy="548640"/>
-          </a:xfrm>
-          <a:prstGeom prst="rect">
-            <a:avLst/>
-          </a:prstGeom>
-          <a:noFill/>
-          <a:ln/>
-        </p:spPr>
-        <p:txBody>
-          <a:bodyPr wrap="square" lIns="0" tIns="0" rIns="0" bIns="0" rtlCol="0" anchor="ctr"/>
-          <a:lstStyle/>
-          <a:p>
-            <a:pPr indent="0" marL="0">
-              <a:buNone/>
-            </a:pPr>
-            <a:r>
-              <a:rPr lang="en-US" sz="2600" b="1" dirty="0">
-                <a:solidFill>
-                  <a:schemeClr val="tx1"/>
-                </a:solidFill>
-              </a:rPr>
-              <a:t>Feedback loop</a:t>
-            </a:r>
-            <a:endParaRPr lang="en-US" sz="2600" dirty="0"/>
-          </a:p>
-        </p:txBody>
-      </p:sp>
-      <p:sp>
-        <p:nvSpPr>
-          <p:cNvPr id="7" name="Text 5"/>
-          <p:cNvSpPr txBox="1"/>
-          <p:nvPr/>
-        </p:nvSpPr>
-        <p:spPr>
-          <a:xfrm>
-            <a:off x="960120" y="3246120"/>
-            <a:ext cx="4587088" cy="2743200"/>
-          </a:xfrm>
-          <a:prstGeom prst="rect">
-            <a:avLst/>
-          </a:prstGeom>
-          <a:noFill/>
-          <a:ln/>
-        </p:spPr>
-        <p:txBody>
-          <a:bodyPr wrap="square" lIns="0" tIns="0" rIns="0" bIns="0" rtlCol="0" anchor="t"/>
-          <a:lstStyle/>
-          <a:p>
-            <a:pPr marL="342900" indent="-342900">
-              <a:spcAft>
-                <a:spcPts val="1000"/>
-              </a:spcAft>
-              <a:buSzPct val="100000"/>
-              <a:buChar char="•"/>
-            </a:pPr>
-            <a:r>
-              <a:rPr lang="en-US" sz="1800" dirty="0">
-                <a:solidFill>
-                  <a:schemeClr val="tx1"/>
-                </a:solidFill>
-              </a:rPr>
-              <a:t>Write, check, fix, repeat until it passes</a:t>
-            </a:r>
-            <a:endParaRPr lang="en-US" sz="1800" dirty="0"/>
-          </a:p>
-          <a:p>
-            <a:pPr marL="342900" indent="-342900">
-              <a:spcAft>
-                <a:spcPts val="1000"/>
-              </a:spcAft>
-              <a:buSzPct val="100000"/>
-              <a:buChar char="•"/>
-            </a:pPr>
-            <a:r>
-              <a:rPr lang="en-US" sz="1800" dirty="0">
-                <a:solidFill>
-                  <a:schemeClr val="tx1"/>
-                </a:solidFill>
-              </a:rPr>
-              <a:t>Checks listed in AGENTS.md as one command each</a:t>
-            </a:r>
-            <a:endParaRPr lang="en-US" sz="1800" dirty="0"/>
-          </a:p>
-          <a:p>
-            <a:pPr marL="342900" indent="-342900">
-              <a:spcAft>
-                <a:spcPts val="1000"/>
-              </a:spcAft>
-              <a:buSzPct val="100000"/>
-              <a:buChar char="•"/>
-            </a:pPr>
-            <a:r>
-              <a:rPr lang="en-US" sz="1800" dirty="0">
-                <a:solidFill>
-                  <a:schemeClr val="tx1"/>
-                </a:solidFill>
-              </a:rPr>
-              <a:t>Bug fixes start with a failing test (TDD)</a:t>
-            </a:r>
-            <a:endParaRPr lang="en-US" sz="1800" dirty="0"/>
-          </a:p>
-          <a:p>
-            <a:pPr marL="342900" indent="-342900">
-              <a:spcAft>
-                <a:spcPts val="1000"/>
-              </a:spcAft>
-              <a:buSzPct val="100000"/>
-              <a:buChar char="•"/>
-            </a:pPr>
-            <a:r>
-              <a:rPr lang="en-US" sz="1800" dirty="0">
-                <a:solidFill>
-                  <a:schemeClr val="tx1"/>
-                </a:solidFill>
-              </a:rPr>
-              <a:t>A hook stops the agent editing the tests</a:t>
-            </a:r>
-            <a:endParaRPr lang="en-US" sz="1800" dirty="0"/>
-          </a:p>
-        </p:txBody>
-      </p:sp>
-      <p:sp>
-        <p:nvSpPr>
-          <p:cNvPr id="8" name="Continuous evals card"/>
+          <p:cNvPr id="5" name="Skills icon circle"/>
           <p:cNvSpPr/>
           <p:nvPr/>
         </p:nvSpPr>
         <p:spPr>
           <a:xfrm>
-            <a:off x="6233008" y="1828800"/>
-            <a:ext cx="5410048" cy="4389120"/>
-          </a:xfrm>
-          <a:prstGeom prst="roundRect">
-            <a:avLst>
-              <a:gd name="adj" fmla="val 2500"/>
-            </a:avLst>
+            <a:off x="868680" y="2240280"/>
+            <a:ext cx="731520" cy="731520"/>
+          </a:xfrm>
+          <a:prstGeom prst="ellipse">
+            <a:avLst/>
           </a:prstGeom>
           <a:solidFill>
-            <a:schemeClr val="tx1"/>
+            <a:schemeClr val="accent5"/>
           </a:solidFill>
           <a:ln w="12700">
             <a:solidFill>
-              <a:schemeClr val="tx1"/>
+              <a:schemeClr val="accent5"/>
             </a:solidFill>
             <a:prstDash val="solid"/>
           </a:ln>
         </p:spPr>
       </p:sp>
-      <p:sp>
-        <p:nvSpPr>
-          <p:cNvPr id="9" name="Text 7"/>
+      <p:pic>
+        <p:nvPicPr>
+          <p:cNvPr id="6" name="Image 0" descr="Skills icon">    </p:cNvPr>
+          <p:cNvPicPr>
+            <a:picLocks noChangeAspect="1"/>
+          </p:cNvPicPr>
+          <p:nvPr/>
+        </p:nvPicPr>
+        <p:blipFill>
+          <a:blip r:embed="rId1"/>
+          <a:stretch>
+            <a:fillRect/>
+          </a:stretch>
+        </p:blipFill>
+        <p:spPr>
+          <a:xfrm>
+            <a:off x="1051560" y="2423160"/>
+            <a:ext cx="365760" cy="365760"/>
+          </a:xfrm>
+          <a:prstGeom prst="rect">
+            <a:avLst/>
+          </a:prstGeom>
+        </p:spPr>
+      </p:pic>
+      <p:sp>
+        <p:nvSpPr>
+          <p:cNvPr id="7" name="Text 4"/>
           <p:cNvSpPr txBox="1"/>
           <p:nvPr/>
         </p:nvSpPr>
         <p:spPr>
           <a:xfrm>
-            <a:off x="6644488" y="2148840"/>
-            <a:ext cx="4587088" cy="274320"/>
+            <a:off x="868680" y="3154680"/>
+            <a:ext cx="1927784" cy="457200"/>
           </a:xfrm>
           <a:prstGeom prst="rect">
             <a:avLst/>
@@ -3009,27 +2955,27 @@
               <a:buNone/>
             </a:pPr>
             <a:r>
-              <a:rPr lang="en-US" sz="1200" b="1" spc="200" kern="0" dirty="0">
-                <a:solidFill>
-                  <a:schemeClr val="accent1"/>
-                </a:solidFill>
-              </a:rPr>
-              <a:t>TESTS THE AGENT’S SETUP</a:t>
-            </a:r>
-            <a:endParaRPr lang="en-US" sz="1200" dirty="0"/>
-          </a:p>
-        </p:txBody>
-      </p:sp>
-      <p:sp>
-        <p:nvSpPr>
-          <p:cNvPr id="10" name="Text 8"/>
+              <a:rPr lang="en-US" sz="2100" b="1" dirty="0">
+                <a:solidFill>
+                  <a:schemeClr val="tx1"/>
+                </a:solidFill>
+              </a:rPr>
+              <a:t>Skills</a:t>
+            </a:r>
+            <a:endParaRPr lang="en-US" sz="2100" dirty="0"/>
+          </a:p>
+        </p:txBody>
+      </p:sp>
+      <p:sp>
+        <p:nvSpPr>
+          <p:cNvPr id="8" name="Text 5"/>
           <p:cNvSpPr txBox="1"/>
           <p:nvPr/>
         </p:nvSpPr>
         <p:spPr>
           <a:xfrm>
-            <a:off x="6644488" y="2514600"/>
-            <a:ext cx="4587088" cy="548640"/>
+            <a:off x="868680" y="3657600"/>
+            <a:ext cx="1927784" cy="1188720"/>
           </a:xfrm>
           <a:prstGeom prst="rect">
             <a:avLst/>
@@ -3038,34 +2984,110 @@
           <a:ln/>
         </p:spPr>
         <p:txBody>
-          <a:bodyPr wrap="square" lIns="0" tIns="0" rIns="0" bIns="0" rtlCol="0" anchor="ctr"/>
-          <a:lstStyle/>
-          <a:p>
-            <a:pPr indent="0" marL="0">
-              <a:buNone/>
-            </a:pPr>
-            <a:r>
-              <a:rPr lang="en-US" sz="2600" b="1" dirty="0">
-                <a:solidFill>
-                  <a:schemeClr val="bg1"/>
-                </a:solidFill>
-              </a:rPr>
-              <a:t>Continuous evals</a:t>
-            </a:r>
-            <a:endParaRPr lang="en-US" sz="2600" dirty="0"/>
-          </a:p>
-        </p:txBody>
-      </p:sp>
-      <p:sp>
-        <p:nvSpPr>
-          <p:cNvPr id="11" name="Text 9"/>
+          <a:bodyPr wrap="square" lIns="0" tIns="0" rIns="0" bIns="0" rtlCol="0" anchor="t"/>
+          <a:lstStyle/>
+          <a:p>
+            <a:pPr indent="0" marL="0">
+              <a:buNone/>
+            </a:pPr>
+            <a:r>
+              <a:rPr lang="en-US" sz="1600" dirty="0">
+                <a:solidFill>
+                  <a:schemeClr val="tx2"/>
+                </a:solidFill>
+              </a:rPr>
+              <a:t>How we work, packaged. Update once, and every team follows.</a:t>
+            </a:r>
+            <a:endParaRPr lang="en-US" sz="1600" dirty="0"/>
+          </a:p>
+        </p:txBody>
+      </p:sp>
+      <p:sp>
+        <p:nvSpPr>
+          <p:cNvPr id="9" name="Hooks card"/>
+          <p:cNvSpPr/>
+          <p:nvPr/>
+        </p:nvSpPr>
+        <p:spPr>
+          <a:xfrm>
+            <a:off x="3390824" y="1920240"/>
+            <a:ext cx="2567864" cy="3108960"/>
+          </a:xfrm>
+          <a:prstGeom prst="roundRect">
+            <a:avLst>
+              <a:gd name="adj" fmla="val 4273"/>
+            </a:avLst>
+          </a:prstGeom>
+          <a:solidFill>
+            <a:schemeClr val="bg1"/>
+          </a:solidFill>
+          <a:ln w="12700">
+            <a:solidFill>
+              <a:schemeClr val="bg1"/>
+            </a:solidFill>
+            <a:prstDash val="solid"/>
+          </a:ln>
+        </p:spPr>
+      </p:sp>
+      <p:sp>
+        <p:nvSpPr>
+          <p:cNvPr id="10" name="Hooks icon circle"/>
+          <p:cNvSpPr/>
+          <p:nvPr/>
+        </p:nvSpPr>
+        <p:spPr>
+          <a:xfrm>
+            <a:off x="3710864" y="2240280"/>
+            <a:ext cx="731520" cy="731520"/>
+          </a:xfrm>
+          <a:prstGeom prst="ellipse">
+            <a:avLst/>
+          </a:prstGeom>
+          <a:solidFill>
+            <a:schemeClr val="accent5"/>
+          </a:solidFill>
+          <a:ln w="12700">
+            <a:solidFill>
+              <a:schemeClr val="accent5"/>
+            </a:solidFill>
+            <a:prstDash val="solid"/>
+          </a:ln>
+        </p:spPr>
+      </p:sp>
+      <p:pic>
+        <p:nvPicPr>
+          <p:cNvPr id="11" name="Image 1" descr="Hooks icon">    </p:cNvPr>
+          <p:cNvPicPr>
+            <a:picLocks noChangeAspect="1"/>
+          </p:cNvPicPr>
+          <p:nvPr/>
+        </p:nvPicPr>
+        <p:blipFill>
+          <a:blip r:embed="rId2"/>
+          <a:stretch>
+            <a:fillRect/>
+          </a:stretch>
+        </p:blipFill>
+        <p:spPr>
+          <a:xfrm>
+            <a:off x="3893744" y="2423160"/>
+            <a:ext cx="365760" cy="365760"/>
+          </a:xfrm>
+          <a:prstGeom prst="rect">
+            <a:avLst/>
+          </a:prstGeom>
+        </p:spPr>
+      </p:pic>
+      <p:sp>
+        <p:nvSpPr>
+          <p:cNvPr id="12" name="Text 8"/>
           <p:cNvSpPr txBox="1"/>
           <p:nvPr/>
         </p:nvSpPr>
         <p:spPr>
           <a:xfrm>
-            <a:off x="6644488" y="3246120"/>
-            <a:ext cx="4587088" cy="2743200"/>
+            <a:off x="3710864" y="3154680"/>
+            <a:ext cx="1927784" cy="457200"/>
           </a:xfrm>
           <a:prstGeom prst="rect">
             <a:avLst/>
@@ -3074,77 +3096,398 @@
           <a:ln/>
         </p:spPr>
         <p:txBody>
+          <a:bodyPr wrap="square" lIns="0" tIns="0" rIns="0" bIns="0" rtlCol="0" anchor="ctr"/>
+          <a:lstStyle/>
+          <a:p>
+            <a:pPr indent="0" marL="0">
+              <a:buNone/>
+            </a:pPr>
+            <a:r>
+              <a:rPr lang="en-US" sz="2100" b="1" dirty="0">
+                <a:solidFill>
+                  <a:schemeClr val="tx1"/>
+                </a:solidFill>
+              </a:rPr>
+              <a:t>Hooks</a:t>
+            </a:r>
+            <a:endParaRPr lang="en-US" sz="2100" dirty="0"/>
+          </a:p>
+        </p:txBody>
+      </p:sp>
+      <p:sp>
+        <p:nvSpPr>
+          <p:cNvPr id="13" name="Text 9"/>
+          <p:cNvSpPr txBox="1"/>
+          <p:nvPr/>
+        </p:nvSpPr>
+        <p:spPr>
+          <a:xfrm>
+            <a:off x="3710864" y="3657600"/>
+            <a:ext cx="1927784" cy="1188720"/>
+          </a:xfrm>
+          <a:prstGeom prst="rect">
+            <a:avLst/>
+          </a:prstGeom>
+          <a:noFill/>
+          <a:ln/>
+        </p:spPr>
+        <p:txBody>
           <a:bodyPr wrap="square" lIns="0" tIns="0" rIns="0" bIns="0" rtlCol="0" anchor="t"/>
           <a:lstStyle/>
           <a:p>
-            <a:pPr marL="342900" indent="-342900">
-              <a:spcAft>
-                <a:spcPts val="1000"/>
-              </a:spcAft>
-              <a:buSzPct val="100000"/>
-              <a:buChar char="•"/>
+            <a:pPr indent="0" marL="0">
+              <a:buNone/>
+            </a:pPr>
+            <a:r>
+              <a:rPr lang="en-US" sz="1600" dirty="0">
+                <a:solidFill>
+                  <a:schemeClr val="tx2"/>
+                </a:solidFill>
+              </a:rPr>
+              <a:t>Rules that always run. They allow, block or ask a person.</a:t>
+            </a:r>
+            <a:endParaRPr lang="en-US" sz="1600" dirty="0"/>
+          </a:p>
+        </p:txBody>
+      </p:sp>
+      <p:sp>
+        <p:nvSpPr>
+          <p:cNvPr id="14" name="Parallel sessions card"/>
+          <p:cNvSpPr/>
+          <p:nvPr/>
+        </p:nvSpPr>
+        <p:spPr>
+          <a:xfrm>
+            <a:off x="6233008" y="1920240"/>
+            <a:ext cx="2567864" cy="3108960"/>
+          </a:xfrm>
+          <a:prstGeom prst="roundRect">
+            <a:avLst>
+              <a:gd name="adj" fmla="val 4273"/>
+            </a:avLst>
+          </a:prstGeom>
+          <a:solidFill>
+            <a:schemeClr val="bg1"/>
+          </a:solidFill>
+          <a:ln w="12700">
+            <a:solidFill>
+              <a:schemeClr val="bg1"/>
+            </a:solidFill>
+            <a:prstDash val="solid"/>
+          </a:ln>
+        </p:spPr>
+      </p:sp>
+      <p:sp>
+        <p:nvSpPr>
+          <p:cNvPr id="15" name="Parallel sessions icon circle"/>
+          <p:cNvSpPr/>
+          <p:nvPr/>
+        </p:nvSpPr>
+        <p:spPr>
+          <a:xfrm>
+            <a:off x="6553048" y="2240280"/>
+            <a:ext cx="731520" cy="731520"/>
+          </a:xfrm>
+          <a:prstGeom prst="ellipse">
+            <a:avLst/>
+          </a:prstGeom>
+          <a:solidFill>
+            <a:schemeClr val="accent5"/>
+          </a:solidFill>
+          <a:ln w="12700">
+            <a:solidFill>
+              <a:schemeClr val="accent5"/>
+            </a:solidFill>
+            <a:prstDash val="solid"/>
+          </a:ln>
+        </p:spPr>
+      </p:sp>
+      <p:pic>
+        <p:nvPicPr>
+          <p:cNvPr id="16" name="Image 2" descr="Parallel sessions icon">    </p:cNvPr>
+          <p:cNvPicPr>
+            <a:picLocks noChangeAspect="1"/>
+          </p:cNvPicPr>
+          <p:nvPr/>
+        </p:nvPicPr>
+        <p:blipFill>
+          <a:blip r:embed="rId3"/>
+          <a:stretch>
+            <a:fillRect/>
+          </a:stretch>
+        </p:blipFill>
+        <p:spPr>
+          <a:xfrm>
+            <a:off x="6735928" y="2423160"/>
+            <a:ext cx="365760" cy="365760"/>
+          </a:xfrm>
+          <a:prstGeom prst="rect">
+            <a:avLst/>
+          </a:prstGeom>
+        </p:spPr>
+      </p:pic>
+      <p:sp>
+        <p:nvSpPr>
+          <p:cNvPr id="17" name="Text 12"/>
+          <p:cNvSpPr txBox="1"/>
+          <p:nvPr/>
+        </p:nvSpPr>
+        <p:spPr>
+          <a:xfrm>
+            <a:off x="6553048" y="3154680"/>
+            <a:ext cx="1927784" cy="457200"/>
+          </a:xfrm>
+          <a:prstGeom prst="rect">
+            <a:avLst/>
+          </a:prstGeom>
+          <a:noFill/>
+          <a:ln/>
+        </p:spPr>
+        <p:txBody>
+          <a:bodyPr wrap="square" lIns="0" tIns="0" rIns="0" bIns="0" rtlCol="0" anchor="ctr"/>
+          <a:lstStyle/>
+          <a:p>
+            <a:pPr indent="0" marL="0">
+              <a:buNone/>
+            </a:pPr>
+            <a:r>
+              <a:rPr lang="en-US" sz="2100" b="1" dirty="0">
+                <a:solidFill>
+                  <a:schemeClr val="tx1"/>
+                </a:solidFill>
+              </a:rPr>
+              <a:t>Parallel sessions</a:t>
+            </a:r>
+            <a:endParaRPr lang="en-US" sz="2100" dirty="0"/>
+          </a:p>
+        </p:txBody>
+      </p:sp>
+      <p:sp>
+        <p:nvSpPr>
+          <p:cNvPr id="18" name="Text 13"/>
+          <p:cNvSpPr txBox="1"/>
+          <p:nvPr/>
+        </p:nvSpPr>
+        <p:spPr>
+          <a:xfrm>
+            <a:off x="6553048" y="3657600"/>
+            <a:ext cx="1927784" cy="1188720"/>
+          </a:xfrm>
+          <a:prstGeom prst="rect">
+            <a:avLst/>
+          </a:prstGeom>
+          <a:noFill/>
+          <a:ln/>
+        </p:spPr>
+        <p:txBody>
+          <a:bodyPr wrap="square" lIns="0" tIns="0" rIns="0" bIns="0" rtlCol="0" anchor="t"/>
+          <a:lstStyle/>
+          <a:p>
+            <a:pPr indent="0" marL="0">
+              <a:buNone/>
+            </a:pPr>
+            <a:r>
+              <a:rPr lang="en-US" sz="1600" dirty="0">
+                <a:solidFill>
+                  <a:schemeClr val="tx2"/>
+                </a:solidFill>
+              </a:rPr>
+              <a:t>Several full agents, each on its own task in its own worktree.</a:t>
+            </a:r>
+            <a:endParaRPr lang="en-US" sz="1600" dirty="0"/>
+          </a:p>
+        </p:txBody>
+      </p:sp>
+      <p:sp>
+        <p:nvSpPr>
+          <p:cNvPr id="19" name="Subagents card"/>
+          <p:cNvSpPr/>
+          <p:nvPr/>
+        </p:nvSpPr>
+        <p:spPr>
+          <a:xfrm>
+            <a:off x="9075191" y="1920240"/>
+            <a:ext cx="2567864" cy="3108960"/>
+          </a:xfrm>
+          <a:prstGeom prst="roundRect">
+            <a:avLst>
+              <a:gd name="adj" fmla="val 4273"/>
+            </a:avLst>
+          </a:prstGeom>
+          <a:solidFill>
+            <a:schemeClr val="bg1"/>
+          </a:solidFill>
+          <a:ln w="12700">
+            <a:solidFill>
+              <a:schemeClr val="bg1"/>
+            </a:solidFill>
+            <a:prstDash val="solid"/>
+          </a:ln>
+        </p:spPr>
+      </p:sp>
+      <p:sp>
+        <p:nvSpPr>
+          <p:cNvPr id="20" name="Subagents icon circle"/>
+          <p:cNvSpPr/>
+          <p:nvPr/>
+        </p:nvSpPr>
+        <p:spPr>
+          <a:xfrm>
+            <a:off x="9395231" y="2240280"/>
+            <a:ext cx="731520" cy="731520"/>
+          </a:xfrm>
+          <a:prstGeom prst="ellipse">
+            <a:avLst/>
+          </a:prstGeom>
+          <a:solidFill>
+            <a:schemeClr val="accent5"/>
+          </a:solidFill>
+          <a:ln w="12700">
+            <a:solidFill>
+              <a:schemeClr val="accent5"/>
+            </a:solidFill>
+            <a:prstDash val="solid"/>
+          </a:ln>
+        </p:spPr>
+      </p:sp>
+      <p:pic>
+        <p:nvPicPr>
+          <p:cNvPr id="21" name="Image 3" descr="Subagents icon">    </p:cNvPr>
+          <p:cNvPicPr>
+            <a:picLocks noChangeAspect="1"/>
+          </p:cNvPicPr>
+          <p:nvPr/>
+        </p:nvPicPr>
+        <p:blipFill>
+          <a:blip r:embed="rId4"/>
+          <a:stretch>
+            <a:fillRect/>
+          </a:stretch>
+        </p:blipFill>
+        <p:spPr>
+          <a:xfrm>
+            <a:off x="9578111" y="2423160"/>
+            <a:ext cx="365760" cy="365760"/>
+          </a:xfrm>
+          <a:prstGeom prst="rect">
+            <a:avLst/>
+          </a:prstGeom>
+        </p:spPr>
+      </p:pic>
+      <p:sp>
+        <p:nvSpPr>
+          <p:cNvPr id="22" name="Text 16"/>
+          <p:cNvSpPr txBox="1"/>
+          <p:nvPr/>
+        </p:nvSpPr>
+        <p:spPr>
+          <a:xfrm>
+            <a:off x="9395231" y="3154680"/>
+            <a:ext cx="1927784" cy="457200"/>
+          </a:xfrm>
+          <a:prstGeom prst="rect">
+            <a:avLst/>
+          </a:prstGeom>
+          <a:noFill/>
+          <a:ln/>
+        </p:spPr>
+        <p:txBody>
+          <a:bodyPr wrap="square" lIns="0" tIns="0" rIns="0" bIns="0" rtlCol="0" anchor="ctr"/>
+          <a:lstStyle/>
+          <a:p>
+            <a:pPr indent="0" marL="0">
+              <a:buNone/>
+            </a:pPr>
+            <a:r>
+              <a:rPr lang="en-US" sz="2100" b="1" dirty="0">
+                <a:solidFill>
+                  <a:schemeClr val="tx1"/>
+                </a:solidFill>
+              </a:rPr>
+              <a:t>Subagents</a:t>
+            </a:r>
+            <a:endParaRPr lang="en-US" sz="2100" dirty="0"/>
+          </a:p>
+        </p:txBody>
+      </p:sp>
+      <p:sp>
+        <p:nvSpPr>
+          <p:cNvPr id="23" name="Text 17"/>
+          <p:cNvSpPr txBox="1"/>
+          <p:nvPr/>
+        </p:nvSpPr>
+        <p:spPr>
+          <a:xfrm>
+            <a:off x="9395231" y="3657600"/>
+            <a:ext cx="1927784" cy="1188720"/>
+          </a:xfrm>
+          <a:prstGeom prst="rect">
+            <a:avLst/>
+          </a:prstGeom>
+          <a:noFill/>
+          <a:ln/>
+        </p:spPr>
+        <p:txBody>
+          <a:bodyPr wrap="square" lIns="0" tIns="0" rIns="0" bIns="0" rtlCol="0" anchor="t"/>
+          <a:lstStyle/>
+          <a:p>
+            <a:pPr indent="0" marL="0">
+              <a:buNone/>
+            </a:pPr>
+            <a:r>
+              <a:rPr lang="en-US" sz="1600" dirty="0">
+                <a:solidFill>
+                  <a:schemeClr val="tx2"/>
+                </a:solidFill>
+              </a:rPr>
+              <a:t>Helpers for repeated jobs, each in its own context.</a:t>
+            </a:r>
+            <a:endParaRPr lang="en-US" sz="1600" dirty="0"/>
+          </a:p>
+        </p:txBody>
+      </p:sp>
+      <p:sp>
+        <p:nvSpPr>
+          <p:cNvPr id="24" name="Text 18"/>
+          <p:cNvSpPr txBox="1"/>
+          <p:nvPr/>
+        </p:nvSpPr>
+        <p:spPr>
+          <a:xfrm>
+            <a:off x="548640" y="5349240"/>
+            <a:ext cx="11094415" cy="640080"/>
+          </a:xfrm>
+          <a:prstGeom prst="rect">
+            <a:avLst/>
+          </a:prstGeom>
+          <a:noFill/>
+          <a:ln/>
+        </p:spPr>
+        <p:txBody>
+          <a:bodyPr wrap="square" lIns="0" tIns="0" rIns="0" bIns="0" rtlCol="0" anchor="ctr"/>
+          <a:lstStyle/>
+          <a:p>
+            <a:pPr indent="0" marL="0">
+              <a:buNone/>
+            </a:pPr>
+            <a:r>
+              <a:rPr lang="en-US" sz="1800" b="1" dirty="0">
+                <a:solidFill>
+                  <a:schemeClr val="tx1"/>
+                </a:solidFill>
+              </a:rPr>
+              <a:t>Watch out: </a:t>
+            </a:r>
+            <a:pPr indent="0" marL="0">
+              <a:buNone/>
             </a:pPr>
             <a:r>
               <a:rPr lang="en-US" sz="1800" dirty="0">
                 <a:solidFill>
-                  <a:schemeClr val="accent6"/>
-                </a:solidFill>
-              </a:rPr>
-              <a:t>20 to 50 real tasks with accepted outcomes</a:t>
-            </a:r>
-            <a:endParaRPr lang="en-US" sz="1800" dirty="0"/>
-          </a:p>
-          <a:p>
-            <a:pPr marL="342900" indent="-342900">
-              <a:spcAft>
-                <a:spcPts val="1000"/>
-              </a:spcAft>
-              <a:buSzPct val="100000"/>
-              <a:buChar char="•"/>
-            </a:pPr>
-            <a:r>
-              <a:rPr lang="en-US" sz="1800" dirty="0">
-                <a:solidFill>
-                  <a:schemeClr val="accent6"/>
-                </a:solidFill>
-              </a:rPr>
-              <a:t>Run when AGENTS.md, skills or hooks change</a:t>
-            </a:r>
-            <a:endParaRPr lang="en-US" sz="1800" dirty="0"/>
-          </a:p>
-          <a:p>
-            <a:pPr marL="342900" indent="-342900">
-              <a:spcAft>
-                <a:spcPts val="1000"/>
-              </a:spcAft>
-              <a:buSzPct val="100000"/>
-              <a:buChar char="•"/>
-            </a:pPr>
-            <a:r>
-              <a:rPr lang="en-US" sz="1800" dirty="0">
-                <a:solidFill>
-                  <a:schemeClr val="accent6"/>
-                </a:solidFill>
-              </a:rPr>
-              <a:t>A drop in pass rate is reviewed before merge</a:t>
-            </a:r>
-            <a:endParaRPr lang="en-US" sz="1800" dirty="0"/>
-          </a:p>
-          <a:p>
-            <a:pPr marL="342900" indent="-342900">
-              <a:spcAft>
-                <a:spcPts val="1000"/>
-              </a:spcAft>
-              <a:buSzPct val="100000"/>
-              <a:buChar char="•"/>
-            </a:pPr>
-            <a:r>
-              <a:rPr lang="en-US" sz="1800" dirty="0">
-                <a:solidFill>
-                  <a:schemeClr val="accent6"/>
-                </a:solidFill>
-              </a:rPr>
-              <a:t>Every incident becomes a new eval</a:t>
+                  <a:schemeClr val="tx1"/>
+                </a:solidFill>
+              </a:rPr>
+              <a:t>each subagent starts fresh, so more helpers means more tokens. Use them for big tasks that split cleanly.</a:t>
             </a:r>
             <a:endParaRPr lang="en-US" sz="1800" dirty="0"/>
           </a:p>
@@ -3252,7 +3595,7 @@
                   <a:schemeClr val="accent2"/>
                 </a:solidFill>
               </a:rPr>
-              <a:t>STAGE 5 · DEPLOY</a:t>
+              <a:t>STAGE 4 · TEST</a:t>
             </a:r>
             <a:endParaRPr lang="en-US" sz="1400" dirty="0"/>
           </a:p>
@@ -3290,7 +3633,7 @@
                   <a:schemeClr val="tx1"/>
                 </a:solidFill>
               </a:rPr>
-              <a:t>The agent checks and fixes. Humans approve.</a:t>
+              <a:t>Checks run all the time, not just at the doors</a:t>
             </a:r>
             <a:endParaRPr lang="en-US" sz="3400" dirty="0"/>
           </a:p>
@@ -3298,18 +3641,18 @@
       </p:sp>
       <p:sp>
         <p:nvSpPr>
-          <p:cNvPr id="4" name="REVIEW.md card"/>
+          <p:cNvPr id="4" name="Feedback loop card"/>
           <p:cNvSpPr/>
           <p:nvPr/>
         </p:nvSpPr>
         <p:spPr>
           <a:xfrm>
             <a:off x="548640" y="1828800"/>
-            <a:ext cx="3515258" cy="2743200"/>
+            <a:ext cx="5410048" cy="4389120"/>
           </a:xfrm>
           <a:prstGeom prst="roundRect">
             <a:avLst>
-              <a:gd name="adj" fmla="val 4000"/>
+              <a:gd name="adj" fmla="val 2500"/>
             </a:avLst>
           </a:prstGeom>
           <a:solidFill>
@@ -3331,8 +3674,8 @@
         </p:nvSpPr>
         <p:spPr>
           <a:xfrm>
-            <a:off x="914400" y="2103120"/>
-            <a:ext cx="2783738" cy="502920"/>
+            <a:off x="960120" y="2148840"/>
+            <a:ext cx="4587088" cy="274320"/>
           </a:xfrm>
           <a:prstGeom prst="rect">
             <a:avLst/>
@@ -3348,14 +3691,14 @@
               <a:buNone/>
             </a:pPr>
             <a:r>
-              <a:rPr lang="en-US" sz="2200" b="1" dirty="0">
-                <a:solidFill>
-                  <a:schemeClr val="tx1"/>
-                </a:solidFill>
-              </a:rPr>
-              <a:t>REVIEW.md</a:t>
-            </a:r>
-            <a:endParaRPr lang="en-US" sz="2200" dirty="0"/>
+              <a:rPr lang="en-US" sz="1200" b="1" spc="200" kern="0" dirty="0">
+                <a:solidFill>
+                  <a:schemeClr val="accent2"/>
+                </a:solidFill>
+              </a:rPr>
+              <a:t>TESTS THE CODE</a:t>
+            </a:r>
+            <a:endParaRPr lang="en-US" sz="1200" dirty="0"/>
           </a:p>
         </p:txBody>
       </p:sp>
@@ -3367,8 +3710,8 @@
         </p:nvSpPr>
         <p:spPr>
           <a:xfrm>
-            <a:off x="914400" y="2697480"/>
-            <a:ext cx="2783738" cy="1737360"/>
+            <a:off x="960120" y="2514600"/>
+            <a:ext cx="4587088" cy="548640"/>
           </a:xfrm>
           <a:prstGeom prst="rect">
             <a:avLst/>
@@ -3377,236 +3720,132 @@
           <a:ln/>
         </p:spPr>
         <p:txBody>
+          <a:bodyPr wrap="square" lIns="0" tIns="0" rIns="0" bIns="0" rtlCol="0" anchor="ctr"/>
+          <a:lstStyle/>
+          <a:p>
+            <a:pPr indent="0" marL="0">
+              <a:buNone/>
+            </a:pPr>
+            <a:r>
+              <a:rPr lang="en-US" sz="2600" b="1" dirty="0">
+                <a:solidFill>
+                  <a:schemeClr val="tx1"/>
+                </a:solidFill>
+              </a:rPr>
+              <a:t>Feedback loop</a:t>
+            </a:r>
+            <a:endParaRPr lang="en-US" sz="2600" dirty="0"/>
+          </a:p>
+        </p:txBody>
+      </p:sp>
+      <p:sp>
+        <p:nvSpPr>
+          <p:cNvPr id="7" name="Text 5"/>
+          <p:cNvSpPr txBox="1"/>
+          <p:nvPr/>
+        </p:nvSpPr>
+        <p:spPr>
+          <a:xfrm>
+            <a:off x="960120" y="3246120"/>
+            <a:ext cx="4587088" cy="2743200"/>
+          </a:xfrm>
+          <a:prstGeom prst="rect">
+            <a:avLst/>
+          </a:prstGeom>
+          <a:noFill/>
+          <a:ln/>
+        </p:spPr>
+        <p:txBody>
           <a:bodyPr wrap="square" lIns="0" tIns="0" rIns="0" bIns="0" rtlCol="0" anchor="t"/>
           <a:lstStyle/>
           <a:p>
-            <a:pPr indent="0" marL="0">
-              <a:buNone/>
-            </a:pPr>
-            <a:r>
-              <a:rPr lang="en-US" sz="1700" dirty="0">
-                <a:solidFill>
-                  <a:schemeClr val="tx2"/>
-                </a:solidFill>
-              </a:rPr>
-              <a:t>Every PR gets three passes: bugs, security and compliance with the spec and plan. Findings are ranked Important or Nit.</a:t>
-            </a:r>
-            <a:endParaRPr lang="en-US" sz="1700" dirty="0"/>
-          </a:p>
-        </p:txBody>
-      </p:sp>
-      <p:sp>
-        <p:nvSpPr>
-          <p:cNvPr id="7" name="@claude fixes card"/>
+            <a:pPr marL="342900" indent="-342900">
+              <a:spcAft>
+                <a:spcPts val="1000"/>
+              </a:spcAft>
+              <a:buSzPct val="100000"/>
+              <a:buChar char="•"/>
+            </a:pPr>
+            <a:r>
+              <a:rPr lang="en-US" sz="1800" dirty="0">
+                <a:solidFill>
+                  <a:schemeClr val="tx1"/>
+                </a:solidFill>
+              </a:rPr>
+              <a:t>Write, check, fix, repeat until it passes</a:t>
+            </a:r>
+            <a:endParaRPr lang="en-US" sz="1800" dirty="0"/>
+          </a:p>
+          <a:p>
+            <a:pPr marL="342900" indent="-342900">
+              <a:spcAft>
+                <a:spcPts val="1000"/>
+              </a:spcAft>
+              <a:buSzPct val="100000"/>
+              <a:buChar char="•"/>
+            </a:pPr>
+            <a:r>
+              <a:rPr lang="en-US" sz="1800" dirty="0">
+                <a:solidFill>
+                  <a:schemeClr val="tx1"/>
+                </a:solidFill>
+              </a:rPr>
+              <a:t>Checks listed in AGENTS.md as one command each</a:t>
+            </a:r>
+            <a:endParaRPr lang="en-US" sz="1800" dirty="0"/>
+          </a:p>
+          <a:p>
+            <a:pPr marL="342900" indent="-342900">
+              <a:spcAft>
+                <a:spcPts val="1000"/>
+              </a:spcAft>
+              <a:buSzPct val="100000"/>
+              <a:buChar char="•"/>
+            </a:pPr>
+            <a:r>
+              <a:rPr lang="en-US" sz="1800" dirty="0">
+                <a:solidFill>
+                  <a:schemeClr val="tx1"/>
+                </a:solidFill>
+              </a:rPr>
+              <a:t>Bug fixes start with a failing test (TDD)</a:t>
+            </a:r>
+            <a:endParaRPr lang="en-US" sz="1800" dirty="0"/>
+          </a:p>
+          <a:p>
+            <a:pPr marL="342900" indent="-342900">
+              <a:spcAft>
+                <a:spcPts val="1000"/>
+              </a:spcAft>
+              <a:buSzPct val="100000"/>
+              <a:buChar char="•"/>
+            </a:pPr>
+            <a:r>
+              <a:rPr lang="en-US" sz="1800" dirty="0">
+                <a:solidFill>
+                  <a:schemeClr val="tx1"/>
+                </a:solidFill>
+              </a:rPr>
+              <a:t>A hook stops the agent editing the tests</a:t>
+            </a:r>
+            <a:endParaRPr lang="en-US" sz="1800" dirty="0"/>
+          </a:p>
+        </p:txBody>
+      </p:sp>
+      <p:sp>
+        <p:nvSpPr>
+          <p:cNvPr id="8" name="Continuous evals card"/>
           <p:cNvSpPr/>
           <p:nvPr/>
         </p:nvSpPr>
         <p:spPr>
           <a:xfrm>
-            <a:off x="4338218" y="1828800"/>
-            <a:ext cx="3515258" cy="2743200"/>
+            <a:off x="6233008" y="1828800"/>
+            <a:ext cx="5410048" cy="4389120"/>
           </a:xfrm>
           <a:prstGeom prst="roundRect">
             <a:avLst>
-              <a:gd name="adj" fmla="val 4000"/>
-            </a:avLst>
-          </a:prstGeom>
-          <a:solidFill>
-            <a:schemeClr val="bg2"/>
-          </a:solidFill>
-          <a:ln w="12700">
-            <a:solidFill>
-              <a:schemeClr val="bg2"/>
-            </a:solidFill>
-            <a:prstDash val="solid"/>
-          </a:ln>
-        </p:spPr>
-      </p:sp>
-      <p:sp>
-        <p:nvSpPr>
-          <p:cNvPr id="8" name="Text 6"/>
-          <p:cNvSpPr txBox="1"/>
-          <p:nvPr/>
-        </p:nvSpPr>
-        <p:spPr>
-          <a:xfrm>
-            <a:off x="4703978" y="2103120"/>
-            <a:ext cx="2783738" cy="502920"/>
-          </a:xfrm>
-          <a:prstGeom prst="rect">
-            <a:avLst/>
-          </a:prstGeom>
-          <a:noFill/>
-          <a:ln/>
-        </p:spPr>
-        <p:txBody>
-          <a:bodyPr wrap="square" lIns="0" tIns="0" rIns="0" bIns="0" rtlCol="0" anchor="ctr"/>
-          <a:lstStyle/>
-          <a:p>
-            <a:pPr indent="0" marL="0">
-              <a:buNone/>
-            </a:pPr>
-            <a:r>
-              <a:rPr lang="en-US" sz="2200" b="1" dirty="0">
-                <a:solidFill>
-                  <a:schemeClr val="tx1"/>
-                </a:solidFill>
-              </a:rPr>
-              <a:t>@claude fixes</a:t>
-            </a:r>
-            <a:endParaRPr lang="en-US" sz="2200" dirty="0"/>
-          </a:p>
-        </p:txBody>
-      </p:sp>
-      <p:sp>
-        <p:nvSpPr>
-          <p:cNvPr id="9" name="Text 7"/>
-          <p:cNvSpPr txBox="1"/>
-          <p:nvPr/>
-        </p:nvSpPr>
-        <p:spPr>
-          <a:xfrm>
-            <a:off x="4703978" y="2697480"/>
-            <a:ext cx="2783738" cy="1737360"/>
-          </a:xfrm>
-          <a:prstGeom prst="rect">
-            <a:avLst/>
-          </a:prstGeom>
-          <a:noFill/>
-          <a:ln/>
-        </p:spPr>
-        <p:txBody>
-          <a:bodyPr wrap="square" lIns="0" tIns="0" rIns="0" bIns="0" rtlCol="0" anchor="t"/>
-          <a:lstStyle/>
-          <a:p>
-            <a:pPr indent="0" marL="0">
-              <a:buNone/>
-            </a:pPr>
-            <a:r>
-              <a:rPr lang="en-US" sz="1700" dirty="0">
-                <a:solidFill>
-                  <a:schemeClr val="tx2"/>
-                </a:solidFill>
-              </a:rPr>
-              <a:t>Tag a review comment and the agent pushes the fix. Mistakes seen twice go into AGENTS.md.</a:t>
-            </a:r>
-            <a:endParaRPr lang="en-US" sz="1700" dirty="0"/>
-          </a:p>
-        </p:txBody>
-      </p:sp>
-      <p:sp>
-        <p:nvSpPr>
-          <p:cNvPr id="10" name="Hooks as gates card"/>
-          <p:cNvSpPr/>
-          <p:nvPr/>
-        </p:nvSpPr>
-        <p:spPr>
-          <a:xfrm>
-            <a:off x="8127797" y="1828800"/>
-            <a:ext cx="3515258" cy="2743200"/>
-          </a:xfrm>
-          <a:prstGeom prst="roundRect">
-            <a:avLst>
-              <a:gd name="adj" fmla="val 4000"/>
-            </a:avLst>
-          </a:prstGeom>
-          <a:solidFill>
-            <a:schemeClr val="bg2"/>
-          </a:solidFill>
-          <a:ln w="12700">
-            <a:solidFill>
-              <a:schemeClr val="bg2"/>
-            </a:solidFill>
-            <a:prstDash val="solid"/>
-          </a:ln>
-        </p:spPr>
-      </p:sp>
-      <p:sp>
-        <p:nvSpPr>
-          <p:cNvPr id="11" name="Text 9"/>
-          <p:cNvSpPr txBox="1"/>
-          <p:nvPr/>
-        </p:nvSpPr>
-        <p:spPr>
-          <a:xfrm>
-            <a:off x="8493557" y="2103120"/>
-            <a:ext cx="2783738" cy="502920"/>
-          </a:xfrm>
-          <a:prstGeom prst="rect">
-            <a:avLst/>
-          </a:prstGeom>
-          <a:noFill/>
-          <a:ln/>
-        </p:spPr>
-        <p:txBody>
-          <a:bodyPr wrap="square" lIns="0" tIns="0" rIns="0" bIns="0" rtlCol="0" anchor="ctr"/>
-          <a:lstStyle/>
-          <a:p>
-            <a:pPr indent="0" marL="0">
-              <a:buNone/>
-            </a:pPr>
-            <a:r>
-              <a:rPr lang="en-US" sz="2200" b="1" dirty="0">
-                <a:solidFill>
-                  <a:schemeClr val="tx1"/>
-                </a:solidFill>
-              </a:rPr>
-              <a:t>Hooks as gates</a:t>
-            </a:r>
-            <a:endParaRPr lang="en-US" sz="2200" dirty="0"/>
-          </a:p>
-        </p:txBody>
-      </p:sp>
-      <p:sp>
-        <p:nvSpPr>
-          <p:cNvPr id="12" name="Text 10"/>
-          <p:cNvSpPr txBox="1"/>
-          <p:nvPr/>
-        </p:nvSpPr>
-        <p:spPr>
-          <a:xfrm>
-            <a:off x="8493557" y="2697480"/>
-            <a:ext cx="2783738" cy="1737360"/>
-          </a:xfrm>
-          <a:prstGeom prst="rect">
-            <a:avLst/>
-          </a:prstGeom>
-          <a:noFill/>
-          <a:ln/>
-        </p:spPr>
-        <p:txBody>
-          <a:bodyPr wrap="square" lIns="0" tIns="0" rIns="0" bIns="0" rtlCol="0" anchor="t"/>
-          <a:lstStyle/>
-          <a:p>
-            <a:pPr indent="0" marL="0">
-              <a:buNone/>
-            </a:pPr>
-            <a:r>
-              <a:rPr lang="en-US" sz="1700" dirty="0">
-                <a:solidFill>
-                  <a:schemeClr val="tx2"/>
-                </a:solidFill>
-              </a:rPr>
-              <a:t>A production deploy is blocked until a release approval exists, every time, for everyone.</a:t>
-            </a:r>
-            <a:endParaRPr lang="en-US" sz="1700" dirty="0"/>
-          </a:p>
-        </p:txBody>
-      </p:sp>
-      <p:sp>
-        <p:nvSpPr>
-          <p:cNvPr id="13" name="Approval callout"/>
-          <p:cNvSpPr/>
-          <p:nvPr/>
-        </p:nvSpPr>
-        <p:spPr>
-          <a:xfrm>
-            <a:off x="548640" y="4937760"/>
-            <a:ext cx="11094415" cy="1005840"/>
-          </a:xfrm>
-          <a:prstGeom prst="roundRect">
-            <a:avLst>
-              <a:gd name="adj" fmla="val 10909"/>
+              <a:gd name="adj" fmla="val 2500"/>
             </a:avLst>
           </a:prstGeom>
           <a:solidFill>
@@ -3622,14 +3861,14 @@
       </p:sp>
       <p:sp>
         <p:nvSpPr>
-          <p:cNvPr id="14" name="Text 12"/>
+          <p:cNvPr id="9" name="Text 7"/>
           <p:cNvSpPr txBox="1"/>
           <p:nvPr/>
         </p:nvSpPr>
         <p:spPr>
           <a:xfrm>
-            <a:off x="960120" y="4937760"/>
-            <a:ext cx="10271455" cy="1005840"/>
+            <a:off x="6644488" y="2148840"/>
+            <a:ext cx="4587088" cy="274320"/>
           </a:xfrm>
           <a:prstGeom prst="rect">
             <a:avLst/>
@@ -3645,25 +3884,144 @@
               <a:buNone/>
             </a:pPr>
             <a:r>
-              <a:rPr lang="en-US" sz="2200" dirty="0">
+              <a:rPr lang="en-US" sz="1200" b="1" spc="200" kern="0" dirty="0">
+                <a:solidFill>
+                  <a:schemeClr val="accent1"/>
+                </a:solidFill>
+              </a:rPr>
+              <a:t>TESTS THE AGENT’S SETUP</a:t>
+            </a:r>
+            <a:endParaRPr lang="en-US" sz="1200" dirty="0"/>
+          </a:p>
+        </p:txBody>
+      </p:sp>
+      <p:sp>
+        <p:nvSpPr>
+          <p:cNvPr id="10" name="Text 8"/>
+          <p:cNvSpPr txBox="1"/>
+          <p:nvPr/>
+        </p:nvSpPr>
+        <p:spPr>
+          <a:xfrm>
+            <a:off x="6644488" y="2514600"/>
+            <a:ext cx="4587088" cy="548640"/>
+          </a:xfrm>
+          <a:prstGeom prst="rect">
+            <a:avLst/>
+          </a:prstGeom>
+          <a:noFill/>
+          <a:ln/>
+        </p:spPr>
+        <p:txBody>
+          <a:bodyPr wrap="square" lIns="0" tIns="0" rIns="0" bIns="0" rtlCol="0" anchor="ctr"/>
+          <a:lstStyle/>
+          <a:p>
+            <a:pPr indent="0" marL="0">
+              <a:buNone/>
+            </a:pPr>
+            <a:r>
+              <a:rPr lang="en-US" sz="2600" b="1" dirty="0">
                 <a:solidFill>
                   <a:schemeClr val="bg1"/>
                 </a:solidFill>
               </a:rPr>
-              <a:t>AI findings never approve or block a PR. </a:t>
-            </a:r>
-            <a:pPr indent="0" marL="0">
-              <a:buNone/>
-            </a:pPr>
-            <a:r>
-              <a:rPr lang="en-US" sz="2200" b="1" dirty="0">
-                <a:solidFill>
-                  <a:schemeClr val="accent1"/>
-                </a:solidFill>
-              </a:rPr>
-              <a:t>A code owner always does.</a:t>
-            </a:r>
-            <a:endParaRPr lang="en-US" sz="2200" dirty="0"/>
+              <a:t>Continuous evals</a:t>
+            </a:r>
+            <a:endParaRPr lang="en-US" sz="2600" dirty="0"/>
+          </a:p>
+        </p:txBody>
+      </p:sp>
+      <p:sp>
+        <p:nvSpPr>
+          <p:cNvPr id="11" name="Text 9"/>
+          <p:cNvSpPr txBox="1"/>
+          <p:nvPr/>
+        </p:nvSpPr>
+        <p:spPr>
+          <a:xfrm>
+            <a:off x="6644488" y="3246120"/>
+            <a:ext cx="4587088" cy="2743200"/>
+          </a:xfrm>
+          <a:prstGeom prst="rect">
+            <a:avLst/>
+          </a:prstGeom>
+          <a:noFill/>
+          <a:ln/>
+        </p:spPr>
+        <p:txBody>
+          <a:bodyPr wrap="square" lIns="0" tIns="0" rIns="0" bIns="0" rtlCol="0" anchor="t"/>
+          <a:lstStyle/>
+          <a:p>
+            <a:pPr marL="342900" indent="-342900">
+              <a:spcAft>
+                <a:spcPts val="1000"/>
+              </a:spcAft>
+              <a:buSzPct val="100000"/>
+              <a:buChar char="•"/>
+            </a:pPr>
+            <a:r>
+              <a:rPr lang="en-US" sz="1800" dirty="0">
+                <a:solidFill>
+                  <a:schemeClr val="accent6"/>
+                </a:solidFill>
+              </a:rPr>
+              <a:t>20 to 50 real tasks with accepted outcomes</a:t>
+            </a:r>
+            <a:endParaRPr lang="en-US" sz="1800" dirty="0"/>
+          </a:p>
+          <a:p>
+            <a:pPr marL="342900" indent="-342900">
+              <a:spcAft>
+                <a:spcPts val="1000"/>
+              </a:spcAft>
+              <a:buSzPct val="100000"/>
+              <a:buChar char="•"/>
+            </a:pPr>
+            <a:r>
+              <a:rPr lang="en-US" sz="1800" dirty="0">
+                <a:solidFill>
+                  <a:schemeClr val="accent6"/>
+                </a:solidFill>
+              </a:rPr>
+              <a:t>Run when AGENTS.md, skills or hooks change</a:t>
+            </a:r>
+            <a:endParaRPr lang="en-US" sz="1800" dirty="0"/>
+          </a:p>
+          <a:p>
+            <a:pPr marL="342900" indent="-342900">
+              <a:spcAft>
+                <a:spcPts val="1000"/>
+              </a:spcAft>
+              <a:buSzPct val="100000"/>
+              <a:buChar char="•"/>
+            </a:pPr>
+            <a:r>
+              <a:rPr lang="en-US" sz="1800" dirty="0">
+                <a:solidFill>
+                  <a:schemeClr val="accent6"/>
+                </a:solidFill>
+              </a:rPr>
+              <a:t>A drop in pass rate is reviewed before merge</a:t>
+            </a:r>
+            <a:endParaRPr lang="en-US" sz="1800" dirty="0"/>
+          </a:p>
+          <a:p>
+            <a:pPr marL="342900" indent="-342900">
+              <a:spcAft>
+                <a:spcPts val="1000"/>
+              </a:spcAft>
+              <a:buSzPct val="100000"/>
+              <a:buChar char="•"/>
+            </a:pPr>
+            <a:r>
+              <a:rPr lang="en-US" sz="1800" dirty="0">
+                <a:solidFill>
+                  <a:schemeClr val="accent6"/>
+                </a:solidFill>
+              </a:rPr>
+              <a:t>Every incident becomes a new eval</a:t>
+            </a:r>
+            <a:endParaRPr lang="en-US" sz="1800" dirty="0"/>
           </a:p>
         </p:txBody>
       </p:sp>
@@ -3769,7 +4127,7 @@
                   <a:schemeClr val="accent2"/>
                 </a:solidFill>
               </a:rPr>
-              <a:t>STAGE 6 · MAINTAIN</a:t>
+              <a:t>STAGE 5 · DEPLOY</a:t>
             </a:r>
             <a:endParaRPr lang="en-US" sz="1400" dirty="0"/>
           </a:p>
@@ -3807,7 +4165,7 @@
                   <a:schemeClr val="tx1"/>
                 </a:solidFill>
               </a:rPr>
-              <a:t>Production problems restart the loop on their own</a:t>
+              <a:t>The agent checks and fixes. Humans approve.</a:t>
             </a:r>
             <a:endParaRPr lang="en-US" sz="3400" dirty="0"/>
           </a:p>
@@ -3815,18 +4173,18 @@
       </p:sp>
       <p:sp>
         <p:nvSpPr>
-          <p:cNvPr id="4" name="1σ tier"/>
+          <p:cNvPr id="4" name="REVIEW.md card"/>
           <p:cNvSpPr/>
           <p:nvPr/>
         </p:nvSpPr>
         <p:spPr>
           <a:xfrm>
-            <a:off x="548640" y="2560320"/>
-            <a:ext cx="3515258" cy="2194560"/>
+            <a:off x="548640" y="1828800"/>
+            <a:ext cx="5410048" cy="2103120"/>
           </a:xfrm>
           <a:prstGeom prst="roundRect">
             <a:avLst>
-              <a:gd name="adj" fmla="val 5000"/>
+              <a:gd name="adj" fmla="val 5217"/>
             </a:avLst>
           </a:prstGeom>
           <a:solidFill>
@@ -3848,8 +4206,8 @@
         </p:nvSpPr>
         <p:spPr>
           <a:xfrm>
-            <a:off x="914400" y="2834640"/>
-            <a:ext cx="2783738" cy="640080"/>
+            <a:off x="914400" y="2103120"/>
+            <a:ext cx="4678528" cy="502920"/>
           </a:xfrm>
           <a:prstGeom prst="rect">
             <a:avLst/>
@@ -3865,14 +4223,14 @@
               <a:buNone/>
             </a:pPr>
             <a:r>
-              <a:rPr lang="en-US" sz="3200" b="1" dirty="0">
-                <a:solidFill>
-                  <a:schemeClr val="tx2"/>
-                </a:solidFill>
-              </a:rPr>
-              <a:t>1σ</a:t>
-            </a:r>
-            <a:endParaRPr lang="en-US" sz="3200" dirty="0"/>
+              <a:rPr lang="en-US" sz="2200" b="1" dirty="0">
+                <a:solidFill>
+                  <a:schemeClr val="tx1"/>
+                </a:solidFill>
+              </a:rPr>
+              <a:t>REVIEW.md</a:t>
+            </a:r>
+            <a:endParaRPr lang="en-US" sz="2200" dirty="0"/>
           </a:p>
         </p:txBody>
       </p:sp>
@@ -3884,8 +4242,8 @@
         </p:nvSpPr>
         <p:spPr>
           <a:xfrm>
-            <a:off x="914400" y="3474720"/>
-            <a:ext cx="2783738" cy="411480"/>
+            <a:off x="914400" y="2697480"/>
+            <a:ext cx="4678528" cy="1097280"/>
           </a:xfrm>
           <a:prstGeom prst="rect">
             <a:avLst/>
@@ -3894,42 +4252,6 @@
           <a:ln/>
         </p:spPr>
         <p:txBody>
-          <a:bodyPr wrap="square" lIns="0" tIns="0" rIns="0" bIns="0" rtlCol="0" anchor="ctr"/>
-          <a:lstStyle/>
-          <a:p>
-            <a:pPr indent="0" marL="0">
-              <a:buNone/>
-            </a:pPr>
-            <a:r>
-              <a:rPr lang="en-US" sz="2000" b="1" dirty="0">
-                <a:solidFill>
-                  <a:schemeClr val="tx1"/>
-                </a:solidFill>
-              </a:rPr>
-              <a:t>A little unusual</a:t>
-            </a:r>
-            <a:endParaRPr lang="en-US" sz="2000" dirty="0"/>
-          </a:p>
-        </p:txBody>
-      </p:sp>
-      <p:sp>
-        <p:nvSpPr>
-          <p:cNvPr id="7" name="Text 5"/>
-          <p:cNvSpPr txBox="1"/>
-          <p:nvPr/>
-        </p:nvSpPr>
-        <p:spPr>
-          <a:xfrm>
-            <a:off x="914400" y="3931920"/>
-            <a:ext cx="2783738" cy="640080"/>
-          </a:xfrm>
-          <a:prstGeom prst="rect">
-            <a:avLst/>
-          </a:prstGeom>
-          <a:noFill/>
-          <a:ln/>
-        </p:spPr>
-        <p:txBody>
           <a:bodyPr wrap="square" lIns="0" tIns="0" rIns="0" bIns="0" rtlCol="0" anchor="t"/>
           <a:lstStyle/>
           <a:p>
@@ -3942,7 +4264,7 @@
                   <a:schemeClr val="tx2"/>
                 </a:solidFill>
               </a:rPr>
-              <a:t>Log it</a:t>
+              <a:t>Every PR gets three passes: bugs, security and compliance with the spec and plan. Findings are ranked Important or Nit.</a:t>
             </a:r>
             <a:endParaRPr lang="en-US" sz="1700" dirty="0"/>
           </a:p>
@@ -3950,26 +4272,26 @@
       </p:sp>
       <p:sp>
         <p:nvSpPr>
-          <p:cNvPr id="8" name="2σ tier"/>
+          <p:cNvPr id="7" name="Hooks as gates card"/>
           <p:cNvSpPr/>
           <p:nvPr/>
         </p:nvSpPr>
         <p:spPr>
           <a:xfrm>
-            <a:off x="4338218" y="2194560"/>
-            <a:ext cx="3515258" cy="2560320"/>
+            <a:off x="6233008" y="1828800"/>
+            <a:ext cx="5410048" cy="2103120"/>
           </a:xfrm>
           <a:prstGeom prst="roundRect">
             <a:avLst>
-              <a:gd name="adj" fmla="val 4286"/>
+              <a:gd name="adj" fmla="val 5217"/>
             </a:avLst>
           </a:prstGeom>
           <a:solidFill>
-            <a:schemeClr val="accent5"/>
+            <a:schemeClr val="bg2"/>
           </a:solidFill>
           <a:ln w="12700">
             <a:solidFill>
-              <a:schemeClr val="accent5"/>
+              <a:schemeClr val="bg2"/>
             </a:solidFill>
             <a:prstDash val="solid"/>
           </a:ln>
@@ -3977,14 +4299,50 @@
       </p:sp>
       <p:sp>
         <p:nvSpPr>
+          <p:cNvPr id="8" name="Text 6"/>
+          <p:cNvSpPr txBox="1"/>
+          <p:nvPr/>
+        </p:nvSpPr>
+        <p:spPr>
+          <a:xfrm>
+            <a:off x="6598768" y="2103120"/>
+            <a:ext cx="4678528" cy="502920"/>
+          </a:xfrm>
+          <a:prstGeom prst="rect">
+            <a:avLst/>
+          </a:prstGeom>
+          <a:noFill/>
+          <a:ln/>
+        </p:spPr>
+        <p:txBody>
+          <a:bodyPr wrap="square" lIns="0" tIns="0" rIns="0" bIns="0" rtlCol="0" anchor="ctr"/>
+          <a:lstStyle/>
+          <a:p>
+            <a:pPr indent="0" marL="0">
+              <a:buNone/>
+            </a:pPr>
+            <a:r>
+              <a:rPr lang="en-US" sz="2200" b="1" dirty="0">
+                <a:solidFill>
+                  <a:schemeClr val="tx1"/>
+                </a:solidFill>
+              </a:rPr>
+              <a:t>Hooks as gates</a:t>
+            </a:r>
+            <a:endParaRPr lang="en-US" sz="2200" dirty="0"/>
+          </a:p>
+        </p:txBody>
+      </p:sp>
+      <p:sp>
+        <p:nvSpPr>
           <p:cNvPr id="9" name="Text 7"/>
           <p:cNvSpPr txBox="1"/>
           <p:nvPr/>
         </p:nvSpPr>
         <p:spPr>
           <a:xfrm>
-            <a:off x="4703978" y="2468880"/>
-            <a:ext cx="2783738" cy="640080"/>
+            <a:off x="6598768" y="2697480"/>
+            <a:ext cx="4678528" cy="1097280"/>
           </a:xfrm>
           <a:prstGeom prst="rect">
             <a:avLst/>
@@ -3993,78 +4351,6 @@
           <a:ln/>
         </p:spPr>
         <p:txBody>
-          <a:bodyPr wrap="square" lIns="0" tIns="0" rIns="0" bIns="0" rtlCol="0" anchor="ctr"/>
-          <a:lstStyle/>
-          <a:p>
-            <a:pPr indent="0" marL="0">
-              <a:buNone/>
-            </a:pPr>
-            <a:r>
-              <a:rPr lang="en-US" sz="3200" b="1" dirty="0">
-                <a:solidFill>
-                  <a:schemeClr val="tx1"/>
-                </a:solidFill>
-              </a:rPr>
-              <a:t>2σ</a:t>
-            </a:r>
-            <a:endParaRPr lang="en-US" sz="3200" dirty="0"/>
-          </a:p>
-        </p:txBody>
-      </p:sp>
-      <p:sp>
-        <p:nvSpPr>
-          <p:cNvPr id="10" name="Text 8"/>
-          <p:cNvSpPr txBox="1"/>
-          <p:nvPr/>
-        </p:nvSpPr>
-        <p:spPr>
-          <a:xfrm>
-            <a:off x="4703978" y="3108960"/>
-            <a:ext cx="2783738" cy="411480"/>
-          </a:xfrm>
-          <a:prstGeom prst="rect">
-            <a:avLst/>
-          </a:prstGeom>
-          <a:noFill/>
-          <a:ln/>
-        </p:spPr>
-        <p:txBody>
-          <a:bodyPr wrap="square" lIns="0" tIns="0" rIns="0" bIns="0" rtlCol="0" anchor="ctr"/>
-          <a:lstStyle/>
-          <a:p>
-            <a:pPr indent="0" marL="0">
-              <a:buNone/>
-            </a:pPr>
-            <a:r>
-              <a:rPr lang="en-US" sz="2000" b="1" dirty="0">
-                <a:solidFill>
-                  <a:schemeClr val="tx1"/>
-                </a:solidFill>
-              </a:rPr>
-              <a:t>Quite unusual</a:t>
-            </a:r>
-            <a:endParaRPr lang="en-US" sz="2000" dirty="0"/>
-          </a:p>
-        </p:txBody>
-      </p:sp>
-      <p:sp>
-        <p:nvSpPr>
-          <p:cNvPr id="11" name="Text 9"/>
-          <p:cNvSpPr txBox="1"/>
-          <p:nvPr/>
-        </p:nvSpPr>
-        <p:spPr>
-          <a:xfrm>
-            <a:off x="4703978" y="3566160"/>
-            <a:ext cx="2783738" cy="1005840"/>
-          </a:xfrm>
-          <a:prstGeom prst="rect">
-            <a:avLst/>
-          </a:prstGeom>
-          <a:noFill/>
-          <a:ln/>
-        </p:spPr>
-        <p:txBody>
           <a:bodyPr wrap="square" lIns="0" tIns="0" rIns="0" bIns="0" rtlCol="0" anchor="t"/>
           <a:lstStyle/>
           <a:p>
@@ -4074,10 +4360,10 @@
             <a:r>
               <a:rPr lang="en-US" sz="1700" dirty="0">
                 <a:solidFill>
-                  <a:schemeClr val="tx1"/>
-                </a:solidFill>
-              </a:rPr>
-              <a:t>The agent investigates, read-only</a:t>
+                  <a:schemeClr val="tx2"/>
+                </a:solidFill>
+              </a:rPr>
+              <a:t>A production deploy is blocked until a release approval exists, every time, for everyone.</a:t>
             </a:r>
             <a:endParaRPr lang="en-US" sz="1700" dirty="0"/>
           </a:p>
@@ -4085,18 +4371,18 @@
       </p:sp>
       <p:sp>
         <p:nvSpPr>
-          <p:cNvPr id="12" name="3σ tier"/>
+          <p:cNvPr id="10" name="Approval callout"/>
           <p:cNvSpPr/>
           <p:nvPr/>
         </p:nvSpPr>
         <p:spPr>
           <a:xfrm>
-            <a:off x="8127797" y="1828800"/>
-            <a:ext cx="3515258" cy="2926080"/>
+            <a:off x="548640" y="4297680"/>
+            <a:ext cx="11094415" cy="1005840"/>
           </a:xfrm>
           <a:prstGeom prst="roundRect">
             <a:avLst>
-              <a:gd name="adj" fmla="val 3750"/>
+              <a:gd name="adj" fmla="val 10909"/>
             </a:avLst>
           </a:prstGeom>
           <a:solidFill>
@@ -4112,14 +4398,14 @@
       </p:sp>
       <p:sp>
         <p:nvSpPr>
-          <p:cNvPr id="13" name="Text 11"/>
+          <p:cNvPr id="11" name="Text 9"/>
           <p:cNvSpPr txBox="1"/>
           <p:nvPr/>
         </p:nvSpPr>
         <p:spPr>
           <a:xfrm>
-            <a:off x="8493557" y="2103120"/>
-            <a:ext cx="2783738" cy="640080"/>
+            <a:off x="960120" y="4297680"/>
+            <a:ext cx="10271455" cy="1005840"/>
           </a:xfrm>
           <a:prstGeom prst="rect">
             <a:avLst/>
@@ -4135,122 +4421,25 @@
               <a:buNone/>
             </a:pPr>
             <a:r>
-              <a:rPr lang="en-US" sz="3200" b="1" dirty="0">
+              <a:rPr lang="en-US" sz="2200" dirty="0">
+                <a:solidFill>
+                  <a:schemeClr val="bg1"/>
+                </a:solidFill>
+              </a:rPr>
+              <a:t>AI findings never approve or block a PR. </a:t>
+            </a:r>
+            <a:pPr indent="0" marL="0">
+              <a:buNone/>
+            </a:pPr>
+            <a:r>
+              <a:rPr lang="en-US" sz="2200" b="1" dirty="0">
                 <a:solidFill>
                   <a:schemeClr val="accent1"/>
                 </a:solidFill>
               </a:rPr>
-              <a:t>3σ</a:t>
-            </a:r>
-            <a:endParaRPr lang="en-US" sz="3200" dirty="0"/>
-          </a:p>
-        </p:txBody>
-      </p:sp>
-      <p:sp>
-        <p:nvSpPr>
-          <p:cNvPr id="14" name="Text 12"/>
-          <p:cNvSpPr txBox="1"/>
-          <p:nvPr/>
-        </p:nvSpPr>
-        <p:spPr>
-          <a:xfrm>
-            <a:off x="8493557" y="2743200"/>
-            <a:ext cx="2783738" cy="411480"/>
-          </a:xfrm>
-          <a:prstGeom prst="rect">
-            <a:avLst/>
-          </a:prstGeom>
-          <a:noFill/>
-          <a:ln/>
-        </p:spPr>
-        <p:txBody>
-          <a:bodyPr wrap="square" lIns="0" tIns="0" rIns="0" bIns="0" rtlCol="0" anchor="ctr"/>
-          <a:lstStyle/>
-          <a:p>
-            <a:pPr indent="0" marL="0">
-              <a:buNone/>
-            </a:pPr>
-            <a:r>
-              <a:rPr lang="en-US" sz="2000" b="1" dirty="0">
-                <a:solidFill>
-                  <a:schemeClr val="bg1"/>
-                </a:solidFill>
-              </a:rPr>
-              <a:t>Very unusual</a:t>
-            </a:r>
-            <a:endParaRPr lang="en-US" sz="2000" dirty="0"/>
-          </a:p>
-        </p:txBody>
-      </p:sp>
-      <p:sp>
-        <p:nvSpPr>
-          <p:cNvPr id="15" name="Text 13"/>
-          <p:cNvSpPr txBox="1"/>
-          <p:nvPr/>
-        </p:nvSpPr>
-        <p:spPr>
-          <a:xfrm>
-            <a:off x="8493557" y="3200400"/>
-            <a:ext cx="2783738" cy="1371600"/>
-          </a:xfrm>
-          <a:prstGeom prst="rect">
-            <a:avLst/>
-          </a:prstGeom>
-          <a:noFill/>
-          <a:ln/>
-        </p:spPr>
-        <p:txBody>
-          <a:bodyPr wrap="square" lIns="0" tIns="0" rIns="0" bIns="0" rtlCol="0" anchor="t"/>
-          <a:lstStyle/>
-          <a:p>
-            <a:pPr indent="0" marL="0">
-              <a:buNone/>
-            </a:pPr>
-            <a:r>
-              <a:rPr lang="en-US" sz="1700" dirty="0">
-                <a:solidFill>
-                  <a:schemeClr val="accent6"/>
-                </a:solidFill>
-              </a:rPr>
-              <a:t>The agent acts, only through a PR or an approved runbook</a:t>
-            </a:r>
-            <a:endParaRPr lang="en-US" sz="1700" dirty="0"/>
-          </a:p>
-        </p:txBody>
-      </p:sp>
-      <p:sp>
-        <p:nvSpPr>
-          <p:cNvPr id="16" name="Text 14"/>
-          <p:cNvSpPr txBox="1"/>
-          <p:nvPr/>
-        </p:nvSpPr>
-        <p:spPr>
-          <a:xfrm>
-            <a:off x="548640" y="5029200"/>
-            <a:ext cx="11094415" cy="914400"/>
-          </a:xfrm>
-          <a:prstGeom prst="rect">
-            <a:avLst/>
-          </a:prstGeom>
-          <a:noFill/>
-          <a:ln/>
-        </p:spPr>
-        <p:txBody>
-          <a:bodyPr wrap="square" lIns="0" tIns="0" rIns="0" bIns="0" rtlCol="0" anchor="t"/>
-          <a:lstStyle/>
-          <a:p>
-            <a:pPr indent="0" marL="0">
-              <a:buNone/>
-            </a:pPr>
-            <a:r>
-              <a:rPr lang="en-US" sz="1900" dirty="0">
-                <a:solidFill>
-                  <a:schemeClr val="tx2"/>
-                </a:solidFill>
-              </a:rPr>
-              <a:t>A simple script, not AI, watches the metric. The agent writes what it finds as a new intent.md, and a person triages it: fix now, schedule or dismiss.</a:t>
-            </a:r>
-            <a:endParaRPr lang="en-US" sz="1900" dirty="0"/>
+              <a:t>A code owner always does.</a:t>
+            </a:r>
+            <a:endParaRPr lang="en-US" sz="2200" dirty="0"/>
           </a:p>
         </p:txBody>
       </p:sp>
@@ -4329,7 +4518,45 @@
           <p:cNvPr id="2" name="Text 0"/>
           <p:cNvSpPr/>
           <p:nvPr>
-            <p:ph idx="100" type="title" hasCustomPrompt="1"/>
+            <p:ph idx="100" type="body" hasCustomPrompt="1"/>
+          </p:nvPr>
+        </p:nvSpPr>
+        <p:spPr>
+          <a:xfrm>
+            <a:off x="548640" y="457200"/>
+            <a:ext cx="11094415" cy="365760"/>
+          </a:xfrm>
+          <a:prstGeom prst="rect">
+            <a:avLst/>
+          </a:prstGeom>
+          <a:noFill/>
+          <a:ln/>
+        </p:spPr>
+        <p:txBody>
+          <a:bodyPr wrap="square" lIns="0" tIns="0" rIns="0" bIns="0" rtlCol="0" anchor="ctr"/>
+          <a:lstStyle/>
+          <a:p>
+            <a:pPr indent="0" marL="0">
+              <a:buNone/>
+            </a:pPr>
+            <a:r>
+              <a:rPr lang="en-US" sz="1400" b="1" spc="300" kern="0" dirty="0">
+                <a:solidFill>
+                  <a:schemeClr val="accent2"/>
+                </a:solidFill>
+              </a:rPr>
+              <a:t>STAGE 6 · MAINTAIN</a:t>
+            </a:r>
+            <a:endParaRPr lang="en-US" sz="1400" dirty="0"/>
+          </a:p>
+        </p:txBody>
+      </p:sp>
+      <p:sp>
+        <p:nvSpPr>
+          <p:cNvPr id="3" name="Text 0"/>
+          <p:cNvSpPr/>
+          <p:nvPr>
+            <p:ph idx="101" type="title" hasCustomPrompt="1"/>
           </p:nvPr>
         </p:nvSpPr>
         <p:spPr>
@@ -4353,10 +4580,10 @@
             <a:r>
               <a:rPr lang="en-US" sz="3400" b="1" dirty="0">
                 <a:solidFill>
-                  <a:schemeClr val="bg1"/>
-                </a:solidFill>
-              </a:rPr>
-              <a:t>The SDLC becomes a loop</a:t>
+                  <a:schemeClr val="tx1"/>
+                </a:solidFill>
+              </a:rPr>
+              <a:t>Production problems restart the loop on their own</a:t>
             </a:r>
             <a:endParaRPr lang="en-US" sz="3400" dirty="0"/>
           </a:p>
@@ -4364,41 +4591,101 @@
       </p:sp>
       <p:sp>
         <p:nvSpPr>
-          <p:cNvPr id="3" name="Plan step"/>
+          <p:cNvPr id="4" name="Text 2"/>
+          <p:cNvSpPr txBox="1"/>
+          <p:nvPr/>
+        </p:nvSpPr>
+        <p:spPr>
+          <a:xfrm>
+            <a:off x="548640" y="1783080"/>
+            <a:ext cx="11094415" cy="274320"/>
+          </a:xfrm>
+          <a:prstGeom prst="rect">
+            <a:avLst/>
+          </a:prstGeom>
+          <a:noFill/>
+          <a:ln/>
+        </p:spPr>
+        <p:txBody>
+          <a:bodyPr wrap="square" lIns="0" tIns="0" rIns="0" bIns="0" rtlCol="0" anchor="ctr"/>
+          <a:lstStyle/>
+          <a:p>
+            <a:pPr indent="0" marL="0">
+              <a:buNone/>
+            </a:pPr>
+            <a:r>
+              <a:rPr lang="en-US" sz="1200" b="1" spc="200" kern="0" dirty="0">
+                <a:solidFill>
+                  <a:schemeClr val="tx2"/>
+                </a:solidFill>
+              </a:rPr>
+              <a:t>A TRIGGER STARTS THE AGENT</a:t>
+            </a:r>
+            <a:endParaRPr lang="en-US" sz="1200" dirty="0"/>
+          </a:p>
+        </p:txBody>
+      </p:sp>
+      <p:sp>
+        <p:nvSpPr>
+          <p:cNvPr id="5" name="Trigger 1"/>
           <p:cNvSpPr/>
           <p:nvPr/>
         </p:nvSpPr>
         <p:spPr>
           <a:xfrm>
-            <a:off x="548640" y="2468880"/>
-            <a:ext cx="1544269" cy="1371600"/>
+            <a:off x="548640" y="2148840"/>
+            <a:ext cx="2567864" cy="1463040"/>
           </a:xfrm>
           <a:prstGeom prst="roundRect">
             <a:avLst>
-              <a:gd name="adj" fmla="val 8000"/>
+              <a:gd name="adj" fmla="val 7500"/>
             </a:avLst>
           </a:prstGeom>
           <a:solidFill>
-            <a:schemeClr val="accent3"/>
+            <a:schemeClr val="bg2"/>
           </a:solidFill>
           <a:ln w="12700">
             <a:solidFill>
-              <a:schemeClr val="accent3"/>
+              <a:schemeClr val="bg2"/>
             </a:solidFill>
             <a:prstDash val="solid"/>
           </a:ln>
         </p:spPr>
       </p:sp>
-      <p:sp>
-        <p:nvSpPr>
-          <p:cNvPr id="4" name="Text 2"/>
+      <p:pic>
+        <p:nvPicPr>
+          <p:cNvPr id="6" name="Image 0" descr="A number moves outside its normal range icon">    </p:cNvPr>
+          <p:cNvPicPr>
+            <a:picLocks noChangeAspect="1"/>
+          </p:cNvPicPr>
+          <p:nvPr/>
+        </p:nvPicPr>
+        <p:blipFill>
+          <a:blip r:embed="rId1"/>
+          <a:stretch>
+            <a:fillRect/>
+          </a:stretch>
+        </p:blipFill>
+        <p:spPr>
+          <a:xfrm>
+            <a:off x="822960" y="2331720"/>
+            <a:ext cx="384048" cy="384048"/>
+          </a:xfrm>
+          <a:prstGeom prst="rect">
+            <a:avLst/>
+          </a:prstGeom>
+        </p:spPr>
+      </p:pic>
+      <p:sp>
+        <p:nvSpPr>
+          <p:cNvPr id="7" name="Text 4"/>
           <p:cNvSpPr txBox="1"/>
           <p:nvPr/>
         </p:nvSpPr>
         <p:spPr>
           <a:xfrm>
-            <a:off x="548640" y="2697480"/>
-            <a:ext cx="1544269" cy="457200"/>
+            <a:off x="822960" y="2834640"/>
+            <a:ext cx="2019224" cy="640080"/>
           </a:xfrm>
           <a:prstGeom prst="rect">
             <a:avLst/>
@@ -4407,122 +4694,172 @@
           <a:ln/>
         </p:spPr>
         <p:txBody>
-          <a:bodyPr wrap="square" lIns="0" tIns="0" rIns="0" bIns="0" rtlCol="0" anchor="ctr"/>
-          <a:lstStyle/>
-          <a:p>
-            <a:pPr algn="ctr" indent="0" marL="0">
-              <a:buNone/>
-            </a:pPr>
-            <a:r>
-              <a:rPr lang="en-US" sz="2000" b="1" dirty="0">
-                <a:solidFill>
-                  <a:schemeClr val="bg1"/>
-                </a:solidFill>
-              </a:rPr>
-              <a:t>Plan</a:t>
-            </a:r>
-            <a:endParaRPr lang="en-US" sz="2000" dirty="0"/>
-          </a:p>
-        </p:txBody>
-      </p:sp>
-      <p:sp>
-        <p:nvSpPr>
-          <p:cNvPr id="5" name="Text 3"/>
-          <p:cNvSpPr txBox="1"/>
-          <p:nvPr/>
-        </p:nvSpPr>
-        <p:spPr>
-          <a:xfrm>
-            <a:off x="548640" y="3200400"/>
-            <a:ext cx="1544269" cy="411480"/>
-          </a:xfrm>
-          <a:prstGeom prst="rect">
-            <a:avLst/>
-          </a:prstGeom>
-          <a:noFill/>
-          <a:ln/>
-        </p:spPr>
-        <p:txBody>
-          <a:bodyPr wrap="square" lIns="0" tIns="0" rIns="0" bIns="0" rtlCol="0" anchor="ctr"/>
-          <a:lstStyle/>
-          <a:p>
-            <a:pPr algn="ctr" indent="0" marL="0">
-              <a:buNone/>
-            </a:pPr>
-            <a:r>
-              <a:rPr lang="en-US" sz="1500" dirty="0">
-                <a:solidFill>
-                  <a:schemeClr val="accent4"/>
-                </a:solidFill>
-              </a:rPr>
-              <a:t>intent.md</a:t>
-            </a:r>
-            <a:endParaRPr lang="en-US" sz="1500" dirty="0"/>
-          </a:p>
-        </p:txBody>
-      </p:sp>
-      <p:sp>
-        <p:nvSpPr>
-          <p:cNvPr id="6" name="Arrow 1"/>
+          <a:bodyPr wrap="square" lIns="0" tIns="0" rIns="0" bIns="0" rtlCol="0" anchor="t"/>
+          <a:lstStyle/>
+          <a:p>
+            <a:pPr indent="0" marL="0">
+              <a:buNone/>
+            </a:pPr>
+            <a:r>
+              <a:rPr lang="en-US" sz="1600" dirty="0">
+                <a:solidFill>
+                  <a:schemeClr val="tx1"/>
+                </a:solidFill>
+              </a:rPr>
+              <a:t>A number moves outside its normal range</a:t>
+            </a:r>
+            <a:endParaRPr lang="en-US" sz="1600" dirty="0"/>
+          </a:p>
+        </p:txBody>
+      </p:sp>
+      <p:sp>
+        <p:nvSpPr>
+          <p:cNvPr id="8" name="Trigger 2"/>
           <p:cNvSpPr/>
           <p:nvPr/>
         </p:nvSpPr>
         <p:spPr>
           <a:xfrm>
-            <a:off x="2166061" y="3044952"/>
-            <a:ext cx="219456" cy="219456"/>
-          </a:xfrm>
-          <a:prstGeom prst="rightArrow">
-            <a:avLst/>
+            <a:off x="3390824" y="2148840"/>
+            <a:ext cx="2567864" cy="1463040"/>
+          </a:xfrm>
+          <a:prstGeom prst="roundRect">
+            <a:avLst>
+              <a:gd name="adj" fmla="val 7500"/>
+            </a:avLst>
           </a:prstGeom>
           <a:solidFill>
-            <a:schemeClr val="accent1"/>
+            <a:schemeClr val="bg2"/>
           </a:solidFill>
           <a:ln w="12700">
             <a:solidFill>
-              <a:schemeClr val="accent1"/>
+              <a:schemeClr val="bg2"/>
             </a:solidFill>
             <a:prstDash val="solid"/>
           </a:ln>
         </p:spPr>
       </p:sp>
-      <p:sp>
-        <p:nvSpPr>
-          <p:cNvPr id="7" name="Design step"/>
+      <p:pic>
+        <p:nvPicPr>
+          <p:cNvPr id="9" name="Image 1" descr="A ticket is opened icon">    </p:cNvPr>
+          <p:cNvPicPr>
+            <a:picLocks noChangeAspect="1"/>
+          </p:cNvPicPr>
+          <p:nvPr/>
+        </p:nvPicPr>
+        <p:blipFill>
+          <a:blip r:embed="rId2"/>
+          <a:stretch>
+            <a:fillRect/>
+          </a:stretch>
+        </p:blipFill>
+        <p:spPr>
+          <a:xfrm>
+            <a:off x="3665144" y="2331720"/>
+            <a:ext cx="384048" cy="384048"/>
+          </a:xfrm>
+          <a:prstGeom prst="rect">
+            <a:avLst/>
+          </a:prstGeom>
+        </p:spPr>
+      </p:pic>
+      <p:sp>
+        <p:nvSpPr>
+          <p:cNvPr id="10" name="Text 6"/>
+          <p:cNvSpPr txBox="1"/>
+          <p:nvPr/>
+        </p:nvSpPr>
+        <p:spPr>
+          <a:xfrm>
+            <a:off x="3665144" y="2834640"/>
+            <a:ext cx="2019224" cy="640080"/>
+          </a:xfrm>
+          <a:prstGeom prst="rect">
+            <a:avLst/>
+          </a:prstGeom>
+          <a:noFill/>
+          <a:ln/>
+        </p:spPr>
+        <p:txBody>
+          <a:bodyPr wrap="square" lIns="0" tIns="0" rIns="0" bIns="0" rtlCol="0" anchor="t"/>
+          <a:lstStyle/>
+          <a:p>
+            <a:pPr indent="0" marL="0">
+              <a:buNone/>
+            </a:pPr>
+            <a:r>
+              <a:rPr lang="en-US" sz="1600" dirty="0">
+                <a:solidFill>
+                  <a:schemeClr val="tx1"/>
+                </a:solidFill>
+              </a:rPr>
+              <a:t>A ticket is opened</a:t>
+            </a:r>
+            <a:endParaRPr lang="en-US" sz="1600" dirty="0"/>
+          </a:p>
+        </p:txBody>
+      </p:sp>
+      <p:sp>
+        <p:nvSpPr>
+          <p:cNvPr id="11" name="Trigger 3"/>
           <p:cNvSpPr/>
           <p:nvPr/>
         </p:nvSpPr>
         <p:spPr>
           <a:xfrm>
-            <a:off x="2458669" y="2468880"/>
-            <a:ext cx="1544269" cy="1371600"/>
+            <a:off x="6233008" y="2148840"/>
+            <a:ext cx="2567864" cy="1463040"/>
           </a:xfrm>
           <a:prstGeom prst="roundRect">
             <a:avLst>
-              <a:gd name="adj" fmla="val 8000"/>
+              <a:gd name="adj" fmla="val 7500"/>
             </a:avLst>
           </a:prstGeom>
           <a:solidFill>
-            <a:schemeClr val="accent3"/>
+            <a:schemeClr val="bg2"/>
           </a:solidFill>
           <a:ln w="12700">
             <a:solidFill>
-              <a:schemeClr val="accent3"/>
+              <a:schemeClr val="bg2"/>
             </a:solidFill>
             <a:prstDash val="solid"/>
           </a:ln>
         </p:spPr>
       </p:sp>
-      <p:sp>
-        <p:nvSpPr>
-          <p:cNvPr id="8" name="Text 6"/>
+      <p:pic>
+        <p:nvPicPr>
+          <p:cNvPr id="12" name="Image 2" descr="A message arrives in a team channel icon">    </p:cNvPr>
+          <p:cNvPicPr>
+            <a:picLocks noChangeAspect="1"/>
+          </p:cNvPicPr>
+          <p:nvPr/>
+        </p:nvPicPr>
+        <p:blipFill>
+          <a:blip r:embed="rId3"/>
+          <a:stretch>
+            <a:fillRect/>
+          </a:stretch>
+        </p:blipFill>
+        <p:spPr>
+          <a:xfrm>
+            <a:off x="6507328" y="2331720"/>
+            <a:ext cx="384048" cy="384048"/>
+          </a:xfrm>
+          <a:prstGeom prst="rect">
+            <a:avLst/>
+          </a:prstGeom>
+        </p:spPr>
+      </p:pic>
+      <p:sp>
+        <p:nvSpPr>
+          <p:cNvPr id="13" name="Text 8"/>
           <p:cNvSpPr txBox="1"/>
           <p:nvPr/>
         </p:nvSpPr>
         <p:spPr>
           <a:xfrm>
-            <a:off x="2458669" y="2697480"/>
-            <a:ext cx="1544269" cy="457200"/>
+            <a:off x="6507328" y="2834640"/>
+            <a:ext cx="2019224" cy="640080"/>
           </a:xfrm>
           <a:prstGeom prst="rect">
             <a:avLst/>
@@ -4531,107 +4868,133 @@
           <a:ln/>
         </p:spPr>
         <p:txBody>
-          <a:bodyPr wrap="square" lIns="0" tIns="0" rIns="0" bIns="0" rtlCol="0" anchor="ctr"/>
-          <a:lstStyle/>
-          <a:p>
-            <a:pPr algn="ctr" indent="0" marL="0">
-              <a:buNone/>
-            </a:pPr>
-            <a:r>
-              <a:rPr lang="en-US" sz="2000" b="1" dirty="0">
-                <a:solidFill>
-                  <a:schemeClr val="bg1"/>
-                </a:solidFill>
-              </a:rPr>
-              <a:t>Design</a:t>
-            </a:r>
-            <a:endParaRPr lang="en-US" sz="2000" dirty="0"/>
-          </a:p>
-        </p:txBody>
-      </p:sp>
-      <p:sp>
-        <p:nvSpPr>
-          <p:cNvPr id="9" name="Text 7"/>
-          <p:cNvSpPr txBox="1"/>
-          <p:nvPr/>
-        </p:nvSpPr>
-        <p:spPr>
-          <a:xfrm>
-            <a:off x="2458669" y="3200400"/>
-            <a:ext cx="1544269" cy="411480"/>
-          </a:xfrm>
-          <a:prstGeom prst="rect">
-            <a:avLst/>
-          </a:prstGeom>
-          <a:noFill/>
-          <a:ln/>
-        </p:spPr>
-        <p:txBody>
-          <a:bodyPr wrap="square" lIns="0" tIns="0" rIns="0" bIns="0" rtlCol="0" anchor="ctr"/>
-          <a:lstStyle/>
-          <a:p>
-            <a:pPr algn="ctr" indent="0" marL="0">
-              <a:buNone/>
-            </a:pPr>
-            <a:r>
-              <a:rPr lang="en-US" sz="1500" dirty="0">
-                <a:solidFill>
-                  <a:schemeClr val="accent4"/>
-                </a:solidFill>
-              </a:rPr>
-              <a:t>spec.md</a:t>
-            </a:r>
-            <a:endParaRPr lang="en-US" sz="1500" dirty="0"/>
-          </a:p>
-        </p:txBody>
-      </p:sp>
-      <p:sp>
-        <p:nvSpPr>
-          <p:cNvPr id="10" name="Arrow 2"/>
+          <a:bodyPr wrap="square" lIns="0" tIns="0" rIns="0" bIns="0" rtlCol="0" anchor="t"/>
+          <a:lstStyle/>
+          <a:p>
+            <a:pPr indent="0" marL="0">
+              <a:buNone/>
+            </a:pPr>
+            <a:r>
+              <a:rPr lang="en-US" sz="1600" dirty="0">
+                <a:solidFill>
+                  <a:schemeClr val="tx1"/>
+                </a:solidFill>
+              </a:rPr>
+              <a:t>A message arrives in a team channel</a:t>
+            </a:r>
+            <a:endParaRPr lang="en-US" sz="1600" dirty="0"/>
+          </a:p>
+        </p:txBody>
+      </p:sp>
+      <p:sp>
+        <p:nvSpPr>
+          <p:cNvPr id="14" name="Trigger 4"/>
           <p:cNvSpPr/>
           <p:nvPr/>
         </p:nvSpPr>
         <p:spPr>
           <a:xfrm>
-            <a:off x="4076090" y="3044952"/>
-            <a:ext cx="219456" cy="219456"/>
-          </a:xfrm>
-          <a:prstGeom prst="rightArrow">
-            <a:avLst/>
+            <a:off x="9075191" y="2148840"/>
+            <a:ext cx="2567864" cy="1463040"/>
+          </a:xfrm>
+          <a:prstGeom prst="roundRect">
+            <a:avLst>
+              <a:gd name="adj" fmla="val 7500"/>
+            </a:avLst>
           </a:prstGeom>
           <a:solidFill>
-            <a:schemeClr val="accent1"/>
+            <a:schemeClr val="bg2"/>
           </a:solidFill>
           <a:ln w="12700">
             <a:solidFill>
-              <a:schemeClr val="accent1"/>
+              <a:schemeClr val="bg2"/>
             </a:solidFill>
             <a:prstDash val="solid"/>
           </a:ln>
         </p:spPr>
       </p:sp>
-      <p:sp>
-        <p:nvSpPr>
-          <p:cNvPr id="11" name="Build step"/>
+      <p:pic>
+        <p:nvPicPr>
+          <p:cNvPr id="15" name="Image 3" descr="A schedule runs icon">    </p:cNvPr>
+          <p:cNvPicPr>
+            <a:picLocks noChangeAspect="1"/>
+          </p:cNvPicPr>
+          <p:nvPr/>
+        </p:nvPicPr>
+        <p:blipFill>
+          <a:blip r:embed="rId4"/>
+          <a:stretch>
+            <a:fillRect/>
+          </a:stretch>
+        </p:blipFill>
+        <p:spPr>
+          <a:xfrm>
+            <a:off x="9349511" y="2331720"/>
+            <a:ext cx="384048" cy="384048"/>
+          </a:xfrm>
+          <a:prstGeom prst="rect">
+            <a:avLst/>
+          </a:prstGeom>
+        </p:spPr>
+      </p:pic>
+      <p:sp>
+        <p:nvSpPr>
+          <p:cNvPr id="16" name="Text 10"/>
+          <p:cNvSpPr txBox="1"/>
+          <p:nvPr/>
+        </p:nvSpPr>
+        <p:spPr>
+          <a:xfrm>
+            <a:off x="9349511" y="2834640"/>
+            <a:ext cx="2019224" cy="640080"/>
+          </a:xfrm>
+          <a:prstGeom prst="rect">
+            <a:avLst/>
+          </a:prstGeom>
+          <a:noFill/>
+          <a:ln/>
+        </p:spPr>
+        <p:txBody>
+          <a:bodyPr wrap="square" lIns="0" tIns="0" rIns="0" bIns="0" rtlCol="0" anchor="t"/>
+          <a:lstStyle/>
+          <a:p>
+            <a:pPr indent="0" marL="0">
+              <a:buNone/>
+            </a:pPr>
+            <a:r>
+              <a:rPr lang="en-US" sz="1600" dirty="0">
+                <a:solidFill>
+                  <a:schemeClr val="tx1"/>
+                </a:solidFill>
+              </a:rPr>
+              <a:t>A schedule runs</a:t>
+            </a:r>
+            <a:endParaRPr lang="en-US" sz="1600" dirty="0"/>
+          </a:p>
+        </p:txBody>
+      </p:sp>
+      <p:sp>
+        <p:nvSpPr>
+          <p:cNvPr id="17" name="Step 1"/>
           <p:cNvSpPr/>
           <p:nvPr/>
         </p:nvSpPr>
         <p:spPr>
           <a:xfrm>
-            <a:off x="4368698" y="2468880"/>
-            <a:ext cx="1544269" cy="1371600"/>
+            <a:off x="548640" y="3840480"/>
+            <a:ext cx="3515258" cy="1051560"/>
           </a:xfrm>
           <a:prstGeom prst="roundRect">
             <a:avLst>
-              <a:gd name="adj" fmla="val 8000"/>
+              <a:gd name="adj" fmla="val 10435"/>
             </a:avLst>
           </a:prstGeom>
           <a:solidFill>
-            <a:schemeClr val="accent3"/>
+            <a:schemeClr val="accent5"/>
           </a:solidFill>
           <a:ln w="12700">
             <a:solidFill>
-              <a:schemeClr val="accent3"/>
+              <a:schemeClr val="accent5"/>
             </a:solidFill>
             <a:prstDash val="solid"/>
           </a:ln>
@@ -4639,14 +5002,14 @@
       </p:sp>
       <p:sp>
         <p:nvSpPr>
-          <p:cNvPr id="12" name="Text 10"/>
+          <p:cNvPr id="18" name="Text 12"/>
           <p:cNvSpPr txBox="1"/>
           <p:nvPr/>
         </p:nvSpPr>
         <p:spPr>
           <a:xfrm>
-            <a:off x="4368698" y="2697480"/>
-            <a:ext cx="1544269" cy="457200"/>
+            <a:off x="868680" y="3977640"/>
+            <a:ext cx="2875178" cy="365760"/>
           </a:xfrm>
           <a:prstGeom prst="rect">
             <a:avLst/>
@@ -4658,31 +5021,31 @@
           <a:bodyPr wrap="square" lIns="0" tIns="0" rIns="0" bIns="0" rtlCol="0" anchor="ctr"/>
           <a:lstStyle/>
           <a:p>
-            <a:pPr algn="ctr" indent="0" marL="0">
-              <a:buNone/>
-            </a:pPr>
-            <a:r>
-              <a:rPr lang="en-US" sz="2000" b="1" dirty="0">
-                <a:solidFill>
-                  <a:schemeClr val="bg1"/>
-                </a:solidFill>
-              </a:rPr>
-              <a:t>Build</a:t>
-            </a:r>
-            <a:endParaRPr lang="en-US" sz="2000" dirty="0"/>
-          </a:p>
-        </p:txBody>
-      </p:sp>
-      <p:sp>
-        <p:nvSpPr>
-          <p:cNvPr id="13" name="Text 11"/>
+            <a:pPr indent="0" marL="0">
+              <a:buNone/>
+            </a:pPr>
+            <a:r>
+              <a:rPr lang="en-US" sz="1800" b="1" dirty="0">
+                <a:solidFill>
+                  <a:schemeClr val="tx1"/>
+                </a:solidFill>
+              </a:rPr>
+              <a:t>1. Investigate</a:t>
+            </a:r>
+            <a:endParaRPr lang="en-US" sz="1800" dirty="0"/>
+          </a:p>
+        </p:txBody>
+      </p:sp>
+      <p:sp>
+        <p:nvSpPr>
+          <p:cNvPr id="19" name="Text 13"/>
           <p:cNvSpPr txBox="1"/>
           <p:nvPr/>
         </p:nvSpPr>
         <p:spPr>
           <a:xfrm>
-            <a:off x="4368698" y="3200400"/>
-            <a:ext cx="1544269" cy="411480"/>
+            <a:off x="868680" y="4370832"/>
+            <a:ext cx="2875178" cy="411480"/>
           </a:xfrm>
           <a:prstGeom prst="rect">
             <a:avLst/>
@@ -4691,19 +5054,19 @@
           <a:ln/>
         </p:spPr>
         <p:txBody>
-          <a:bodyPr wrap="square" lIns="0" tIns="0" rIns="0" bIns="0" rtlCol="0" anchor="ctr"/>
-          <a:lstStyle/>
-          <a:p>
-            <a:pPr algn="ctr" indent="0" marL="0">
+          <a:bodyPr wrap="square" lIns="0" tIns="0" rIns="0" bIns="0" rtlCol="0" anchor="t"/>
+          <a:lstStyle/>
+          <a:p>
+            <a:pPr indent="0" marL="0">
               <a:buNone/>
             </a:pPr>
             <a:r>
               <a:rPr lang="en-US" sz="1500" dirty="0">
                 <a:solidFill>
-                  <a:schemeClr val="accent4"/>
-                </a:solidFill>
-              </a:rPr>
-              <a:t>plan.md</a:t>
+                  <a:schemeClr val="tx1"/>
+                </a:solidFill>
+              </a:rPr>
+              <a:t>The agent looks into the problem</a:t>
             </a:r>
             <a:endParaRPr lang="en-US" sz="1500" dirty="0"/>
           </a:p>
@@ -4711,24 +5074,26 @@
       </p:sp>
       <p:sp>
         <p:nvSpPr>
-          <p:cNvPr id="14" name="Arrow 3"/>
+          <p:cNvPr id="20" name="Step 2"/>
           <p:cNvSpPr/>
           <p:nvPr/>
         </p:nvSpPr>
         <p:spPr>
           <a:xfrm>
-            <a:off x="5986120" y="3044952"/>
-            <a:ext cx="219456" cy="219456"/>
-          </a:xfrm>
-          <a:prstGeom prst="rightArrow">
-            <a:avLst/>
+            <a:off x="4338218" y="3840480"/>
+            <a:ext cx="3515258" cy="1051560"/>
+          </a:xfrm>
+          <a:prstGeom prst="roundRect">
+            <a:avLst>
+              <a:gd name="adj" fmla="val 10435"/>
+            </a:avLst>
           </a:prstGeom>
           <a:solidFill>
-            <a:schemeClr val="accent1"/>
+            <a:schemeClr val="accent5"/>
           </a:solidFill>
           <a:ln w="12700">
             <a:solidFill>
-              <a:schemeClr val="accent1"/>
+              <a:schemeClr val="accent5"/>
             </a:solidFill>
             <a:prstDash val="solid"/>
           </a:ln>
@@ -4736,26 +5101,98 @@
       </p:sp>
       <p:sp>
         <p:nvSpPr>
-          <p:cNvPr id="15" name="Test step"/>
+          <p:cNvPr id="21" name="Text 15"/>
+          <p:cNvSpPr txBox="1"/>
+          <p:nvPr/>
+        </p:nvSpPr>
+        <p:spPr>
+          <a:xfrm>
+            <a:off x="4658258" y="3977640"/>
+            <a:ext cx="2875178" cy="365760"/>
+          </a:xfrm>
+          <a:prstGeom prst="rect">
+            <a:avLst/>
+          </a:prstGeom>
+          <a:noFill/>
+          <a:ln/>
+        </p:spPr>
+        <p:txBody>
+          <a:bodyPr wrap="square" lIns="0" tIns="0" rIns="0" bIns="0" rtlCol="0" anchor="ctr"/>
+          <a:lstStyle/>
+          <a:p>
+            <a:pPr indent="0" marL="0">
+              <a:buNone/>
+            </a:pPr>
+            <a:r>
+              <a:rPr lang="en-US" sz="1800" b="1" dirty="0">
+                <a:solidFill>
+                  <a:schemeClr val="tx1"/>
+                </a:solidFill>
+              </a:rPr>
+              <a:t>2. Write it up</a:t>
+            </a:r>
+            <a:endParaRPr lang="en-US" sz="1800" dirty="0"/>
+          </a:p>
+        </p:txBody>
+      </p:sp>
+      <p:sp>
+        <p:nvSpPr>
+          <p:cNvPr id="22" name="Text 16"/>
+          <p:cNvSpPr txBox="1"/>
+          <p:nvPr/>
+        </p:nvSpPr>
+        <p:spPr>
+          <a:xfrm>
+            <a:off x="4658258" y="4370832"/>
+            <a:ext cx="2875178" cy="411480"/>
+          </a:xfrm>
+          <a:prstGeom prst="rect">
+            <a:avLst/>
+          </a:prstGeom>
+          <a:noFill/>
+          <a:ln/>
+        </p:spPr>
+        <p:txBody>
+          <a:bodyPr wrap="square" lIns="0" tIns="0" rIns="0" bIns="0" rtlCol="0" anchor="t"/>
+          <a:lstStyle/>
+          <a:p>
+            <a:pPr indent="0" marL="0">
+              <a:buNone/>
+            </a:pPr>
+            <a:r>
+              <a:rPr lang="en-US" sz="1500" dirty="0">
+                <a:solidFill>
+                  <a:schemeClr val="tx1"/>
+                </a:solidFill>
+              </a:rPr>
+              <a:t>It writes what it finds as a new intent.md</a:t>
+            </a:r>
+            <a:endParaRPr lang="en-US" sz="1500" dirty="0"/>
+          </a:p>
+        </p:txBody>
+      </p:sp>
+      <p:sp>
+        <p:nvSpPr>
+          <p:cNvPr id="23" name="Step 3"/>
           <p:cNvSpPr/>
           <p:nvPr/>
         </p:nvSpPr>
         <p:spPr>
           <a:xfrm>
-            <a:off x="6278728" y="2468880"/>
-            <a:ext cx="1544269" cy="1371600"/>
+            <a:off x="8127797" y="3840480"/>
+            <a:ext cx="3515258" cy="1051560"/>
           </a:xfrm>
           <a:prstGeom prst="roundRect">
             <a:avLst>
-              <a:gd name="adj" fmla="val 8000"/>
+              <a:gd name="adj" fmla="val 10435"/>
             </a:avLst>
           </a:prstGeom>
           <a:solidFill>
-            <a:schemeClr val="accent3"/>
+            <a:schemeClr val="accent5"/>
           </a:solidFill>
           <a:ln w="12700">
             <a:solidFill>
-              <a:schemeClr val="accent3"/>
+              <a:schemeClr val="accent5"/>
             </a:solidFill>
             <a:prstDash val="solid"/>
           </a:ln>
@@ -4763,14 +5200,14 @@
       </p:sp>
       <p:sp>
         <p:nvSpPr>
-          <p:cNvPr id="16" name="Text 14"/>
+          <p:cNvPr id="24" name="Text 18"/>
           <p:cNvSpPr txBox="1"/>
           <p:nvPr/>
         </p:nvSpPr>
         <p:spPr>
           <a:xfrm>
-            <a:off x="6278728" y="2697480"/>
-            <a:ext cx="1544269" cy="457200"/>
+            <a:off x="8447837" y="3977640"/>
+            <a:ext cx="2875178" cy="365760"/>
           </a:xfrm>
           <a:prstGeom prst="rect">
             <a:avLst/>
@@ -4782,31 +5219,31 @@
           <a:bodyPr wrap="square" lIns="0" tIns="0" rIns="0" bIns="0" rtlCol="0" anchor="ctr"/>
           <a:lstStyle/>
           <a:p>
-            <a:pPr algn="ctr" indent="0" marL="0">
-              <a:buNone/>
-            </a:pPr>
-            <a:r>
-              <a:rPr lang="en-US" sz="2000" b="1" dirty="0">
-                <a:solidFill>
-                  <a:schemeClr val="bg1"/>
-                </a:solidFill>
-              </a:rPr>
-              <a:t>Test</a:t>
-            </a:r>
-            <a:endParaRPr lang="en-US" sz="2000" dirty="0"/>
-          </a:p>
-        </p:txBody>
-      </p:sp>
-      <p:sp>
-        <p:nvSpPr>
-          <p:cNvPr id="17" name="Text 15"/>
+            <a:pPr indent="0" marL="0">
+              <a:buNone/>
+            </a:pPr>
+            <a:r>
+              <a:rPr lang="en-US" sz="1800" b="1" dirty="0">
+                <a:solidFill>
+                  <a:schemeClr val="tx1"/>
+                </a:solidFill>
+              </a:rPr>
+              <a:t>3. People review</a:t>
+            </a:r>
+            <a:endParaRPr lang="en-US" sz="1800" dirty="0"/>
+          </a:p>
+        </p:txBody>
+      </p:sp>
+      <p:sp>
+        <p:nvSpPr>
+          <p:cNvPr id="25" name="Text 19"/>
           <p:cNvSpPr txBox="1"/>
           <p:nvPr/>
         </p:nvSpPr>
         <p:spPr>
           <a:xfrm>
-            <a:off x="6278728" y="3200400"/>
-            <a:ext cx="1544269" cy="411480"/>
+            <a:off x="8447837" y="4370832"/>
+            <a:ext cx="2875178" cy="411480"/>
           </a:xfrm>
           <a:prstGeom prst="rect">
             <a:avLst/>
@@ -4815,19 +5252,19 @@
           <a:ln/>
         </p:spPr>
         <p:txBody>
-          <a:bodyPr wrap="square" lIns="0" tIns="0" rIns="0" bIns="0" rtlCol="0" anchor="ctr"/>
-          <a:lstStyle/>
-          <a:p>
-            <a:pPr algn="ctr" indent="0" marL="0">
+          <a:bodyPr wrap="square" lIns="0" tIns="0" rIns="0" bIns="0" rtlCol="0" anchor="t"/>
+          <a:lstStyle/>
+          <a:p>
+            <a:pPr indent="0" marL="0">
               <a:buNone/>
             </a:pPr>
             <a:r>
               <a:rPr lang="en-US" sz="1500" dirty="0">
                 <a:solidFill>
-                  <a:schemeClr val="accent4"/>
-                </a:solidFill>
-              </a:rPr>
-              <a:t>evals</a:t>
+                  <a:schemeClr val="tx1"/>
+                </a:solidFill>
+              </a:rPr>
+              <a:t>People sort and review the work</a:t>
             </a:r>
             <a:endParaRPr lang="en-US" sz="1500" dirty="0"/>
           </a:p>
@@ -4835,24 +5272,26 @@
       </p:sp>
       <p:sp>
         <p:nvSpPr>
-          <p:cNvPr id="18" name="Arrow 4"/>
+          <p:cNvPr id="26" name="Safe routes callout"/>
           <p:cNvSpPr/>
           <p:nvPr/>
         </p:nvSpPr>
         <p:spPr>
           <a:xfrm>
-            <a:off x="7896149" y="3044952"/>
-            <a:ext cx="219456" cy="219456"/>
-          </a:xfrm>
-          <a:prstGeom prst="rightArrow">
-            <a:avLst/>
+            <a:off x="548640" y="5120640"/>
+            <a:ext cx="11094415" cy="822960"/>
+          </a:xfrm>
+          <a:prstGeom prst="roundRect">
+            <a:avLst>
+              <a:gd name="adj" fmla="val 13333"/>
+            </a:avLst>
           </a:prstGeom>
           <a:solidFill>
-            <a:schemeClr val="accent1"/>
+            <a:schemeClr val="tx1"/>
           </a:solidFill>
           <a:ln w="12700">
             <a:solidFill>
-              <a:schemeClr val="accent1"/>
+              <a:schemeClr val="tx1"/>
             </a:solidFill>
             <a:prstDash val="solid"/>
           </a:ln>
@@ -4860,41 +5299,14 @@
       </p:sp>
       <p:sp>
         <p:nvSpPr>
-          <p:cNvPr id="19" name="Deploy step"/>
-          <p:cNvSpPr/>
-          <p:nvPr/>
-        </p:nvSpPr>
-        <p:spPr>
-          <a:xfrm>
-            <a:off x="8188757" y="2468880"/>
-            <a:ext cx="1544269" cy="1371600"/>
-          </a:xfrm>
-          <a:prstGeom prst="roundRect">
-            <a:avLst>
-              <a:gd name="adj" fmla="val 8000"/>
-            </a:avLst>
-          </a:prstGeom>
-          <a:solidFill>
-            <a:schemeClr val="accent3"/>
-          </a:solidFill>
-          <a:ln w="12700">
-            <a:solidFill>
-              <a:schemeClr val="accent3"/>
-            </a:solidFill>
-            <a:prstDash val="solid"/>
-          </a:ln>
-        </p:spPr>
-      </p:sp>
-      <p:sp>
-        <p:nvSpPr>
-          <p:cNvPr id="20" name="Text 18"/>
+          <p:cNvPr id="27" name="Text 21"/>
           <p:cNvSpPr txBox="1"/>
           <p:nvPr/>
         </p:nvSpPr>
         <p:spPr>
           <a:xfrm>
-            <a:off x="8188757" y="2697480"/>
-            <a:ext cx="1544269" cy="457200"/>
+            <a:off x="960120" y="5120640"/>
+            <a:ext cx="10271455" cy="822960"/>
           </a:xfrm>
           <a:prstGeom prst="rect">
             <a:avLst/>
@@ -4906,214 +5318,74 @@
           <a:bodyPr wrap="square" lIns="0" tIns="0" rIns="0" bIns="0" rtlCol="0" anchor="ctr"/>
           <a:lstStyle/>
           <a:p>
-            <a:pPr algn="ctr" indent="0" marL="0">
-              <a:buNone/>
-            </a:pPr>
-            <a:r>
-              <a:rPr lang="en-US" sz="2000" b="1" dirty="0">
+            <a:pPr indent="0" marL="0">
+              <a:buNone/>
+            </a:pPr>
+            <a:r>
+              <a:rPr lang="en-US" sz="1900" dirty="0">
                 <a:solidFill>
                   <a:schemeClr val="bg1"/>
                 </a:solidFill>
               </a:rPr>
-              <a:t>Deploy</a:t>
-            </a:r>
-            <a:endParaRPr lang="en-US" sz="2000" dirty="0"/>
-          </a:p>
-        </p:txBody>
-      </p:sp>
-      <p:sp>
-        <p:nvSpPr>
-          <p:cNvPr id="21" name="Text 19"/>
-          <p:cNvSpPr txBox="1"/>
-          <p:nvPr/>
-        </p:nvSpPr>
-        <p:spPr>
-          <a:xfrm>
-            <a:off x="8188757" y="3200400"/>
-            <a:ext cx="1544269" cy="411480"/>
-          </a:xfrm>
-          <a:prstGeom prst="rect">
-            <a:avLst/>
-          </a:prstGeom>
-          <a:noFill/>
-          <a:ln/>
-        </p:spPr>
-        <p:txBody>
-          <a:bodyPr wrap="square" lIns="0" tIns="0" rIns="0" bIns="0" rtlCol="0" anchor="ctr"/>
-          <a:lstStyle/>
-          <a:p>
-            <a:pPr algn="ctr" indent="0" marL="0">
-              <a:buNone/>
-            </a:pPr>
-            <a:r>
-              <a:rPr lang="en-US" sz="1500" dirty="0">
-                <a:solidFill>
-                  <a:schemeClr val="accent4"/>
-                </a:solidFill>
-              </a:rPr>
-              <a:t>REVIEW.md</a:t>
-            </a:r>
-            <a:endParaRPr lang="en-US" sz="1500" dirty="0"/>
-          </a:p>
-        </p:txBody>
-      </p:sp>
-      <p:sp>
-        <p:nvSpPr>
-          <p:cNvPr id="22" name="Arrow 5"/>
-          <p:cNvSpPr/>
-          <p:nvPr/>
-        </p:nvSpPr>
-        <p:spPr>
-          <a:xfrm>
-            <a:off x="9806178" y="3044952"/>
-            <a:ext cx="219456" cy="219456"/>
-          </a:xfrm>
-          <a:prstGeom prst="rightArrow">
-            <a:avLst/>
-          </a:prstGeom>
-          <a:solidFill>
-            <a:schemeClr val="accent1"/>
-          </a:solidFill>
-          <a:ln w="12700">
-            <a:solidFill>
-              <a:schemeClr val="accent1"/>
-            </a:solidFill>
-            <a:prstDash val="solid"/>
-          </a:ln>
-        </p:spPr>
-      </p:sp>
-      <p:sp>
-        <p:nvSpPr>
-          <p:cNvPr id="23" name="Maintain step"/>
-          <p:cNvSpPr/>
-          <p:nvPr/>
-        </p:nvSpPr>
-        <p:spPr>
-          <a:xfrm>
-            <a:off x="10098786" y="2468880"/>
-            <a:ext cx="1544269" cy="1371600"/>
-          </a:xfrm>
-          <a:prstGeom prst="roundRect">
-            <a:avLst>
-              <a:gd name="adj" fmla="val 8000"/>
-            </a:avLst>
-          </a:prstGeom>
-          <a:solidFill>
-            <a:schemeClr val="accent1"/>
-          </a:solidFill>
-          <a:ln w="12700">
-            <a:solidFill>
-              <a:schemeClr val="accent1"/>
-            </a:solidFill>
-            <a:prstDash val="solid"/>
-          </a:ln>
-        </p:spPr>
-      </p:sp>
-      <p:sp>
-        <p:nvSpPr>
-          <p:cNvPr id="24" name="Text 22"/>
-          <p:cNvSpPr txBox="1"/>
-          <p:nvPr/>
-        </p:nvSpPr>
-        <p:spPr>
-          <a:xfrm>
-            <a:off x="10098786" y="2697480"/>
-            <a:ext cx="1544269" cy="457200"/>
-          </a:xfrm>
-          <a:prstGeom prst="rect">
-            <a:avLst/>
-          </a:prstGeom>
-          <a:noFill/>
-          <a:ln/>
-        </p:spPr>
-        <p:txBody>
-          <a:bodyPr wrap="square" lIns="0" tIns="0" rIns="0" bIns="0" rtlCol="0" anchor="ctr"/>
-          <a:lstStyle/>
-          <a:p>
-            <a:pPr algn="ctr" indent="0" marL="0">
-              <a:buNone/>
-            </a:pPr>
-            <a:r>
-              <a:rPr lang="en-US" sz="2000" b="1" dirty="0">
-                <a:solidFill>
-                  <a:schemeClr val="tx1"/>
-                </a:solidFill>
-              </a:rPr>
-              <a:t>Maintain</a:t>
-            </a:r>
-            <a:endParaRPr lang="en-US" sz="2000" dirty="0"/>
-          </a:p>
-        </p:txBody>
-      </p:sp>
-      <p:sp>
-        <p:nvSpPr>
-          <p:cNvPr id="25" name="Text 23"/>
-          <p:cNvSpPr txBox="1"/>
-          <p:nvPr/>
-        </p:nvSpPr>
-        <p:spPr>
-          <a:xfrm>
-            <a:off x="10098786" y="3200400"/>
-            <a:ext cx="1544269" cy="411480"/>
-          </a:xfrm>
-          <a:prstGeom prst="rect">
-            <a:avLst/>
-          </a:prstGeom>
-          <a:noFill/>
-          <a:ln/>
-        </p:spPr>
-        <p:txBody>
-          <a:bodyPr wrap="square" lIns="0" tIns="0" rIns="0" bIns="0" rtlCol="0" anchor="ctr"/>
-          <a:lstStyle/>
-          <a:p>
-            <a:pPr algn="ctr" indent="0" marL="0">
-              <a:buNone/>
-            </a:pPr>
-            <a:r>
-              <a:rPr lang="en-US" sz="1500" dirty="0">
-                <a:solidFill>
-                  <a:schemeClr val="tx1"/>
-                </a:solidFill>
-              </a:rPr>
-              <a:t>new intent</a:t>
-            </a:r>
-            <a:endParaRPr lang="en-US" sz="1500" dirty="0"/>
-          </a:p>
-        </p:txBody>
-      </p:sp>
-      <p:sp>
-        <p:nvSpPr>
-          <p:cNvPr id="26" name="Text 24"/>
-          <p:cNvSpPr txBox="1"/>
-          <p:nvPr/>
-        </p:nvSpPr>
-        <p:spPr>
-          <a:xfrm>
-            <a:off x="548640" y="4480560"/>
-            <a:ext cx="11094415" cy="914400"/>
-          </a:xfrm>
-          <a:prstGeom prst="rect">
-            <a:avLst/>
-          </a:prstGeom>
-          <a:noFill/>
-          <a:ln/>
-        </p:spPr>
-        <p:txBody>
-          <a:bodyPr wrap="square" lIns="0" tIns="0" rIns="0" bIns="0" rtlCol="0" anchor="t"/>
-          <a:lstStyle/>
-          <a:p>
-            <a:pPr indent="0" marL="0">
-              <a:buNone/>
-            </a:pPr>
-            <a:r>
-              <a:rPr lang="en-US" sz="2200" dirty="0">
-                <a:solidFill>
-                  <a:schemeClr val="accent4"/>
-                </a:solidFill>
-              </a:rPr>
-              <a:t>Every stage writes a file that people and agents can both read. What Maintain finds becomes a new intent.md, and Plan starts again.</a:t>
-            </a:r>
-            <a:endParaRPr lang="en-US" sz="2200" dirty="0"/>
+              <a:t>The agent only acts through safe routes, like a pull request. </a:t>
+            </a:r>
+            <a:pPr indent="0" marL="0">
+              <a:buNone/>
+            </a:pPr>
+            <a:r>
+              <a:rPr lang="en-US" sz="1900" b="1" dirty="0">
+                <a:solidFill>
+                  <a:schemeClr val="accent1"/>
+                </a:solidFill>
+              </a:rPr>
+              <a:t>People no longer have to start the work.</a:t>
+            </a:r>
+            <a:endParaRPr lang="en-US" sz="1900" dirty="0"/>
+          </a:p>
+        </p:txBody>
+      </p:sp>
+      <p:sp>
+        <p:nvSpPr>
+          <p:cNvPr id="25" name="Slide Number Placeholder 0"/>
+          <p:cNvSpPr>
+            <a:spLocks noGrp="1"/>
+          </p:cNvSpPr>
+          <p:nvPr>
+            <p:ph type="sldNum" sz="quarter" idx="4294967295"/>
+          </p:nvPr>
+        </p:nvSpPr>
+        <p:spPr>
+          <a:xfrm>
+            <a:off x="11094415" y="6400800"/>
+            <a:ext cx="548640" cy="274320"/>
+          </a:xfrm>
+          <a:prstGeom prst="rect">
+            <a:avLst/>
+          </a:prstGeom>
+          <a:extLst>
+            <a:ext uri="{C572A759-6A51-4108-AA02-DFA0A04FC94B}">
+              <ma14:wrappingTextBoxFlag xmlns:ma14="http://schemas.microsoft.com/office/mac/drawingml/2011/main" val="0"/>
+            </a:ext>
+          </a:extLst>
+        </p:spPr>
+        <p:txBody>
+          <a:bodyPr/>
+          <a:lstStyle>
+            <a:lvl1pPr>
+              <a:defRPr sz="1100">
+                <a:solidFill>
+                  <a:schemeClr val="tx2"/>
+                </a:solidFill>
+              </a:defRPr>
+            </a:lvl1pPr>
+          </a:lstStyle>
+          <a:p>
+            <a:pPr algn="r"/>
+            <a:fld id="{F7021451-1387-4CA6-816F-3879F97B5CBC}" type="slidenum">
+              <a:rPr b="0" lang="en-US"/>
+              <a:t>13</a:t>
+            </a:fld>
+            <a:endParaRPr lang="en-US"/>
           </a:p>
         </p:txBody>
       </p:sp>
@@ -5147,6 +5419,824 @@
           <p:cNvPr id="2" name="Text 0"/>
           <p:cNvSpPr/>
           <p:nvPr>
+            <p:ph idx="100" type="title" hasCustomPrompt="1"/>
+          </p:nvPr>
+        </p:nvSpPr>
+        <p:spPr>
+          <a:xfrm>
+            <a:off x="548640" y="822960"/>
+            <a:ext cx="11094415" cy="822960"/>
+          </a:xfrm>
+          <a:prstGeom prst="rect">
+            <a:avLst/>
+          </a:prstGeom>
+          <a:noFill/>
+          <a:ln/>
+        </p:spPr>
+        <p:txBody>
+          <a:bodyPr wrap="square" lIns="0" tIns="0" rIns="0" bIns="0" rtlCol="0" anchor="t"/>
+          <a:lstStyle/>
+          <a:p>
+            <a:pPr algn="l" indent="0" marL="0">
+              <a:buNone/>
+            </a:pPr>
+            <a:r>
+              <a:rPr lang="en-US" sz="3400" b="1" dirty="0">
+                <a:solidFill>
+                  <a:schemeClr val="bg1"/>
+                </a:solidFill>
+              </a:rPr>
+              <a:t>The SDLC becomes a loop</a:t>
+            </a:r>
+            <a:endParaRPr lang="en-US" sz="3400" dirty="0"/>
+          </a:p>
+        </p:txBody>
+      </p:sp>
+      <p:sp>
+        <p:nvSpPr>
+          <p:cNvPr id="3" name="Plan step"/>
+          <p:cNvSpPr/>
+          <p:nvPr/>
+        </p:nvSpPr>
+        <p:spPr>
+          <a:xfrm>
+            <a:off x="548640" y="2468880"/>
+            <a:ext cx="1544269" cy="1371600"/>
+          </a:xfrm>
+          <a:prstGeom prst="roundRect">
+            <a:avLst>
+              <a:gd name="adj" fmla="val 8000"/>
+            </a:avLst>
+          </a:prstGeom>
+          <a:solidFill>
+            <a:schemeClr val="accent3"/>
+          </a:solidFill>
+          <a:ln w="12700">
+            <a:solidFill>
+              <a:schemeClr val="accent3"/>
+            </a:solidFill>
+            <a:prstDash val="solid"/>
+          </a:ln>
+        </p:spPr>
+      </p:sp>
+      <p:sp>
+        <p:nvSpPr>
+          <p:cNvPr id="4" name="Text 2"/>
+          <p:cNvSpPr txBox="1"/>
+          <p:nvPr/>
+        </p:nvSpPr>
+        <p:spPr>
+          <a:xfrm>
+            <a:off x="548640" y="2697480"/>
+            <a:ext cx="1544269" cy="457200"/>
+          </a:xfrm>
+          <a:prstGeom prst="rect">
+            <a:avLst/>
+          </a:prstGeom>
+          <a:noFill/>
+          <a:ln/>
+        </p:spPr>
+        <p:txBody>
+          <a:bodyPr wrap="square" lIns="0" tIns="0" rIns="0" bIns="0" rtlCol="0" anchor="ctr"/>
+          <a:lstStyle/>
+          <a:p>
+            <a:pPr algn="ctr" indent="0" marL="0">
+              <a:buNone/>
+            </a:pPr>
+            <a:r>
+              <a:rPr lang="en-US" sz="2000" b="1" dirty="0">
+                <a:solidFill>
+                  <a:schemeClr val="bg1"/>
+                </a:solidFill>
+              </a:rPr>
+              <a:t>Plan</a:t>
+            </a:r>
+            <a:endParaRPr lang="en-US" sz="2000" dirty="0"/>
+          </a:p>
+        </p:txBody>
+      </p:sp>
+      <p:sp>
+        <p:nvSpPr>
+          <p:cNvPr id="5" name="Text 3"/>
+          <p:cNvSpPr txBox="1"/>
+          <p:nvPr/>
+        </p:nvSpPr>
+        <p:spPr>
+          <a:xfrm>
+            <a:off x="548640" y="3200400"/>
+            <a:ext cx="1544269" cy="411480"/>
+          </a:xfrm>
+          <a:prstGeom prst="rect">
+            <a:avLst/>
+          </a:prstGeom>
+          <a:noFill/>
+          <a:ln/>
+        </p:spPr>
+        <p:txBody>
+          <a:bodyPr wrap="square" lIns="0" tIns="0" rIns="0" bIns="0" rtlCol="0" anchor="ctr"/>
+          <a:lstStyle/>
+          <a:p>
+            <a:pPr algn="ctr" indent="0" marL="0">
+              <a:buNone/>
+            </a:pPr>
+            <a:r>
+              <a:rPr lang="en-US" sz="1500" dirty="0">
+                <a:solidFill>
+                  <a:schemeClr val="accent4"/>
+                </a:solidFill>
+              </a:rPr>
+              <a:t>intent.md</a:t>
+            </a:r>
+            <a:endParaRPr lang="en-US" sz="1500" dirty="0"/>
+          </a:p>
+        </p:txBody>
+      </p:sp>
+      <p:sp>
+        <p:nvSpPr>
+          <p:cNvPr id="6" name="Arrow 1"/>
+          <p:cNvSpPr/>
+          <p:nvPr/>
+        </p:nvSpPr>
+        <p:spPr>
+          <a:xfrm>
+            <a:off x="2166061" y="3044952"/>
+            <a:ext cx="219456" cy="219456"/>
+          </a:xfrm>
+          <a:prstGeom prst="rightArrow">
+            <a:avLst/>
+          </a:prstGeom>
+          <a:solidFill>
+            <a:schemeClr val="accent1"/>
+          </a:solidFill>
+          <a:ln w="12700">
+            <a:solidFill>
+              <a:schemeClr val="accent1"/>
+            </a:solidFill>
+            <a:prstDash val="solid"/>
+          </a:ln>
+        </p:spPr>
+      </p:sp>
+      <p:sp>
+        <p:nvSpPr>
+          <p:cNvPr id="7" name="Design step"/>
+          <p:cNvSpPr/>
+          <p:nvPr/>
+        </p:nvSpPr>
+        <p:spPr>
+          <a:xfrm>
+            <a:off x="2458669" y="2468880"/>
+            <a:ext cx="1544269" cy="1371600"/>
+          </a:xfrm>
+          <a:prstGeom prst="roundRect">
+            <a:avLst>
+              <a:gd name="adj" fmla="val 8000"/>
+            </a:avLst>
+          </a:prstGeom>
+          <a:solidFill>
+            <a:schemeClr val="accent3"/>
+          </a:solidFill>
+          <a:ln w="12700">
+            <a:solidFill>
+              <a:schemeClr val="accent3"/>
+            </a:solidFill>
+            <a:prstDash val="solid"/>
+          </a:ln>
+        </p:spPr>
+      </p:sp>
+      <p:sp>
+        <p:nvSpPr>
+          <p:cNvPr id="8" name="Text 6"/>
+          <p:cNvSpPr txBox="1"/>
+          <p:nvPr/>
+        </p:nvSpPr>
+        <p:spPr>
+          <a:xfrm>
+            <a:off x="2458669" y="2697480"/>
+            <a:ext cx="1544269" cy="457200"/>
+          </a:xfrm>
+          <a:prstGeom prst="rect">
+            <a:avLst/>
+          </a:prstGeom>
+          <a:noFill/>
+          <a:ln/>
+        </p:spPr>
+        <p:txBody>
+          <a:bodyPr wrap="square" lIns="0" tIns="0" rIns="0" bIns="0" rtlCol="0" anchor="ctr"/>
+          <a:lstStyle/>
+          <a:p>
+            <a:pPr algn="ctr" indent="0" marL="0">
+              <a:buNone/>
+            </a:pPr>
+            <a:r>
+              <a:rPr lang="en-US" sz="2000" b="1" dirty="0">
+                <a:solidFill>
+                  <a:schemeClr val="bg1"/>
+                </a:solidFill>
+              </a:rPr>
+              <a:t>Design</a:t>
+            </a:r>
+            <a:endParaRPr lang="en-US" sz="2000" dirty="0"/>
+          </a:p>
+        </p:txBody>
+      </p:sp>
+      <p:sp>
+        <p:nvSpPr>
+          <p:cNvPr id="9" name="Text 7"/>
+          <p:cNvSpPr txBox="1"/>
+          <p:nvPr/>
+        </p:nvSpPr>
+        <p:spPr>
+          <a:xfrm>
+            <a:off x="2458669" y="3200400"/>
+            <a:ext cx="1544269" cy="411480"/>
+          </a:xfrm>
+          <a:prstGeom prst="rect">
+            <a:avLst/>
+          </a:prstGeom>
+          <a:noFill/>
+          <a:ln/>
+        </p:spPr>
+        <p:txBody>
+          <a:bodyPr wrap="square" lIns="0" tIns="0" rIns="0" bIns="0" rtlCol="0" anchor="ctr"/>
+          <a:lstStyle/>
+          <a:p>
+            <a:pPr algn="ctr" indent="0" marL="0">
+              <a:buNone/>
+            </a:pPr>
+            <a:r>
+              <a:rPr lang="en-US" sz="1500" dirty="0">
+                <a:solidFill>
+                  <a:schemeClr val="accent4"/>
+                </a:solidFill>
+              </a:rPr>
+              <a:t>spec.md</a:t>
+            </a:r>
+            <a:endParaRPr lang="en-US" sz="1500" dirty="0"/>
+          </a:p>
+        </p:txBody>
+      </p:sp>
+      <p:sp>
+        <p:nvSpPr>
+          <p:cNvPr id="10" name="Arrow 2"/>
+          <p:cNvSpPr/>
+          <p:nvPr/>
+        </p:nvSpPr>
+        <p:spPr>
+          <a:xfrm>
+            <a:off x="4076090" y="3044952"/>
+            <a:ext cx="219456" cy="219456"/>
+          </a:xfrm>
+          <a:prstGeom prst="rightArrow">
+            <a:avLst/>
+          </a:prstGeom>
+          <a:solidFill>
+            <a:schemeClr val="accent1"/>
+          </a:solidFill>
+          <a:ln w="12700">
+            <a:solidFill>
+              <a:schemeClr val="accent1"/>
+            </a:solidFill>
+            <a:prstDash val="solid"/>
+          </a:ln>
+        </p:spPr>
+      </p:sp>
+      <p:sp>
+        <p:nvSpPr>
+          <p:cNvPr id="11" name="Build step"/>
+          <p:cNvSpPr/>
+          <p:nvPr/>
+        </p:nvSpPr>
+        <p:spPr>
+          <a:xfrm>
+            <a:off x="4368698" y="2468880"/>
+            <a:ext cx="1544269" cy="1371600"/>
+          </a:xfrm>
+          <a:prstGeom prst="roundRect">
+            <a:avLst>
+              <a:gd name="adj" fmla="val 8000"/>
+            </a:avLst>
+          </a:prstGeom>
+          <a:solidFill>
+            <a:schemeClr val="accent3"/>
+          </a:solidFill>
+          <a:ln w="12700">
+            <a:solidFill>
+              <a:schemeClr val="accent3"/>
+            </a:solidFill>
+            <a:prstDash val="solid"/>
+          </a:ln>
+        </p:spPr>
+      </p:sp>
+      <p:sp>
+        <p:nvSpPr>
+          <p:cNvPr id="12" name="Text 10"/>
+          <p:cNvSpPr txBox="1"/>
+          <p:nvPr/>
+        </p:nvSpPr>
+        <p:spPr>
+          <a:xfrm>
+            <a:off x="4368698" y="2697480"/>
+            <a:ext cx="1544269" cy="457200"/>
+          </a:xfrm>
+          <a:prstGeom prst="rect">
+            <a:avLst/>
+          </a:prstGeom>
+          <a:noFill/>
+          <a:ln/>
+        </p:spPr>
+        <p:txBody>
+          <a:bodyPr wrap="square" lIns="0" tIns="0" rIns="0" bIns="0" rtlCol="0" anchor="ctr"/>
+          <a:lstStyle/>
+          <a:p>
+            <a:pPr algn="ctr" indent="0" marL="0">
+              <a:buNone/>
+            </a:pPr>
+            <a:r>
+              <a:rPr lang="en-US" sz="2000" b="1" dirty="0">
+                <a:solidFill>
+                  <a:schemeClr val="bg1"/>
+                </a:solidFill>
+              </a:rPr>
+              <a:t>Build</a:t>
+            </a:r>
+            <a:endParaRPr lang="en-US" sz="2000" dirty="0"/>
+          </a:p>
+        </p:txBody>
+      </p:sp>
+      <p:sp>
+        <p:nvSpPr>
+          <p:cNvPr id="13" name="Text 11"/>
+          <p:cNvSpPr txBox="1"/>
+          <p:nvPr/>
+        </p:nvSpPr>
+        <p:spPr>
+          <a:xfrm>
+            <a:off x="4368698" y="3200400"/>
+            <a:ext cx="1544269" cy="411480"/>
+          </a:xfrm>
+          <a:prstGeom prst="rect">
+            <a:avLst/>
+          </a:prstGeom>
+          <a:noFill/>
+          <a:ln/>
+        </p:spPr>
+        <p:txBody>
+          <a:bodyPr wrap="square" lIns="0" tIns="0" rIns="0" bIns="0" rtlCol="0" anchor="ctr"/>
+          <a:lstStyle/>
+          <a:p>
+            <a:pPr algn="ctr" indent="0" marL="0">
+              <a:buNone/>
+            </a:pPr>
+            <a:r>
+              <a:rPr lang="en-US" sz="1500" dirty="0">
+                <a:solidFill>
+                  <a:schemeClr val="accent4"/>
+                </a:solidFill>
+              </a:rPr>
+              <a:t>plan.md</a:t>
+            </a:r>
+            <a:endParaRPr lang="en-US" sz="1500" dirty="0"/>
+          </a:p>
+        </p:txBody>
+      </p:sp>
+      <p:sp>
+        <p:nvSpPr>
+          <p:cNvPr id="14" name="Arrow 3"/>
+          <p:cNvSpPr/>
+          <p:nvPr/>
+        </p:nvSpPr>
+        <p:spPr>
+          <a:xfrm>
+            <a:off x="5986120" y="3044952"/>
+            <a:ext cx="219456" cy="219456"/>
+          </a:xfrm>
+          <a:prstGeom prst="rightArrow">
+            <a:avLst/>
+          </a:prstGeom>
+          <a:solidFill>
+            <a:schemeClr val="accent1"/>
+          </a:solidFill>
+          <a:ln w="12700">
+            <a:solidFill>
+              <a:schemeClr val="accent1"/>
+            </a:solidFill>
+            <a:prstDash val="solid"/>
+          </a:ln>
+        </p:spPr>
+      </p:sp>
+      <p:sp>
+        <p:nvSpPr>
+          <p:cNvPr id="15" name="Test step"/>
+          <p:cNvSpPr/>
+          <p:nvPr/>
+        </p:nvSpPr>
+        <p:spPr>
+          <a:xfrm>
+            <a:off x="6278728" y="2468880"/>
+            <a:ext cx="1544269" cy="1371600"/>
+          </a:xfrm>
+          <a:prstGeom prst="roundRect">
+            <a:avLst>
+              <a:gd name="adj" fmla="val 8000"/>
+            </a:avLst>
+          </a:prstGeom>
+          <a:solidFill>
+            <a:schemeClr val="accent3"/>
+          </a:solidFill>
+          <a:ln w="12700">
+            <a:solidFill>
+              <a:schemeClr val="accent3"/>
+            </a:solidFill>
+            <a:prstDash val="solid"/>
+          </a:ln>
+        </p:spPr>
+      </p:sp>
+      <p:sp>
+        <p:nvSpPr>
+          <p:cNvPr id="16" name="Text 14"/>
+          <p:cNvSpPr txBox="1"/>
+          <p:nvPr/>
+        </p:nvSpPr>
+        <p:spPr>
+          <a:xfrm>
+            <a:off x="6278728" y="2697480"/>
+            <a:ext cx="1544269" cy="457200"/>
+          </a:xfrm>
+          <a:prstGeom prst="rect">
+            <a:avLst/>
+          </a:prstGeom>
+          <a:noFill/>
+          <a:ln/>
+        </p:spPr>
+        <p:txBody>
+          <a:bodyPr wrap="square" lIns="0" tIns="0" rIns="0" bIns="0" rtlCol="0" anchor="ctr"/>
+          <a:lstStyle/>
+          <a:p>
+            <a:pPr algn="ctr" indent="0" marL="0">
+              <a:buNone/>
+            </a:pPr>
+            <a:r>
+              <a:rPr lang="en-US" sz="2000" b="1" dirty="0">
+                <a:solidFill>
+                  <a:schemeClr val="bg1"/>
+                </a:solidFill>
+              </a:rPr>
+              <a:t>Test</a:t>
+            </a:r>
+            <a:endParaRPr lang="en-US" sz="2000" dirty="0"/>
+          </a:p>
+        </p:txBody>
+      </p:sp>
+      <p:sp>
+        <p:nvSpPr>
+          <p:cNvPr id="17" name="Text 15"/>
+          <p:cNvSpPr txBox="1"/>
+          <p:nvPr/>
+        </p:nvSpPr>
+        <p:spPr>
+          <a:xfrm>
+            <a:off x="6278728" y="3200400"/>
+            <a:ext cx="1544269" cy="411480"/>
+          </a:xfrm>
+          <a:prstGeom prst="rect">
+            <a:avLst/>
+          </a:prstGeom>
+          <a:noFill/>
+          <a:ln/>
+        </p:spPr>
+        <p:txBody>
+          <a:bodyPr wrap="square" lIns="0" tIns="0" rIns="0" bIns="0" rtlCol="0" anchor="ctr"/>
+          <a:lstStyle/>
+          <a:p>
+            <a:pPr algn="ctr" indent="0" marL="0">
+              <a:buNone/>
+            </a:pPr>
+            <a:r>
+              <a:rPr lang="en-US" sz="1500" dirty="0">
+                <a:solidFill>
+                  <a:schemeClr val="accent4"/>
+                </a:solidFill>
+              </a:rPr>
+              <a:t>evals</a:t>
+            </a:r>
+            <a:endParaRPr lang="en-US" sz="1500" dirty="0"/>
+          </a:p>
+        </p:txBody>
+      </p:sp>
+      <p:sp>
+        <p:nvSpPr>
+          <p:cNvPr id="18" name="Arrow 4"/>
+          <p:cNvSpPr/>
+          <p:nvPr/>
+        </p:nvSpPr>
+        <p:spPr>
+          <a:xfrm>
+            <a:off x="7896149" y="3044952"/>
+            <a:ext cx="219456" cy="219456"/>
+          </a:xfrm>
+          <a:prstGeom prst="rightArrow">
+            <a:avLst/>
+          </a:prstGeom>
+          <a:solidFill>
+            <a:schemeClr val="accent1"/>
+          </a:solidFill>
+          <a:ln w="12700">
+            <a:solidFill>
+              <a:schemeClr val="accent1"/>
+            </a:solidFill>
+            <a:prstDash val="solid"/>
+          </a:ln>
+        </p:spPr>
+      </p:sp>
+      <p:sp>
+        <p:nvSpPr>
+          <p:cNvPr id="19" name="Deploy step"/>
+          <p:cNvSpPr/>
+          <p:nvPr/>
+        </p:nvSpPr>
+        <p:spPr>
+          <a:xfrm>
+            <a:off x="8188757" y="2468880"/>
+            <a:ext cx="1544269" cy="1371600"/>
+          </a:xfrm>
+          <a:prstGeom prst="roundRect">
+            <a:avLst>
+              <a:gd name="adj" fmla="val 8000"/>
+            </a:avLst>
+          </a:prstGeom>
+          <a:solidFill>
+            <a:schemeClr val="accent3"/>
+          </a:solidFill>
+          <a:ln w="12700">
+            <a:solidFill>
+              <a:schemeClr val="accent3"/>
+            </a:solidFill>
+            <a:prstDash val="solid"/>
+          </a:ln>
+        </p:spPr>
+      </p:sp>
+      <p:sp>
+        <p:nvSpPr>
+          <p:cNvPr id="20" name="Text 18"/>
+          <p:cNvSpPr txBox="1"/>
+          <p:nvPr/>
+        </p:nvSpPr>
+        <p:spPr>
+          <a:xfrm>
+            <a:off x="8188757" y="2697480"/>
+            <a:ext cx="1544269" cy="457200"/>
+          </a:xfrm>
+          <a:prstGeom prst="rect">
+            <a:avLst/>
+          </a:prstGeom>
+          <a:noFill/>
+          <a:ln/>
+        </p:spPr>
+        <p:txBody>
+          <a:bodyPr wrap="square" lIns="0" tIns="0" rIns="0" bIns="0" rtlCol="0" anchor="ctr"/>
+          <a:lstStyle/>
+          <a:p>
+            <a:pPr algn="ctr" indent="0" marL="0">
+              <a:buNone/>
+            </a:pPr>
+            <a:r>
+              <a:rPr lang="en-US" sz="2000" b="1" dirty="0">
+                <a:solidFill>
+                  <a:schemeClr val="bg1"/>
+                </a:solidFill>
+              </a:rPr>
+              <a:t>Deploy</a:t>
+            </a:r>
+            <a:endParaRPr lang="en-US" sz="2000" dirty="0"/>
+          </a:p>
+        </p:txBody>
+      </p:sp>
+      <p:sp>
+        <p:nvSpPr>
+          <p:cNvPr id="21" name="Text 19"/>
+          <p:cNvSpPr txBox="1"/>
+          <p:nvPr/>
+        </p:nvSpPr>
+        <p:spPr>
+          <a:xfrm>
+            <a:off x="8188757" y="3200400"/>
+            <a:ext cx="1544269" cy="411480"/>
+          </a:xfrm>
+          <a:prstGeom prst="rect">
+            <a:avLst/>
+          </a:prstGeom>
+          <a:noFill/>
+          <a:ln/>
+        </p:spPr>
+        <p:txBody>
+          <a:bodyPr wrap="square" lIns="0" tIns="0" rIns="0" bIns="0" rtlCol="0" anchor="ctr"/>
+          <a:lstStyle/>
+          <a:p>
+            <a:pPr algn="ctr" indent="0" marL="0">
+              <a:buNone/>
+            </a:pPr>
+            <a:r>
+              <a:rPr lang="en-US" sz="1500" dirty="0">
+                <a:solidFill>
+                  <a:schemeClr val="accent4"/>
+                </a:solidFill>
+              </a:rPr>
+              <a:t>REVIEW.md</a:t>
+            </a:r>
+            <a:endParaRPr lang="en-US" sz="1500" dirty="0"/>
+          </a:p>
+        </p:txBody>
+      </p:sp>
+      <p:sp>
+        <p:nvSpPr>
+          <p:cNvPr id="22" name="Arrow 5"/>
+          <p:cNvSpPr/>
+          <p:nvPr/>
+        </p:nvSpPr>
+        <p:spPr>
+          <a:xfrm>
+            <a:off x="9806178" y="3044952"/>
+            <a:ext cx="219456" cy="219456"/>
+          </a:xfrm>
+          <a:prstGeom prst="rightArrow">
+            <a:avLst/>
+          </a:prstGeom>
+          <a:solidFill>
+            <a:schemeClr val="accent1"/>
+          </a:solidFill>
+          <a:ln w="12700">
+            <a:solidFill>
+              <a:schemeClr val="accent1"/>
+            </a:solidFill>
+            <a:prstDash val="solid"/>
+          </a:ln>
+        </p:spPr>
+      </p:sp>
+      <p:sp>
+        <p:nvSpPr>
+          <p:cNvPr id="23" name="Maintain step"/>
+          <p:cNvSpPr/>
+          <p:nvPr/>
+        </p:nvSpPr>
+        <p:spPr>
+          <a:xfrm>
+            <a:off x="10098786" y="2468880"/>
+            <a:ext cx="1544269" cy="1371600"/>
+          </a:xfrm>
+          <a:prstGeom prst="roundRect">
+            <a:avLst>
+              <a:gd name="adj" fmla="val 8000"/>
+            </a:avLst>
+          </a:prstGeom>
+          <a:solidFill>
+            <a:schemeClr val="accent1"/>
+          </a:solidFill>
+          <a:ln w="12700">
+            <a:solidFill>
+              <a:schemeClr val="accent1"/>
+            </a:solidFill>
+            <a:prstDash val="solid"/>
+          </a:ln>
+        </p:spPr>
+      </p:sp>
+      <p:sp>
+        <p:nvSpPr>
+          <p:cNvPr id="24" name="Text 22"/>
+          <p:cNvSpPr txBox="1"/>
+          <p:nvPr/>
+        </p:nvSpPr>
+        <p:spPr>
+          <a:xfrm>
+            <a:off x="10098786" y="2697480"/>
+            <a:ext cx="1544269" cy="457200"/>
+          </a:xfrm>
+          <a:prstGeom prst="rect">
+            <a:avLst/>
+          </a:prstGeom>
+          <a:noFill/>
+          <a:ln/>
+        </p:spPr>
+        <p:txBody>
+          <a:bodyPr wrap="square" lIns="0" tIns="0" rIns="0" bIns="0" rtlCol="0" anchor="ctr"/>
+          <a:lstStyle/>
+          <a:p>
+            <a:pPr algn="ctr" indent="0" marL="0">
+              <a:buNone/>
+            </a:pPr>
+            <a:r>
+              <a:rPr lang="en-US" sz="2000" b="1" dirty="0">
+                <a:solidFill>
+                  <a:schemeClr val="tx1"/>
+                </a:solidFill>
+              </a:rPr>
+              <a:t>Maintain</a:t>
+            </a:r>
+            <a:endParaRPr lang="en-US" sz="2000" dirty="0"/>
+          </a:p>
+        </p:txBody>
+      </p:sp>
+      <p:sp>
+        <p:nvSpPr>
+          <p:cNvPr id="25" name="Text 23"/>
+          <p:cNvSpPr txBox="1"/>
+          <p:nvPr/>
+        </p:nvSpPr>
+        <p:spPr>
+          <a:xfrm>
+            <a:off x="10098786" y="3200400"/>
+            <a:ext cx="1544269" cy="411480"/>
+          </a:xfrm>
+          <a:prstGeom prst="rect">
+            <a:avLst/>
+          </a:prstGeom>
+          <a:noFill/>
+          <a:ln/>
+        </p:spPr>
+        <p:txBody>
+          <a:bodyPr wrap="square" lIns="0" tIns="0" rIns="0" bIns="0" rtlCol="0" anchor="ctr"/>
+          <a:lstStyle/>
+          <a:p>
+            <a:pPr algn="ctr" indent="0" marL="0">
+              <a:buNone/>
+            </a:pPr>
+            <a:r>
+              <a:rPr lang="en-US" sz="1500" dirty="0">
+                <a:solidFill>
+                  <a:schemeClr val="tx1"/>
+                </a:solidFill>
+              </a:rPr>
+              <a:t>new intent</a:t>
+            </a:r>
+            <a:endParaRPr lang="en-US" sz="1500" dirty="0"/>
+          </a:p>
+        </p:txBody>
+      </p:sp>
+      <p:sp>
+        <p:nvSpPr>
+          <p:cNvPr id="26" name="Text 24"/>
+          <p:cNvSpPr txBox="1"/>
+          <p:nvPr/>
+        </p:nvSpPr>
+        <p:spPr>
+          <a:xfrm>
+            <a:off x="548640" y="4480560"/>
+            <a:ext cx="11094415" cy="914400"/>
+          </a:xfrm>
+          <a:prstGeom prst="rect">
+            <a:avLst/>
+          </a:prstGeom>
+          <a:noFill/>
+          <a:ln/>
+        </p:spPr>
+        <p:txBody>
+          <a:bodyPr wrap="square" lIns="0" tIns="0" rIns="0" bIns="0" rtlCol="0" anchor="t"/>
+          <a:lstStyle/>
+          <a:p>
+            <a:pPr indent="0" marL="0">
+              <a:buNone/>
+            </a:pPr>
+            <a:r>
+              <a:rPr lang="en-US" sz="2200" dirty="0">
+                <a:solidFill>
+                  <a:schemeClr val="accent4"/>
+                </a:solidFill>
+              </a:rPr>
+              <a:t>Every stage writes a file that people and agents can both read. What Maintain finds becomes a new intent.md, and Plan starts again.</a:t>
+            </a:r>
+            <a:endParaRPr lang="en-US" sz="2200" dirty="0"/>
+          </a:p>
+        </p:txBody>
+      </p:sp>
+    </p:spTree>
+  </p:cSld>
+  <p:clrMapOvr>
+    <a:masterClrMapping/>
+  </p:clrMapOvr>
+</p:sld>
+</file>
+
+<file path=ppt/slides/slide15.xml><?xml version="1.0" encoding="utf-8"?>
+<p:sld xmlns:a="http://schemas.openxmlformats.org/drawingml/2006/main" xmlns:r="http://schemas.openxmlformats.org/officeDocument/2006/relationships" xmlns:p="http://schemas.openxmlformats.org/presentationml/2006/main">
+  <p:cSld name="Slide 15">
+    <p:spTree>
+      <p:nvGrpSpPr>
+        <p:cNvPr id="1" name=""/>
+        <p:cNvGrpSpPr/>
+        <p:nvPr/>
+      </p:nvGrpSpPr>
+      <p:grpSpPr>
+        <a:xfrm>
+          <a:off x="0" y="0"/>
+          <a:ext cx="0" cy="0"/>
+          <a:chOff x="0" y="0"/>
+          <a:chExt cx="0" cy="0"/>
+        </a:xfrm>
+      </p:grpSpPr>
+      <p:sp>
+        <p:nvSpPr>
+          <p:cNvPr id="2" name="Text 0"/>
+          <p:cNvSpPr/>
+          <p:nvPr>
             <p:ph idx="100" type="body" hasCustomPrompt="1"/>
           </p:nvPr>
         </p:nvSpPr>
@@ -5584,7 +6674,7 @@
             <a:pPr algn="r"/>
             <a:fld id="{F7021451-1387-4CA6-816F-3879F97B5CBC}" type="slidenum">
               <a:rPr b="0" lang="en-US"/>
-              <a:t>14</a:t>
+              <a:t>15</a:t>
             </a:fld>
             <a:endParaRPr lang="en-US"/>
           </a:p>
@@ -9981,7 +11071,7 @@
         <p:spPr>
           <a:xfrm>
             <a:off x="548640" y="2075688"/>
-            <a:ext cx="5120640" cy="960120"/>
+            <a:ext cx="5120640" cy="365760"/>
           </a:xfrm>
           <a:prstGeom prst="rect">
             <a:avLst/>
@@ -10002,7 +11092,7 @@
                   <a:schemeClr val="tx1"/>
                 </a:solidFill>
               </a:rPr>
-              <a:t>The product owner, working with an agent</a:t>
+              <a:t>The product owner, who approves it</a:t>
             </a:r>
             <a:endParaRPr lang="en-US" sz="1900" dirty="0"/>
           </a:p>
@@ -10016,7 +11106,7 @@
         </p:nvSpPr>
         <p:spPr>
           <a:xfrm>
-            <a:off x="548640" y="3246120"/>
+            <a:off x="548640" y="2670048"/>
             <a:ext cx="5120640" cy="274320"/>
           </a:xfrm>
           <a:prstGeom prst="rect">
@@ -10052,8 +11142,8 @@
         </p:nvSpPr>
         <p:spPr>
           <a:xfrm>
-            <a:off x="548640" y="3538728"/>
-            <a:ext cx="5120640" cy="960120"/>
+            <a:off x="548640" y="2962656"/>
+            <a:ext cx="5120640" cy="914400"/>
           </a:xfrm>
           <a:prstGeom prst="rect">
             <a:avLst/>
@@ -10088,7 +11178,7 @@
         </p:nvSpPr>
         <p:spPr>
           <a:xfrm>
-            <a:off x="548640" y="4709160"/>
+            <a:off x="548640" y="4105656"/>
             <a:ext cx="5120640" cy="274320"/>
           </a:xfrm>
           <a:prstGeom prst="rect">
@@ -10124,8 +11214,8 @@
         </p:nvSpPr>
         <p:spPr>
           <a:xfrm>
-            <a:off x="548640" y="5001768"/>
-            <a:ext cx="5120640" cy="960120"/>
+            <a:off x="548640" y="4398264"/>
+            <a:ext cx="5120640" cy="640080"/>
           </a:xfrm>
           <a:prstGeom prst="rect">
             <a:avLst/>
@@ -10146,7 +11236,7 @@
                   <a:schemeClr val="tx1"/>
                 </a:solidFill>
               </a:rPr>
-              <a:t>Weeks of workshops become hours. The file is readable by people and usable by agents.</a:t>
+              <a:t>It kicks off the software development process, in hours instead of weeks of workshops.</a:t>
             </a:r>
             <a:endParaRPr lang="en-US" sz="1900" dirty="0"/>
           </a:p>
@@ -10154,7 +11244,86 @@
       </p:sp>
       <p:sp>
         <p:nvSpPr>
-          <p:cNvPr id="10" name="Code card"/>
+          <p:cNvPr id="10" name="Label 4"/>
+          <p:cNvSpPr txBox="1"/>
+          <p:nvPr/>
+        </p:nvSpPr>
+        <p:spPr>
+          <a:xfrm>
+            <a:off x="548640" y="5266944"/>
+            <a:ext cx="5120640" cy="274320"/>
+          </a:xfrm>
+          <a:prstGeom prst="rect">
+            <a:avLst/>
+          </a:prstGeom>
+          <a:noFill/>
+          <a:ln/>
+        </p:spPr>
+        <p:txBody>
+          <a:bodyPr wrap="square" lIns="0" tIns="0" rIns="0" bIns="0" rtlCol="0" anchor="ctr"/>
+          <a:lstStyle/>
+          <a:p>
+            <a:pPr indent="0" marL="0">
+              <a:buNone/>
+            </a:pPr>
+            <a:r>
+              <a:rPr lang="en-US" sz="1200" b="1" spc="200" kern="0" dirty="0">
+                <a:solidFill>
+                  <a:schemeClr val="tx2"/>
+                </a:solidFill>
+              </a:rPr>
+              <a:t>READY-MADE SKILL</a:t>
+            </a:r>
+            <a:endParaRPr lang="en-US" sz="1200" dirty="0"/>
+          </a:p>
+        </p:txBody>
+      </p:sp>
+      <p:sp>
+        <p:nvSpPr>
+          <p:cNvPr id="11" name="Value 4"/>
+          <p:cNvSpPr txBox="1"/>
+          <p:nvPr/>
+        </p:nvSpPr>
+        <p:spPr>
+          <a:xfrm>
+            <a:off x="548640" y="5559552"/>
+            <a:ext cx="5120640" cy="365760"/>
+          </a:xfrm>
+          <a:prstGeom prst="rect">
+            <a:avLst/>
+          </a:prstGeom>
+          <a:noFill/>
+          <a:ln/>
+        </p:spPr>
+        <p:txBody>
+          <a:bodyPr wrap="square" lIns="0" tIns="0" rIns="0" bIns="0" rtlCol="0" anchor="t"/>
+          <a:lstStyle/>
+          <a:p>
+            <a:pPr indent="0" marL="0">
+              <a:buNone/>
+            </a:pPr>
+            <a:r>
+              <a:rPr lang="en-US" sz="1900" u="sng" dirty="0">
+                <a:solidFill>
+                  <a:schemeClr val="accent2"/>
+                </a:solidFill>
+                <a:hlinkClick r:id="rId1" invalidUrl="" action="" tgtFrame="" tooltip="" history="1" highlightClick="0" endSnd="0">
+                  <a:extLst>
+                    <a:ext uri="{A12FA001-AC4F-418D-AE19-62706E023703}">
+                      <ahyp:hlinkClr xmlns:ahyp="http://schemas.microsoft.com/office/drawing/2018/hyperlinkcolor" val="tx"/>
+                    </a:ext>
+                  </a:extLst>
+                </a:hlinkClick>
+              </a:rPr>
+              <a:t>Matt Pocock’s grill-me skill</a:t>
+            </a:r>
+            <a:endParaRPr lang="en-US" sz="1900" dirty="0"/>
+          </a:p>
+        </p:txBody>
+      </p:sp>
+      <p:sp>
+        <p:nvSpPr>
+          <p:cNvPr id="12" name="Code card"/>
           <p:cNvSpPr/>
           <p:nvPr/>
         </p:nvSpPr>
@@ -10181,7 +11350,7 @@
       </p:sp>
       <p:sp>
         <p:nvSpPr>
-          <p:cNvPr id="11" name="Code"/>
+          <p:cNvPr id="13" name="Code"/>
           <p:cNvSpPr txBox="1"/>
           <p:nvPr/>
         </p:nvSpPr>
@@ -10754,7 +11923,7 @@
         <p:spPr>
           <a:xfrm>
             <a:off x="548640" y="2075688"/>
-            <a:ext cx="5120640" cy="960120"/>
+            <a:ext cx="5120640" cy="640080"/>
           </a:xfrm>
           <a:prstGeom prst="rect">
             <a:avLst/>
@@ -10789,7 +11958,7 @@
         </p:nvSpPr>
         <p:spPr>
           <a:xfrm>
-            <a:off x="548640" y="3246120"/>
+            <a:off x="548640" y="2944368"/>
             <a:ext cx="5120640" cy="274320"/>
           </a:xfrm>
           <a:prstGeom prst="rect">
@@ -10825,8 +11994,8 @@
         </p:nvSpPr>
         <p:spPr>
           <a:xfrm>
-            <a:off x="548640" y="3538728"/>
-            <a:ext cx="5120640" cy="960120"/>
+            <a:off x="548640" y="3236976"/>
+            <a:ext cx="5120640" cy="914400"/>
           </a:xfrm>
           <a:prstGeom prst="rect">
             <a:avLst/>
@@ -10861,7 +12030,7 @@
         </p:nvSpPr>
         <p:spPr>
           <a:xfrm>
-            <a:off x="548640" y="4709160"/>
+            <a:off x="548640" y="4379976"/>
             <a:ext cx="5120640" cy="274320"/>
           </a:xfrm>
           <a:prstGeom prst="rect">
@@ -10897,8 +12066,8 @@
         </p:nvSpPr>
         <p:spPr>
           <a:xfrm>
-            <a:off x="548640" y="5001768"/>
-            <a:ext cx="5120640" cy="960120"/>
+            <a:off x="548640" y="4672584"/>
+            <a:ext cx="5120640" cy="640080"/>
           </a:xfrm>
           <a:prstGeom prst="rect">
             <a:avLst/>
@@ -10927,7 +12096,86 @@
       </p:sp>
       <p:sp>
         <p:nvSpPr>
-          <p:cNvPr id="10" name="Text 8"/>
+          <p:cNvPr id="10" name="Label 4"/>
+          <p:cNvSpPr txBox="1"/>
+          <p:nvPr/>
+        </p:nvSpPr>
+        <p:spPr>
+          <a:xfrm>
+            <a:off x="548640" y="5541264"/>
+            <a:ext cx="5120640" cy="274320"/>
+          </a:xfrm>
+          <a:prstGeom prst="rect">
+            <a:avLst/>
+          </a:prstGeom>
+          <a:noFill/>
+          <a:ln/>
+        </p:spPr>
+        <p:txBody>
+          <a:bodyPr wrap="square" lIns="0" tIns="0" rIns="0" bIns="0" rtlCol="0" anchor="ctr"/>
+          <a:lstStyle/>
+          <a:p>
+            <a:pPr indent="0" marL="0">
+              <a:buNone/>
+            </a:pPr>
+            <a:r>
+              <a:rPr lang="en-US" sz="1200" b="1" spc="200" kern="0" dirty="0">
+                <a:solidFill>
+                  <a:schemeClr val="tx2"/>
+                </a:solidFill>
+              </a:rPr>
+              <a:t>READY-MADE SKILL</a:t>
+            </a:r>
+            <a:endParaRPr lang="en-US" sz="1200" dirty="0"/>
+          </a:p>
+        </p:txBody>
+      </p:sp>
+      <p:sp>
+        <p:nvSpPr>
+          <p:cNvPr id="11" name="Value 4"/>
+          <p:cNvSpPr txBox="1"/>
+          <p:nvPr/>
+        </p:nvSpPr>
+        <p:spPr>
+          <a:xfrm>
+            <a:off x="548640" y="5833872"/>
+            <a:ext cx="5120640" cy="365760"/>
+          </a:xfrm>
+          <a:prstGeom prst="rect">
+            <a:avLst/>
+          </a:prstGeom>
+          <a:noFill/>
+          <a:ln/>
+        </p:spPr>
+        <p:txBody>
+          <a:bodyPr wrap="square" lIns="0" tIns="0" rIns="0" bIns="0" rtlCol="0" anchor="t"/>
+          <a:lstStyle/>
+          <a:p>
+            <a:pPr indent="0" marL="0">
+              <a:buNone/>
+            </a:pPr>
+            <a:r>
+              <a:rPr lang="en-US" sz="1900" u="sng" dirty="0">
+                <a:solidFill>
+                  <a:schemeClr val="accent2"/>
+                </a:solidFill>
+                <a:hlinkClick r:id="rId1" invalidUrl="" action="" tgtFrame="" tooltip="" history="1" highlightClick="0" endSnd="0">
+                  <a:extLst>
+                    <a:ext uri="{A12FA001-AC4F-418D-AE19-62706E023703}">
+                      <ahyp:hlinkClr xmlns:ahyp="http://schemas.microsoft.com/office/drawing/2018/hyperlinkcolor" val="tx"/>
+                    </a:ext>
+                  </a:extLst>
+                </a:hlinkClick>
+              </a:rPr>
+              <a:t>Matt Pocock’s to-spec skill</a:t>
+            </a:r>
+            <a:endParaRPr lang="en-US" sz="1900" dirty="0"/>
+          </a:p>
+        </p:txBody>
+      </p:sp>
+      <p:sp>
+        <p:nvSpPr>
+          <p:cNvPr id="12" name="Text 10"/>
           <p:cNvSpPr txBox="1"/>
           <p:nvPr/>
         </p:nvSpPr>
@@ -10963,7 +12211,7 @@
       </p:sp>
       <p:sp>
         <p:nvSpPr>
-          <p:cNvPr id="11" name="Step 1"/>
+          <p:cNvPr id="13" name="Step 1"/>
           <p:cNvSpPr/>
           <p:nvPr/>
         </p:nvSpPr>
@@ -10990,7 +12238,7 @@
       </p:sp>
       <p:sp>
         <p:nvSpPr>
-          <p:cNvPr id="12" name="Text 10"/>
+          <p:cNvPr id="14" name="Text 12"/>
           <p:cNvSpPr txBox="1"/>
           <p:nvPr/>
         </p:nvSpPr>
@@ -11026,7 +12274,7 @@
       </p:sp>
       <p:sp>
         <p:nvSpPr>
-          <p:cNvPr id="13" name="Text 11"/>
+          <p:cNvPr id="15" name="Text 13"/>
           <p:cNvSpPr txBox="1"/>
           <p:nvPr/>
         </p:nvSpPr>
@@ -11062,7 +12310,7 @@
       </p:sp>
       <p:sp>
         <p:nvSpPr>
-          <p:cNvPr id="14" name="Step 2"/>
+          <p:cNvPr id="16" name="Step 2"/>
           <p:cNvSpPr/>
           <p:nvPr/>
         </p:nvSpPr>
@@ -11089,7 +12337,7 @@
       </p:sp>
       <p:sp>
         <p:nvSpPr>
-          <p:cNvPr id="15" name="Text 13"/>
+          <p:cNvPr id="17" name="Text 15"/>
           <p:cNvSpPr txBox="1"/>
           <p:nvPr/>
         </p:nvSpPr>
@@ -11125,7 +12373,7 @@
       </p:sp>
       <p:sp>
         <p:nvSpPr>
-          <p:cNvPr id="16" name="Text 14"/>
+          <p:cNvPr id="18" name="Text 16"/>
           <p:cNvSpPr txBox="1"/>
           <p:nvPr/>
         </p:nvSpPr>
@@ -11161,7 +12409,7 @@
       </p:sp>
       <p:sp>
         <p:nvSpPr>
-          <p:cNvPr id="17" name="Step 3"/>
+          <p:cNvPr id="19" name="Step 3"/>
           <p:cNvSpPr/>
           <p:nvPr/>
         </p:nvSpPr>
@@ -11188,7 +12436,7 @@
       </p:sp>
       <p:sp>
         <p:nvSpPr>
-          <p:cNvPr id="18" name="Text 16"/>
+          <p:cNvPr id="20" name="Text 18"/>
           <p:cNvSpPr txBox="1"/>
           <p:nvPr/>
         </p:nvSpPr>
@@ -11224,7 +12472,7 @@
       </p:sp>
       <p:sp>
         <p:nvSpPr>
-          <p:cNvPr id="19" name="Text 17"/>
+          <p:cNvPr id="21" name="Text 19"/>
           <p:cNvSpPr txBox="1"/>
           <p:nvPr/>
         </p:nvSpPr>
@@ -11398,7 +12646,7 @@
                   <a:schemeClr val="tx1"/>
                 </a:solidFill>
               </a:rPr>
-              <a:t>Plan first, then build with the team’s knowledge</a:t>
+              <a:t>Start in plan mode: the agent writes plan.md</a:t>
             </a:r>
             <a:endParaRPr lang="en-US" sz="3400" dirty="0"/>
           </a:p>
@@ -11406,14 +12654,41 @@
       </p:sp>
       <p:sp>
         <p:nvSpPr>
-          <p:cNvPr id="4" name="Label 1"/>
+          <p:cNvPr id="4" name="Plan step 1"/>
+          <p:cNvSpPr/>
+          <p:nvPr/>
+        </p:nvSpPr>
+        <p:spPr>
+          <a:xfrm>
+            <a:off x="548640" y="1783080"/>
+            <a:ext cx="5120640" cy="1280160"/>
+          </a:xfrm>
+          <a:prstGeom prst="roundRect">
+            <a:avLst>
+              <a:gd name="adj" fmla="val 8571"/>
+            </a:avLst>
+          </a:prstGeom>
+          <a:solidFill>
+            <a:schemeClr val="bg2"/>
+          </a:solidFill>
+          <a:ln w="12700">
+            <a:solidFill>
+              <a:schemeClr val="bg2"/>
+            </a:solidFill>
+            <a:prstDash val="solid"/>
+          </a:ln>
+        </p:spPr>
+      </p:sp>
+      <p:sp>
+        <p:nvSpPr>
+          <p:cNvPr id="5" name="Text 3"/>
           <p:cNvSpPr txBox="1"/>
           <p:nvPr/>
         </p:nvSpPr>
         <p:spPr>
           <a:xfrm>
-            <a:off x="548640" y="1783080"/>
-            <a:ext cx="5120640" cy="274320"/>
+            <a:off x="822960" y="1783080"/>
+            <a:ext cx="548640" cy="1280160"/>
           </a:xfrm>
           <a:prstGeom prst="rect">
             <a:avLst/>
@@ -11429,27 +12704,27 @@
               <a:buNone/>
             </a:pPr>
             <a:r>
-              <a:rPr lang="en-US" sz="1200" b="1" spc="200" kern="0" dirty="0">
-                <a:solidFill>
-                  <a:schemeClr val="tx2"/>
-                </a:solidFill>
-              </a:rPr>
-              <a:t>WHO</a:t>
-            </a:r>
-            <a:endParaRPr lang="en-US" sz="1200" dirty="0"/>
-          </a:p>
-        </p:txBody>
-      </p:sp>
-      <p:sp>
-        <p:nvSpPr>
-          <p:cNvPr id="5" name="Value 1"/>
+              <a:rPr lang="en-US" sz="3200" b="1" dirty="0">
+                <a:solidFill>
+                  <a:schemeClr val="accent2"/>
+                </a:solidFill>
+              </a:rPr>
+              <a:t>1</a:t>
+            </a:r>
+            <a:endParaRPr lang="en-US" sz="3200" dirty="0"/>
+          </a:p>
+        </p:txBody>
+      </p:sp>
+      <p:sp>
+        <p:nvSpPr>
+          <p:cNvPr id="6" name="Text 4"/>
           <p:cNvSpPr txBox="1"/>
           <p:nvPr/>
         </p:nvSpPr>
         <p:spPr>
           <a:xfrm>
-            <a:off x="548640" y="2075688"/>
-            <a:ext cx="5120640" cy="960120"/>
+            <a:off x="1463040" y="1783080"/>
+            <a:ext cx="3977640" cy="1280160"/>
           </a:xfrm>
           <a:prstGeom prst="rect">
             <a:avLst/>
@@ -11458,34 +12733,61 @@
           <a:ln/>
         </p:spPr>
         <p:txBody>
-          <a:bodyPr wrap="square" lIns="0" tIns="0" rIns="0" bIns="0" rtlCol="0" anchor="t"/>
-          <a:lstStyle/>
-          <a:p>
-            <a:pPr indent="0" marL="0">
-              <a:buNone/>
-            </a:pPr>
-            <a:r>
-              <a:rPr lang="en-US" sz="1900" dirty="0">
+          <a:bodyPr wrap="square" lIns="0" tIns="0" rIns="0" bIns="0" rtlCol="0" anchor="ctr"/>
+          <a:lstStyle/>
+          <a:p>
+            <a:pPr indent="0" marL="0">
+              <a:buNone/>
+            </a:pPr>
+            <a:r>
+              <a:rPr lang="en-US" sz="1800" dirty="0">
                 <a:solidFill>
                   <a:schemeClr val="tx1"/>
                 </a:solidFill>
               </a:rPr>
-              <a:t>Engineers</a:t>
-            </a:r>
-            <a:endParaRPr lang="en-US" sz="1900" dirty="0"/>
-          </a:p>
-        </p:txBody>
-      </p:sp>
-      <p:sp>
-        <p:nvSpPr>
-          <p:cNvPr id="6" name="Label 2"/>
+              <a:t>Open the agent in plan mode with spec.md and intent.md</a:t>
+            </a:r>
+            <a:endParaRPr lang="en-US" sz="1800" dirty="0"/>
+          </a:p>
+        </p:txBody>
+      </p:sp>
+      <p:sp>
+        <p:nvSpPr>
+          <p:cNvPr id="7" name="Plan step 2"/>
+          <p:cNvSpPr/>
+          <p:nvPr/>
+        </p:nvSpPr>
+        <p:spPr>
+          <a:xfrm>
+            <a:off x="548640" y="3246120"/>
+            <a:ext cx="5120640" cy="1280160"/>
+          </a:xfrm>
+          <a:prstGeom prst="roundRect">
+            <a:avLst>
+              <a:gd name="adj" fmla="val 8571"/>
+            </a:avLst>
+          </a:prstGeom>
+          <a:solidFill>
+            <a:schemeClr val="bg2"/>
+          </a:solidFill>
+          <a:ln w="12700">
+            <a:solidFill>
+              <a:schemeClr val="bg2"/>
+            </a:solidFill>
+            <a:prstDash val="solid"/>
+          </a:ln>
+        </p:spPr>
+      </p:sp>
+      <p:sp>
+        <p:nvSpPr>
+          <p:cNvPr id="8" name="Text 6"/>
           <p:cNvSpPr txBox="1"/>
           <p:nvPr/>
         </p:nvSpPr>
         <p:spPr>
           <a:xfrm>
-            <a:off x="548640" y="3246120"/>
-            <a:ext cx="5120640" cy="274320"/>
+            <a:off x="822960" y="3246120"/>
+            <a:ext cx="548640" cy="1280160"/>
           </a:xfrm>
           <a:prstGeom prst="rect">
             <a:avLst/>
@@ -11501,27 +12803,27 @@
               <a:buNone/>
             </a:pPr>
             <a:r>
-              <a:rPr lang="en-US" sz="1200" b="1" spc="200" kern="0" dirty="0">
-                <a:solidFill>
-                  <a:schemeClr val="tx2"/>
-                </a:solidFill>
-              </a:rPr>
-              <a:t>START IN PLAN MODE</a:t>
-            </a:r>
-            <a:endParaRPr lang="en-US" sz="1200" dirty="0"/>
-          </a:p>
-        </p:txBody>
-      </p:sp>
-      <p:sp>
-        <p:nvSpPr>
-          <p:cNvPr id="7" name="Value 2"/>
+              <a:rPr lang="en-US" sz="3200" b="1" dirty="0">
+                <a:solidFill>
+                  <a:schemeClr val="accent2"/>
+                </a:solidFill>
+              </a:rPr>
+              <a:t>2</a:t>
+            </a:r>
+            <a:endParaRPr lang="en-US" sz="3200" dirty="0"/>
+          </a:p>
+        </p:txBody>
+      </p:sp>
+      <p:sp>
+        <p:nvSpPr>
+          <p:cNvPr id="9" name="Text 7"/>
           <p:cNvSpPr txBox="1"/>
           <p:nvPr/>
         </p:nvSpPr>
         <p:spPr>
           <a:xfrm>
-            <a:off x="548640" y="3538728"/>
-            <a:ext cx="5120640" cy="960120"/>
+            <a:off x="1463040" y="3246120"/>
+            <a:ext cx="3977640" cy="1280160"/>
           </a:xfrm>
           <a:prstGeom prst="rect">
             <a:avLst/>
@@ -11530,146 +12832,38 @@
           <a:ln/>
         </p:spPr>
         <p:txBody>
-          <a:bodyPr wrap="square" lIns="0" tIns="0" rIns="0" bIns="0" rtlCol="0" anchor="t"/>
-          <a:lstStyle/>
-          <a:p>
-            <a:pPr indent="0" marL="0">
-              <a:buNone/>
-            </a:pPr>
-            <a:r>
-              <a:rPr lang="en-US" sz="1900" dirty="0">
+          <a:bodyPr wrap="square" lIns="0" tIns="0" rIns="0" bIns="0" rtlCol="0" anchor="ctr"/>
+          <a:lstStyle/>
+          <a:p>
+            <a:pPr indent="0" marL="0">
+              <a:buNone/>
+            </a:pPr>
+            <a:r>
+              <a:rPr lang="en-US" sz="1800" dirty="0">
                 <a:solidFill>
                   <a:schemeClr val="tx1"/>
                 </a:solidFill>
               </a:rPr>
-              <a:t>Ask what could break and which step is riskiest. Commit the result as plan.md.</a:t>
-            </a:r>
-            <a:endParaRPr lang="en-US" sz="1900" dirty="0"/>
-          </a:p>
-        </p:txBody>
-      </p:sp>
-      <p:sp>
-        <p:nvSpPr>
-          <p:cNvPr id="8" name="Label 3"/>
-          <p:cNvSpPr txBox="1"/>
+              <a:t>Question the plan: what could break, which step is riskiest, what else could work</a:t>
+            </a:r>
+            <a:endParaRPr lang="en-US" sz="1800" dirty="0"/>
+          </a:p>
+        </p:txBody>
+      </p:sp>
+      <p:sp>
+        <p:nvSpPr>
+          <p:cNvPr id="10" name="Plan step 3"/>
+          <p:cNvSpPr/>
           <p:nvPr/>
         </p:nvSpPr>
         <p:spPr>
           <a:xfrm>
             <a:off x="548640" y="4709160"/>
-            <a:ext cx="5120640" cy="274320"/>
-          </a:xfrm>
-          <a:prstGeom prst="rect">
-            <a:avLst/>
-          </a:prstGeom>
-          <a:noFill/>
-          <a:ln/>
-        </p:spPr>
-        <p:txBody>
-          <a:bodyPr wrap="square" lIns="0" tIns="0" rIns="0" bIns="0" rtlCol="0" anchor="ctr"/>
-          <a:lstStyle/>
-          <a:p>
-            <a:pPr indent="0" marL="0">
-              <a:buNone/>
-            </a:pPr>
-            <a:r>
-              <a:rPr lang="en-US" sz="1200" b="1" spc="200" kern="0" dirty="0">
-                <a:solidFill>
-                  <a:schemeClr val="tx2"/>
-                </a:solidFill>
-              </a:rPr>
-              <a:t>KEEP IT IN SYNC</a:t>
-            </a:r>
-            <a:endParaRPr lang="en-US" sz="1200" dirty="0"/>
-          </a:p>
-        </p:txBody>
-      </p:sp>
-      <p:sp>
-        <p:nvSpPr>
-          <p:cNvPr id="9" name="Value 3"/>
-          <p:cNvSpPr txBox="1"/>
-          <p:nvPr/>
-        </p:nvSpPr>
-        <p:spPr>
-          <a:xfrm>
-            <a:off x="548640" y="5001768"/>
-            <a:ext cx="5120640" cy="960120"/>
-          </a:xfrm>
-          <a:prstGeom prst="rect">
-            <a:avLst/>
-          </a:prstGeom>
-          <a:noFill/>
-          <a:ln/>
-        </p:spPr>
-        <p:txBody>
-          <a:bodyPr wrap="square" lIns="0" tIns="0" rIns="0" bIns="0" rtlCol="0" anchor="t"/>
-          <a:lstStyle/>
-          <a:p>
-            <a:pPr indent="0" marL="0">
-              <a:buNone/>
-            </a:pPr>
-            <a:r>
-              <a:rPr lang="en-US" sz="1900" dirty="0">
-                <a:solidFill>
-                  <a:schemeClr val="tx1"/>
-                </a:solidFill>
-              </a:rPr>
-              <a:t>If the build drifts from the plan, update plan.md in the same commit.</a:t>
-            </a:r>
-            <a:endParaRPr lang="en-US" sz="1900" dirty="0"/>
-          </a:p>
-        </p:txBody>
-      </p:sp>
-      <p:sp>
-        <p:nvSpPr>
-          <p:cNvPr id="10" name="Text 8"/>
-          <p:cNvSpPr txBox="1"/>
-          <p:nvPr/>
-        </p:nvSpPr>
-        <p:spPr>
-          <a:xfrm>
-            <a:off x="6126480" y="1783080"/>
-            <a:ext cx="5516575" cy="274320"/>
-          </a:xfrm>
-          <a:prstGeom prst="rect">
-            <a:avLst/>
-          </a:prstGeom>
-          <a:noFill/>
-          <a:ln/>
-        </p:spPr>
-        <p:txBody>
-          <a:bodyPr wrap="square" lIns="0" tIns="0" rIns="0" bIns="0" rtlCol="0" anchor="ctr"/>
-          <a:lstStyle/>
-          <a:p>
-            <a:pPr indent="0" marL="0">
-              <a:buNone/>
-            </a:pPr>
-            <a:r>
-              <a:rPr lang="en-US" sz="1200" b="1" spc="200" kern="0" dirty="0">
-                <a:solidFill>
-                  <a:schemeClr val="tx2"/>
-                </a:solidFill>
-              </a:rPr>
-              <a:t>AGENTS.MD: READ AT EVERY SESSION START</a:t>
-            </a:r>
-            <a:endParaRPr lang="en-US" sz="1200" dirty="0"/>
-          </a:p>
-        </p:txBody>
-      </p:sp>
-      <p:sp>
-        <p:nvSpPr>
-          <p:cNvPr id="11" name="Code card"/>
-          <p:cNvSpPr/>
-          <p:nvPr/>
-        </p:nvSpPr>
-        <p:spPr>
-          <a:xfrm>
-            <a:off x="6126480" y="2194560"/>
-            <a:ext cx="5516575" cy="4023360"/>
+            <a:ext cx="5120640" cy="1280160"/>
           </a:xfrm>
           <a:prstGeom prst="roundRect">
             <a:avLst>
-              <a:gd name="adj" fmla="val 2727"/>
+              <a:gd name="adj" fmla="val 8571"/>
             </a:avLst>
           </a:prstGeom>
           <a:solidFill>
@@ -11685,14 +12879,149 @@
       </p:sp>
       <p:sp>
         <p:nvSpPr>
-          <p:cNvPr id="12" name="Code"/>
+          <p:cNvPr id="11" name="Text 9"/>
           <p:cNvSpPr txBox="1"/>
           <p:nvPr/>
         </p:nvSpPr>
         <p:spPr>
           <a:xfrm>
+            <a:off x="822960" y="4709160"/>
+            <a:ext cx="548640" cy="1280160"/>
+          </a:xfrm>
+          <a:prstGeom prst="rect">
+            <a:avLst/>
+          </a:prstGeom>
+          <a:noFill/>
+          <a:ln/>
+        </p:spPr>
+        <p:txBody>
+          <a:bodyPr wrap="square" lIns="0" tIns="0" rIns="0" bIns="0" rtlCol="0" anchor="ctr"/>
+          <a:lstStyle/>
+          <a:p>
+            <a:pPr indent="0" marL="0">
+              <a:buNone/>
+            </a:pPr>
+            <a:r>
+              <a:rPr lang="en-US" sz="3200" b="1" dirty="0">
+                <a:solidFill>
+                  <a:schemeClr val="accent1"/>
+                </a:solidFill>
+              </a:rPr>
+              <a:t>3</a:t>
+            </a:r>
+            <a:endParaRPr lang="en-US" sz="3200" dirty="0"/>
+          </a:p>
+        </p:txBody>
+      </p:sp>
+      <p:sp>
+        <p:nvSpPr>
+          <p:cNvPr id="12" name="Text 10"/>
+          <p:cNvSpPr txBox="1"/>
+          <p:nvPr/>
+        </p:nvSpPr>
+        <p:spPr>
+          <a:xfrm>
+            <a:off x="1463040" y="4709160"/>
+            <a:ext cx="3977640" cy="1280160"/>
+          </a:xfrm>
+          <a:prstGeom prst="rect">
+            <a:avLst/>
+          </a:prstGeom>
+          <a:noFill/>
+          <a:ln/>
+        </p:spPr>
+        <p:txBody>
+          <a:bodyPr wrap="square" lIns="0" tIns="0" rIns="0" bIns="0" rtlCol="0" anchor="ctr"/>
+          <a:lstStyle/>
+          <a:p>
+            <a:pPr indent="0" marL="0">
+              <a:buNone/>
+            </a:pPr>
+            <a:r>
+              <a:rPr lang="en-US" sz="1800" dirty="0">
+                <a:solidFill>
+                  <a:schemeClr val="bg1"/>
+                </a:solidFill>
+              </a:rPr>
+              <a:t>Commit it as plan.md. If the build drifts, update plan.md in the same commit.</a:t>
+            </a:r>
+            <a:endParaRPr lang="en-US" sz="1800" dirty="0"/>
+          </a:p>
+        </p:txBody>
+      </p:sp>
+      <p:sp>
+        <p:nvSpPr>
+          <p:cNvPr id="13" name="Text 11"/>
+          <p:cNvSpPr txBox="1"/>
+          <p:nvPr/>
+        </p:nvSpPr>
+        <p:spPr>
+          <a:xfrm>
+            <a:off x="6126480" y="1783080"/>
+            <a:ext cx="5516575" cy="274320"/>
+          </a:xfrm>
+          <a:prstGeom prst="rect">
+            <a:avLst/>
+          </a:prstGeom>
+          <a:noFill/>
+          <a:ln/>
+        </p:spPr>
+        <p:txBody>
+          <a:bodyPr wrap="square" lIns="0" tIns="0" rIns="0" bIns="0" rtlCol="0" anchor="ctr"/>
+          <a:lstStyle/>
+          <a:p>
+            <a:pPr indent="0" marL="0">
+              <a:buNone/>
+            </a:pPr>
+            <a:r>
+              <a:rPr lang="en-US" sz="1200" b="1" spc="200" kern="0" dirty="0">
+                <a:solidFill>
+                  <a:schemeClr val="tx2"/>
+                </a:solidFill>
+              </a:rPr>
+              <a:t>EXAMPLE PLAN.MD</a:t>
+            </a:r>
+            <a:endParaRPr lang="en-US" sz="1200" dirty="0"/>
+          </a:p>
+        </p:txBody>
+      </p:sp>
+      <p:sp>
+        <p:nvSpPr>
+          <p:cNvPr id="14" name="Code card"/>
+          <p:cNvSpPr/>
+          <p:nvPr/>
+        </p:nvSpPr>
+        <p:spPr>
+          <a:xfrm>
+            <a:off x="6126480" y="2194560"/>
+            <a:ext cx="5516575" cy="3291840"/>
+          </a:xfrm>
+          <a:prstGeom prst="roundRect">
+            <a:avLst>
+              <a:gd name="adj" fmla="val 3333"/>
+            </a:avLst>
+          </a:prstGeom>
+          <a:solidFill>
+            <a:schemeClr val="tx1"/>
+          </a:solidFill>
+          <a:ln w="12700">
+            <a:solidFill>
+              <a:schemeClr val="tx1"/>
+            </a:solidFill>
+            <a:prstDash val="solid"/>
+          </a:ln>
+        </p:spPr>
+      </p:sp>
+      <p:sp>
+        <p:nvSpPr>
+          <p:cNvPr id="15" name="Code"/>
+          <p:cNvSpPr txBox="1"/>
+          <p:nvPr/>
+        </p:nvSpPr>
+        <p:spPr>
+          <a:xfrm>
             <a:off x="6446520" y="2468880"/>
-            <a:ext cx="4876495" cy="3474720"/>
+            <a:ext cx="4876495" cy="2743200"/>
           </a:xfrm>
           <a:prstGeom prst="rect">
             <a:avLst/>
@@ -11719,7 +13048,7 @@
                 <a:ea typeface="Courier New" pitchFamily="34" charset="-122"/>
                 <a:cs typeface="Courier New" pitchFamily="34" charset="-120"/>
               </a:rPr>
-              <a:t>## </a:t>
+              <a:t># </a:t>
             </a:r>
             <a:pPr indent="0" marL="0">
               <a:lnSpc>
@@ -11736,7 +13065,7 @@
                 <a:ea typeface="Courier New" pitchFamily="34" charset="-122"/>
                 <a:cs typeface="Courier New" pitchFamily="34" charset="-120"/>
               </a:rPr>
-              <a:t>Commands</a:t>
+              <a:t>Plan: claims status self-service</a:t>
             </a:r>
             <a:endParaRPr lang="en-US" sz="1400" dirty="0"/>
           </a:p>
@@ -11750,17 +13079,14 @@
             <a:r>
               <a:rPr lang="en-US" sz="1400" dirty="0">
                 <a:solidFill>
-                  <a:schemeClr val="accent6"/>
+                  <a:schemeClr val="accent1"/>
                 </a:solidFill>
                 <a:latin typeface="Courier New" pitchFamily="34" charset="0"/>
                 <a:ea typeface="Courier New" pitchFamily="34" charset="-122"/>
                 <a:cs typeface="Courier New" pitchFamily="34" charset="-120"/>
               </a:rPr>
-              <a:t>Build: make build · Test: make test</a:t>
-            </a:r>
-            <a:endParaRPr lang="en-US" sz="1400" dirty="0"/>
-          </a:p>
-          <a:p>
+              <a:t>## </a:t>
+            </a:r>
             <a:pPr indent="0" marL="0">
               <a:lnSpc>
                 <a:spcPct val="115000"/>
@@ -11770,14 +13096,17 @@
             <a:r>
               <a:rPr lang="en-US" sz="1400" dirty="0">
                 <a:solidFill>
-                  <a:schemeClr val="accent1"/>
+                  <a:schemeClr val="accent6"/>
                 </a:solidFill>
                 <a:latin typeface="Courier New" pitchFamily="34" charset="0"/>
                 <a:ea typeface="Courier New" pitchFamily="34" charset="-122"/>
                 <a:cs typeface="Courier New" pitchFamily="34" charset="-120"/>
               </a:rPr>
-              <a:t>## </a:t>
-            </a:r>
+              <a:t>Files that change</a:t>
+            </a:r>
+            <a:endParaRPr lang="en-US" sz="1400" dirty="0"/>
+          </a:p>
+          <a:p>
             <a:pPr indent="0" marL="0">
               <a:lnSpc>
                 <a:spcPct val="115000"/>
@@ -11793,7 +13122,7 @@
                 <a:ea typeface="Courier New" pitchFamily="34" charset="-122"/>
                 <a:cs typeface="Courier New" pitchFamily="34" charset="-120"/>
               </a:rPr>
-              <a:t>Conventions</a:t>
+              <a:t>StatusPanel.tsx, status.py, test_status.py</a:t>
             </a:r>
             <a:endParaRPr lang="en-US" sz="1400" dirty="0"/>
           </a:p>
@@ -11807,17 +13136,14 @@
             <a:r>
               <a:rPr lang="en-US" sz="1400" dirty="0">
                 <a:solidFill>
-                  <a:schemeClr val="accent6"/>
+                  <a:schemeClr val="accent1"/>
                 </a:solidFill>
                 <a:latin typeface="Courier New" pitchFamily="34" charset="0"/>
                 <a:ea typeface="Courier New" pitchFamily="34" charset="-122"/>
                 <a:cs typeface="Courier New" pitchFamily="34" charset="-120"/>
               </a:rPr>
-              <a:t>Money is always BigDecimal, never double.</a:t>
-            </a:r>
-            <a:endParaRPr lang="en-US" sz="1400" dirty="0"/>
-          </a:p>
-          <a:p>
+              <a:t>## </a:t>
+            </a:r>
             <a:pPr indent="0" marL="0">
               <a:lnSpc>
                 <a:spcPct val="115000"/>
@@ -11827,14 +13153,17 @@
             <a:r>
               <a:rPr lang="en-US" sz="1400" dirty="0">
                 <a:solidFill>
-                  <a:schemeClr val="accent1"/>
+                  <a:schemeClr val="accent6"/>
                 </a:solidFill>
                 <a:latin typeface="Courier New" pitchFamily="34" charset="0"/>
                 <a:ea typeface="Courier New" pitchFamily="34" charset="-122"/>
                 <a:cs typeface="Courier New" pitchFamily="34" charset="-120"/>
               </a:rPr>
-              <a:t>## </a:t>
-            </a:r>
+              <a:t>Order of work</a:t>
+            </a:r>
+            <a:endParaRPr lang="en-US" sz="1400" dirty="0"/>
+          </a:p>
+          <a:p>
             <a:pPr indent="0" marL="0">
               <a:lnSpc>
                 <a:spcPct val="115000"/>
@@ -11850,7 +13179,7 @@
                 <a:ea typeface="Courier New" pitchFamily="34" charset="-122"/>
                 <a:cs typeface="Courier New" pitchFamily="34" charset="-120"/>
               </a:rPr>
-              <a:t>Architecture</a:t>
+              <a:t>1. Status endpoint behind auth (R1–R3)</a:t>
             </a:r>
             <a:endParaRPr lang="en-US" sz="1400" dirty="0"/>
           </a:p>
@@ -11870,7 +13199,7 @@
                 <a:ea typeface="Courier New" pitchFamily="34" charset="-122"/>
                 <a:cs typeface="Courier New" pitchFamily="34" charset="-120"/>
               </a:rPr>
-              <a:t>api/ controllers · core/ domain logic</a:t>
+              <a:t>2. Panel against the endpoint (R1, R4)</a:t>
             </a:r>
             <a:endParaRPr lang="en-US" sz="1400" dirty="0"/>
           </a:p>
@@ -11884,14 +13213,17 @@
             <a:r>
               <a:rPr lang="en-US" sz="1400" dirty="0">
                 <a:solidFill>
-                  <a:schemeClr val="accent1"/>
+                  <a:schemeClr val="accent6"/>
                 </a:solidFill>
                 <a:latin typeface="Courier New" pitchFamily="34" charset="0"/>
                 <a:ea typeface="Courier New" pitchFamily="34" charset="-122"/>
                 <a:cs typeface="Courier New" pitchFamily="34" charset="-120"/>
               </a:rPr>
-              <a:t>## </a:t>
-            </a:r>
+              <a:t>3. Wire into the portal nav</a:t>
+            </a:r>
+            <a:endParaRPr lang="en-US" sz="1400" dirty="0"/>
+          </a:p>
+          <a:p>
             <a:pPr indent="0" marL="0">
               <a:lnSpc>
                 <a:spcPct val="115000"/>
@@ -11901,17 +13233,14 @@
             <a:r>
               <a:rPr lang="en-US" sz="1400" dirty="0">
                 <a:solidFill>
-                  <a:schemeClr val="accent6"/>
+                  <a:schemeClr val="accent1"/>
                 </a:solidFill>
                 <a:latin typeface="Courier New" pitchFamily="34" charset="0"/>
                 <a:ea typeface="Courier New" pitchFamily="34" charset="-122"/>
                 <a:cs typeface="Courier New" pitchFamily="34" charset="-120"/>
               </a:rPr>
-              <a:t>Things the agent gets wrong</a:t>
-            </a:r>
-            <a:endParaRPr lang="en-US" sz="1400" dirty="0"/>
-          </a:p>
-          <a:p>
+              <a:t>## </a:t>
+            </a:r>
             <a:pPr indent="0" marL="0">
               <a:lnSpc>
                 <a:spcPct val="115000"/>
@@ -11927,7 +13256,7 @@
                 <a:ea typeface="Courier New" pitchFamily="34" charset="-122"/>
                 <a:cs typeface="Courier New" pitchFamily="34" charset="-120"/>
               </a:rPr>
-              <a:t>Do not bump dependency versions.</a:t>
+              <a:t>Risks</a:t>
             </a:r>
             <a:endParaRPr lang="en-US" sz="1400" dirty="0"/>
           </a:p>
@@ -11947,7 +13276,64 @@
                 <a:ea typeface="Courier New" pitchFamily="34" charset="-122"/>
                 <a:cs typeface="Courier New" pitchFamily="34" charset="-120"/>
               </a:rPr>
-              <a:t>The legacy v1/ package is frozen.</a:t>
+              <a:t>claims-core limits 50 rps: cache it.</a:t>
+            </a:r>
+            <a:endParaRPr lang="en-US" sz="1400" dirty="0"/>
+          </a:p>
+          <a:p>
+            <a:pPr indent="0" marL="0">
+              <a:lnSpc>
+                <a:spcPct val="115000"/>
+              </a:lnSpc>
+              <a:buNone/>
+            </a:pPr>
+            <a:r>
+              <a:rPr lang="en-US" sz="1400" dirty="0">
+                <a:solidFill>
+                  <a:schemeClr val="accent1"/>
+                </a:solidFill>
+                <a:latin typeface="Courier New" pitchFamily="34" charset="0"/>
+                <a:ea typeface="Courier New" pitchFamily="34" charset="-122"/>
+                <a:cs typeface="Courier New" pitchFamily="34" charset="-120"/>
+              </a:rPr>
+              <a:t>## </a:t>
+            </a:r>
+            <a:pPr indent="0" marL="0">
+              <a:lnSpc>
+                <a:spcPct val="115000"/>
+              </a:lnSpc>
+              <a:buNone/>
+            </a:pPr>
+            <a:r>
+              <a:rPr lang="en-US" sz="1400" dirty="0">
+                <a:solidFill>
+                  <a:schemeClr val="accent6"/>
+                </a:solidFill>
+                <a:latin typeface="Courier New" pitchFamily="34" charset="0"/>
+                <a:ea typeface="Courier New" pitchFamily="34" charset="-122"/>
+                <a:cs typeface="Courier New" pitchFamily="34" charset="-120"/>
+              </a:rPr>
+              <a:t>Proof</a:t>
+            </a:r>
+            <a:endParaRPr lang="en-US" sz="1400" dirty="0"/>
+          </a:p>
+          <a:p>
+            <a:pPr indent="0" marL="0">
+              <a:lnSpc>
+                <a:spcPct val="115000"/>
+              </a:lnSpc>
+              <a:buNone/>
+            </a:pPr>
+            <a:r>
+              <a:rPr lang="en-US" sz="1400" dirty="0">
+                <a:solidFill>
+                  <a:schemeClr val="accent6"/>
+                </a:solidFill>
+                <a:latin typeface="Courier New" pitchFamily="34" charset="0"/>
+                <a:ea typeface="Courier New" pitchFamily="34" charset="-122"/>
+                <a:cs typeface="Courier New" pitchFamily="34" charset="-120"/>
+              </a:rPr>
+              <a:t>test_status.py covers all four states.</a:t>
             </a:r>
             <a:endParaRPr lang="en-US" sz="1400" dirty="0"/>
           </a:p>
@@ -12055,7 +13441,7 @@
                   <a:schemeClr val="accent2"/>
                 </a:solidFill>
               </a:rPr>
-              <a:t>STAGE 3 · BUILD TOOLKIT</a:t>
+              <a:t>STAGE 3 · BUILD</a:t>
             </a:r>
             <a:endParaRPr lang="en-US" sz="1400" dirty="0"/>
           </a:p>
@@ -12093,7 +13479,7 @@
                   <a:schemeClr val="tx1"/>
                 </a:solidFill>
               </a:rPr>
-              <a:t>Four tools carry the team’s way of working</a:t>
+              <a:t>AGENTS.md holds the team’s knowledge</a:t>
             </a:r>
             <a:endParaRPr lang="en-US" sz="3400" dirty="0"/>
           </a:p>
@@ -12101,26 +13487,242 @@
       </p:sp>
       <p:sp>
         <p:nvSpPr>
-          <p:cNvPr id="4" name="Skills card"/>
+          <p:cNvPr id="4" name="Label 1"/>
+          <p:cNvSpPr txBox="1"/>
+          <p:nvPr/>
+        </p:nvSpPr>
+        <p:spPr>
+          <a:xfrm>
+            <a:off x="548640" y="1783080"/>
+            <a:ext cx="5120640" cy="274320"/>
+          </a:xfrm>
+          <a:prstGeom prst="rect">
+            <a:avLst/>
+          </a:prstGeom>
+          <a:noFill/>
+          <a:ln/>
+        </p:spPr>
+        <p:txBody>
+          <a:bodyPr wrap="square" lIns="0" tIns="0" rIns="0" bIns="0" rtlCol="0" anchor="ctr"/>
+          <a:lstStyle/>
+          <a:p>
+            <a:pPr indent="0" marL="0">
+              <a:buNone/>
+            </a:pPr>
+            <a:r>
+              <a:rPr lang="en-US" sz="1200" b="1" spc="200" kern="0" dirty="0">
+                <a:solidFill>
+                  <a:schemeClr val="tx2"/>
+                </a:solidFill>
+              </a:rPr>
+              <a:t>WHAT IT HOLDS</a:t>
+            </a:r>
+            <a:endParaRPr lang="en-US" sz="1200" dirty="0"/>
+          </a:p>
+        </p:txBody>
+      </p:sp>
+      <p:sp>
+        <p:nvSpPr>
+          <p:cNvPr id="5" name="Value 1"/>
+          <p:cNvSpPr txBox="1"/>
+          <p:nvPr/>
+        </p:nvSpPr>
+        <p:spPr>
+          <a:xfrm>
+            <a:off x="548640" y="2075688"/>
+            <a:ext cx="5120640" cy="640080"/>
+          </a:xfrm>
+          <a:prstGeom prst="rect">
+            <a:avLst/>
+          </a:prstGeom>
+          <a:noFill/>
+          <a:ln/>
+        </p:spPr>
+        <p:txBody>
+          <a:bodyPr wrap="square" lIns="0" tIns="0" rIns="0" bIns="0" rtlCol="0" anchor="t"/>
+          <a:lstStyle/>
+          <a:p>
+            <a:pPr indent="0" marL="0">
+              <a:buNone/>
+            </a:pPr>
+            <a:r>
+              <a:rPr lang="en-US" sz="1900" dirty="0">
+                <a:solidFill>
+                  <a:schemeClr val="tx1"/>
+                </a:solidFill>
+              </a:rPr>
+              <a:t>Commands, conventions, architecture, and the mistakes the agent keeps making</a:t>
+            </a:r>
+            <a:endParaRPr lang="en-US" sz="1900" dirty="0"/>
+          </a:p>
+        </p:txBody>
+      </p:sp>
+      <p:sp>
+        <p:nvSpPr>
+          <p:cNvPr id="6" name="Label 2"/>
+          <p:cNvSpPr txBox="1"/>
+          <p:nvPr/>
+        </p:nvSpPr>
+        <p:spPr>
+          <a:xfrm>
+            <a:off x="548640" y="2944368"/>
+            <a:ext cx="5120640" cy="274320"/>
+          </a:xfrm>
+          <a:prstGeom prst="rect">
+            <a:avLst/>
+          </a:prstGeom>
+          <a:noFill/>
+          <a:ln/>
+        </p:spPr>
+        <p:txBody>
+          <a:bodyPr wrap="square" lIns="0" tIns="0" rIns="0" bIns="0" rtlCol="0" anchor="ctr"/>
+          <a:lstStyle/>
+          <a:p>
+            <a:pPr indent="0" marL="0">
+              <a:buNone/>
+            </a:pPr>
+            <a:r>
+              <a:rPr lang="en-US" sz="1200" b="1" spc="200" kern="0" dirty="0">
+                <a:solidFill>
+                  <a:schemeClr val="tx2"/>
+                </a:solidFill>
+              </a:rPr>
+              <a:t>WHEN IT’S READ</a:t>
+            </a:r>
+            <a:endParaRPr lang="en-US" sz="1200" dirty="0"/>
+          </a:p>
+        </p:txBody>
+      </p:sp>
+      <p:sp>
+        <p:nvSpPr>
+          <p:cNvPr id="7" name="Value 2"/>
+          <p:cNvSpPr txBox="1"/>
+          <p:nvPr/>
+        </p:nvSpPr>
+        <p:spPr>
+          <a:xfrm>
+            <a:off x="548640" y="3236976"/>
+            <a:ext cx="5120640" cy="365760"/>
+          </a:xfrm>
+          <a:prstGeom prst="rect">
+            <a:avLst/>
+          </a:prstGeom>
+          <a:noFill/>
+          <a:ln/>
+        </p:spPr>
+        <p:txBody>
+          <a:bodyPr wrap="square" lIns="0" tIns="0" rIns="0" bIns="0" rtlCol="0" anchor="t"/>
+          <a:lstStyle/>
+          <a:p>
+            <a:pPr indent="0" marL="0">
+              <a:buNone/>
+            </a:pPr>
+            <a:r>
+              <a:rPr lang="en-US" sz="1900" dirty="0">
+                <a:solidFill>
+                  <a:schemeClr val="tx1"/>
+                </a:solidFill>
+              </a:rPr>
+              <a:t>At the start of every session</a:t>
+            </a:r>
+            <a:endParaRPr lang="en-US" sz="1900" dirty="0"/>
+          </a:p>
+        </p:txBody>
+      </p:sp>
+      <p:sp>
+        <p:nvSpPr>
+          <p:cNvPr id="8" name="Label 3"/>
+          <p:cNvSpPr txBox="1"/>
+          <p:nvPr/>
+        </p:nvSpPr>
+        <p:spPr>
+          <a:xfrm>
+            <a:off x="548640" y="3831336"/>
+            <a:ext cx="5120640" cy="274320"/>
+          </a:xfrm>
+          <a:prstGeom prst="rect">
+            <a:avLst/>
+          </a:prstGeom>
+          <a:noFill/>
+          <a:ln/>
+        </p:spPr>
+        <p:txBody>
+          <a:bodyPr wrap="square" lIns="0" tIns="0" rIns="0" bIns="0" rtlCol="0" anchor="ctr"/>
+          <a:lstStyle/>
+          <a:p>
+            <a:pPr indent="0" marL="0">
+              <a:buNone/>
+            </a:pPr>
+            <a:r>
+              <a:rPr lang="en-US" sz="1200" b="1" spc="200" kern="0" dirty="0">
+                <a:solidFill>
+                  <a:schemeClr val="tx2"/>
+                </a:solidFill>
+              </a:rPr>
+              <a:t>WHO KEEPS IT CURRENT</a:t>
+            </a:r>
+            <a:endParaRPr lang="en-US" sz="1200" dirty="0"/>
+          </a:p>
+        </p:txBody>
+      </p:sp>
+      <p:sp>
+        <p:nvSpPr>
+          <p:cNvPr id="9" name="Value 3"/>
+          <p:cNvSpPr txBox="1"/>
+          <p:nvPr/>
+        </p:nvSpPr>
+        <p:spPr>
+          <a:xfrm>
+            <a:off x="548640" y="4123944"/>
+            <a:ext cx="5120640" cy="640080"/>
+          </a:xfrm>
+          <a:prstGeom prst="rect">
+            <a:avLst/>
+          </a:prstGeom>
+          <a:noFill/>
+          <a:ln/>
+        </p:spPr>
+        <p:txBody>
+          <a:bodyPr wrap="square" lIns="0" tIns="0" rIns="0" bIns="0" rtlCol="0" anchor="t"/>
+          <a:lstStyle/>
+          <a:p>
+            <a:pPr indent="0" marL="0">
+              <a:buNone/>
+            </a:pPr>
+            <a:r>
+              <a:rPr lang="en-US" sz="1900" dirty="0">
+                <a:solidFill>
+                  <a:schemeClr val="tx1"/>
+                </a:solidFill>
+              </a:rPr>
+              <a:t>The whole team. When a mistake repeats, it gets a new line.</a:t>
+            </a:r>
+            <a:endParaRPr lang="en-US" sz="1900" dirty="0"/>
+          </a:p>
+        </p:txBody>
+      </p:sp>
+      <p:sp>
+        <p:nvSpPr>
+          <p:cNvPr id="10" name="Code card"/>
           <p:cNvSpPr/>
           <p:nvPr/>
         </p:nvSpPr>
         <p:spPr>
           <a:xfrm>
-            <a:off x="548640" y="1920240"/>
-            <a:ext cx="2567864" cy="3108960"/>
+            <a:off x="6126480" y="1783080"/>
+            <a:ext cx="5516575" cy="3108960"/>
           </a:xfrm>
           <a:prstGeom prst="roundRect">
             <a:avLst>
-              <a:gd name="adj" fmla="val 4273"/>
+              <a:gd name="adj" fmla="val 3529"/>
             </a:avLst>
           </a:prstGeom>
           <a:solidFill>
-            <a:schemeClr val="bg1"/>
+            <a:schemeClr val="tx1"/>
           </a:solidFill>
           <a:ln w="12700">
             <a:solidFill>
-              <a:schemeClr val="bg1"/>
+              <a:schemeClr val="tx1"/>
             </a:solidFill>
             <a:prstDash val="solid"/>
           </a:ln>
@@ -12128,63 +13730,14 @@
       </p:sp>
       <p:sp>
         <p:nvSpPr>
-          <p:cNvPr id="5" name="Skills icon circle"/>
-          <p:cNvSpPr/>
-          <p:nvPr/>
-        </p:nvSpPr>
-        <p:spPr>
-          <a:xfrm>
-            <a:off x="868680" y="2240280"/>
-            <a:ext cx="731520" cy="731520"/>
-          </a:xfrm>
-          <a:prstGeom prst="ellipse">
-            <a:avLst/>
-          </a:prstGeom>
-          <a:solidFill>
-            <a:schemeClr val="accent5"/>
-          </a:solidFill>
-          <a:ln w="12700">
-            <a:solidFill>
-              <a:schemeClr val="accent5"/>
-            </a:solidFill>
-            <a:prstDash val="solid"/>
-          </a:ln>
-        </p:spPr>
-      </p:sp>
-      <p:pic>
-        <p:nvPicPr>
-          <p:cNvPr id="6" name="Image 0" descr="Skills icon">    </p:cNvPr>
-          <p:cNvPicPr>
-            <a:picLocks noChangeAspect="1"/>
-          </p:cNvPicPr>
-          <p:nvPr/>
-        </p:nvPicPr>
-        <p:blipFill>
-          <a:blip r:embed="rId1"/>
-          <a:stretch>
-            <a:fillRect/>
-          </a:stretch>
-        </p:blipFill>
-        <p:spPr>
-          <a:xfrm>
-            <a:off x="1051560" y="2423160"/>
-            <a:ext cx="365760" cy="365760"/>
-          </a:xfrm>
-          <a:prstGeom prst="rect">
-            <a:avLst/>
-          </a:prstGeom>
-        </p:spPr>
-      </p:pic>
-      <p:sp>
-        <p:nvSpPr>
-          <p:cNvPr id="7" name="Text 4"/>
+          <p:cNvPr id="11" name="Code"/>
           <p:cNvSpPr txBox="1"/>
           <p:nvPr/>
         </p:nvSpPr>
         <p:spPr>
           <a:xfrm>
-            <a:off x="868680" y="3154680"/>
-            <a:ext cx="1927784" cy="457200"/>
+            <a:off x="6446520" y="2057400"/>
+            <a:ext cx="4876495" cy="2560320"/>
           </a:xfrm>
           <a:prstGeom prst="rect">
             <a:avLst/>
@@ -12193,548 +13746,255 @@
           <a:ln/>
         </p:spPr>
         <p:txBody>
-          <a:bodyPr wrap="square" lIns="0" tIns="0" rIns="0" bIns="0" rtlCol="0" anchor="ctr"/>
-          <a:lstStyle/>
-          <a:p>
-            <a:pPr indent="0" marL="0">
-              <a:buNone/>
-            </a:pPr>
-            <a:r>
-              <a:rPr lang="en-US" sz="2100" b="1" dirty="0">
-                <a:solidFill>
-                  <a:schemeClr val="tx1"/>
-                </a:solidFill>
-              </a:rPr>
-              <a:t>Skills</a:t>
-            </a:r>
-            <a:endParaRPr lang="en-US" sz="2100" dirty="0"/>
-          </a:p>
-        </p:txBody>
-      </p:sp>
-      <p:sp>
-        <p:nvSpPr>
-          <p:cNvPr id="8" name="Text 5"/>
-          <p:cNvSpPr txBox="1"/>
-          <p:nvPr/>
-        </p:nvSpPr>
-        <p:spPr>
-          <a:xfrm>
-            <a:off x="868680" y="3657600"/>
-            <a:ext cx="1927784" cy="1188720"/>
-          </a:xfrm>
-          <a:prstGeom prst="rect">
-            <a:avLst/>
-          </a:prstGeom>
-          <a:noFill/>
-          <a:ln/>
-        </p:spPr>
-        <p:txBody>
           <a:bodyPr wrap="square" lIns="0" tIns="0" rIns="0" bIns="0" rtlCol="0" anchor="t"/>
           <a:lstStyle/>
           <a:p>
             <a:pPr indent="0" marL="0">
-              <a:buNone/>
-            </a:pPr>
-            <a:r>
-              <a:rPr lang="en-US" sz="1600" dirty="0">
-                <a:solidFill>
-                  <a:schemeClr val="tx2"/>
-                </a:solidFill>
-              </a:rPr>
-              <a:t>How we work, packaged. Update once, and every team follows.</a:t>
-            </a:r>
-            <a:endParaRPr lang="en-US" sz="1600" dirty="0"/>
-          </a:p>
-        </p:txBody>
-      </p:sp>
-      <p:sp>
-        <p:nvSpPr>
-          <p:cNvPr id="9" name="Hooks card"/>
-          <p:cNvSpPr/>
-          <p:nvPr/>
-        </p:nvSpPr>
-        <p:spPr>
-          <a:xfrm>
-            <a:off x="3390824" y="1920240"/>
-            <a:ext cx="2567864" cy="3108960"/>
-          </a:xfrm>
-          <a:prstGeom prst="roundRect">
-            <a:avLst>
-              <a:gd name="adj" fmla="val 4273"/>
-            </a:avLst>
-          </a:prstGeom>
-          <a:solidFill>
-            <a:schemeClr val="bg1"/>
-          </a:solidFill>
-          <a:ln w="12700">
-            <a:solidFill>
-              <a:schemeClr val="bg1"/>
-            </a:solidFill>
-            <a:prstDash val="solid"/>
-          </a:ln>
-        </p:spPr>
-      </p:sp>
-      <p:sp>
-        <p:nvSpPr>
-          <p:cNvPr id="10" name="Hooks icon circle"/>
-          <p:cNvSpPr/>
-          <p:nvPr/>
-        </p:nvSpPr>
-        <p:spPr>
-          <a:xfrm>
-            <a:off x="3710864" y="2240280"/>
-            <a:ext cx="731520" cy="731520"/>
-          </a:xfrm>
-          <a:prstGeom prst="ellipse">
-            <a:avLst/>
-          </a:prstGeom>
-          <a:solidFill>
-            <a:schemeClr val="accent5"/>
-          </a:solidFill>
-          <a:ln w="12700">
-            <a:solidFill>
-              <a:schemeClr val="accent5"/>
-            </a:solidFill>
-            <a:prstDash val="solid"/>
-          </a:ln>
-        </p:spPr>
-      </p:sp>
-      <p:pic>
-        <p:nvPicPr>
-          <p:cNvPr id="11" name="Image 1" descr="Hooks icon">    </p:cNvPr>
-          <p:cNvPicPr>
-            <a:picLocks noChangeAspect="1"/>
-          </p:cNvPicPr>
-          <p:nvPr/>
-        </p:nvPicPr>
-        <p:blipFill>
-          <a:blip r:embed="rId2"/>
-          <a:stretch>
-            <a:fillRect/>
-          </a:stretch>
-        </p:blipFill>
-        <p:spPr>
-          <a:xfrm>
-            <a:off x="3893744" y="2423160"/>
-            <a:ext cx="365760" cy="365760"/>
-          </a:xfrm>
-          <a:prstGeom prst="rect">
-            <a:avLst/>
-          </a:prstGeom>
-        </p:spPr>
-      </p:pic>
-      <p:sp>
-        <p:nvSpPr>
-          <p:cNvPr id="12" name="Text 8"/>
-          <p:cNvSpPr txBox="1"/>
-          <p:nvPr/>
-        </p:nvSpPr>
-        <p:spPr>
-          <a:xfrm>
-            <a:off x="3710864" y="3154680"/>
-            <a:ext cx="1927784" cy="457200"/>
-          </a:xfrm>
-          <a:prstGeom prst="rect">
-            <a:avLst/>
-          </a:prstGeom>
-          <a:noFill/>
-          <a:ln/>
-        </p:spPr>
-        <p:txBody>
-          <a:bodyPr wrap="square" lIns="0" tIns="0" rIns="0" bIns="0" rtlCol="0" anchor="ctr"/>
-          <a:lstStyle/>
-          <a:p>
-            <a:pPr indent="0" marL="0">
-              <a:buNone/>
-            </a:pPr>
-            <a:r>
-              <a:rPr lang="en-US" sz="2100" b="1" dirty="0">
-                <a:solidFill>
-                  <a:schemeClr val="tx1"/>
-                </a:solidFill>
-              </a:rPr>
-              <a:t>Hooks</a:t>
-            </a:r>
-            <a:endParaRPr lang="en-US" sz="2100" dirty="0"/>
-          </a:p>
-        </p:txBody>
-      </p:sp>
-      <p:sp>
-        <p:nvSpPr>
-          <p:cNvPr id="13" name="Text 9"/>
-          <p:cNvSpPr txBox="1"/>
-          <p:nvPr/>
-        </p:nvSpPr>
-        <p:spPr>
-          <a:xfrm>
-            <a:off x="3710864" y="3657600"/>
-            <a:ext cx="1927784" cy="1188720"/>
-          </a:xfrm>
-          <a:prstGeom prst="rect">
-            <a:avLst/>
-          </a:prstGeom>
-          <a:noFill/>
-          <a:ln/>
-        </p:spPr>
-        <p:txBody>
-          <a:bodyPr wrap="square" lIns="0" tIns="0" rIns="0" bIns="0" rtlCol="0" anchor="t"/>
-          <a:lstStyle/>
-          <a:p>
-            <a:pPr indent="0" marL="0">
-              <a:buNone/>
-            </a:pPr>
-            <a:r>
-              <a:rPr lang="en-US" sz="1600" dirty="0">
-                <a:solidFill>
-                  <a:schemeClr val="tx2"/>
-                </a:solidFill>
-              </a:rPr>
-              <a:t>Rules that always run. They allow, block or ask a person.</a:t>
-            </a:r>
-            <a:endParaRPr lang="en-US" sz="1600" dirty="0"/>
-          </a:p>
-        </p:txBody>
-      </p:sp>
-      <p:sp>
-        <p:nvSpPr>
-          <p:cNvPr id="14" name="Parallel sessions card"/>
-          <p:cNvSpPr/>
-          <p:nvPr/>
-        </p:nvSpPr>
-        <p:spPr>
-          <a:xfrm>
-            <a:off x="6233008" y="1920240"/>
-            <a:ext cx="2567864" cy="3108960"/>
-          </a:xfrm>
-          <a:prstGeom prst="roundRect">
-            <a:avLst>
-              <a:gd name="adj" fmla="val 4273"/>
-            </a:avLst>
-          </a:prstGeom>
-          <a:solidFill>
-            <a:schemeClr val="bg1"/>
-          </a:solidFill>
-          <a:ln w="12700">
-            <a:solidFill>
-              <a:schemeClr val="bg1"/>
-            </a:solidFill>
-            <a:prstDash val="solid"/>
-          </a:ln>
-        </p:spPr>
-      </p:sp>
-      <p:sp>
-        <p:nvSpPr>
-          <p:cNvPr id="15" name="Parallel sessions icon circle"/>
-          <p:cNvSpPr/>
-          <p:nvPr/>
-        </p:nvSpPr>
-        <p:spPr>
-          <a:xfrm>
-            <a:off x="6553048" y="2240280"/>
-            <a:ext cx="731520" cy="731520"/>
-          </a:xfrm>
-          <a:prstGeom prst="ellipse">
-            <a:avLst/>
-          </a:prstGeom>
-          <a:solidFill>
-            <a:schemeClr val="accent5"/>
-          </a:solidFill>
-          <a:ln w="12700">
-            <a:solidFill>
-              <a:schemeClr val="accent5"/>
-            </a:solidFill>
-            <a:prstDash val="solid"/>
-          </a:ln>
-        </p:spPr>
-      </p:sp>
-      <p:pic>
-        <p:nvPicPr>
-          <p:cNvPr id="16" name="Image 2" descr="Parallel sessions icon">    </p:cNvPr>
-          <p:cNvPicPr>
-            <a:picLocks noChangeAspect="1"/>
-          </p:cNvPicPr>
-          <p:nvPr/>
-        </p:nvPicPr>
-        <p:blipFill>
-          <a:blip r:embed="rId3"/>
-          <a:stretch>
-            <a:fillRect/>
-          </a:stretch>
-        </p:blipFill>
-        <p:spPr>
-          <a:xfrm>
-            <a:off x="6735928" y="2423160"/>
-            <a:ext cx="365760" cy="365760"/>
-          </a:xfrm>
-          <a:prstGeom prst="rect">
-            <a:avLst/>
-          </a:prstGeom>
-        </p:spPr>
-      </p:pic>
-      <p:sp>
-        <p:nvSpPr>
-          <p:cNvPr id="17" name="Text 12"/>
-          <p:cNvSpPr txBox="1"/>
-          <p:nvPr/>
-        </p:nvSpPr>
-        <p:spPr>
-          <a:xfrm>
-            <a:off x="6553048" y="3154680"/>
-            <a:ext cx="1927784" cy="457200"/>
-          </a:xfrm>
-          <a:prstGeom prst="rect">
-            <a:avLst/>
-          </a:prstGeom>
-          <a:noFill/>
-          <a:ln/>
-        </p:spPr>
-        <p:txBody>
-          <a:bodyPr wrap="square" lIns="0" tIns="0" rIns="0" bIns="0" rtlCol="0" anchor="ctr"/>
-          <a:lstStyle/>
-          <a:p>
-            <a:pPr indent="0" marL="0">
-              <a:buNone/>
-            </a:pPr>
-            <a:r>
-              <a:rPr lang="en-US" sz="2100" b="1" dirty="0">
-                <a:solidFill>
-                  <a:schemeClr val="tx1"/>
-                </a:solidFill>
-              </a:rPr>
-              <a:t>Parallel sessions</a:t>
-            </a:r>
-            <a:endParaRPr lang="en-US" sz="2100" dirty="0"/>
-          </a:p>
-        </p:txBody>
-      </p:sp>
-      <p:sp>
-        <p:nvSpPr>
-          <p:cNvPr id="18" name="Text 13"/>
-          <p:cNvSpPr txBox="1"/>
-          <p:nvPr/>
-        </p:nvSpPr>
-        <p:spPr>
-          <a:xfrm>
-            <a:off x="6553048" y="3657600"/>
-            <a:ext cx="1927784" cy="1188720"/>
-          </a:xfrm>
-          <a:prstGeom prst="rect">
-            <a:avLst/>
-          </a:prstGeom>
-          <a:noFill/>
-          <a:ln/>
-        </p:spPr>
-        <p:txBody>
-          <a:bodyPr wrap="square" lIns="0" tIns="0" rIns="0" bIns="0" rtlCol="0" anchor="t"/>
-          <a:lstStyle/>
-          <a:p>
-            <a:pPr indent="0" marL="0">
-              <a:buNone/>
-            </a:pPr>
-            <a:r>
-              <a:rPr lang="en-US" sz="1600" dirty="0">
-                <a:solidFill>
-                  <a:schemeClr val="tx2"/>
-                </a:solidFill>
-              </a:rPr>
-              <a:t>Several full agents, each on its own task in its own worktree.</a:t>
-            </a:r>
-            <a:endParaRPr lang="en-US" sz="1600" dirty="0"/>
-          </a:p>
-        </p:txBody>
-      </p:sp>
-      <p:sp>
-        <p:nvSpPr>
-          <p:cNvPr id="19" name="Subagents card"/>
-          <p:cNvSpPr/>
-          <p:nvPr/>
-        </p:nvSpPr>
-        <p:spPr>
-          <a:xfrm>
-            <a:off x="9075191" y="1920240"/>
-            <a:ext cx="2567864" cy="3108960"/>
-          </a:xfrm>
-          <a:prstGeom prst="roundRect">
-            <a:avLst>
-              <a:gd name="adj" fmla="val 4273"/>
-            </a:avLst>
-          </a:prstGeom>
-          <a:solidFill>
-            <a:schemeClr val="bg1"/>
-          </a:solidFill>
-          <a:ln w="12700">
-            <a:solidFill>
-              <a:schemeClr val="bg1"/>
-            </a:solidFill>
-            <a:prstDash val="solid"/>
-          </a:ln>
-        </p:spPr>
-      </p:sp>
-      <p:sp>
-        <p:nvSpPr>
-          <p:cNvPr id="20" name="Subagents icon circle"/>
-          <p:cNvSpPr/>
-          <p:nvPr/>
-        </p:nvSpPr>
-        <p:spPr>
-          <a:xfrm>
-            <a:off x="9395231" y="2240280"/>
-            <a:ext cx="731520" cy="731520"/>
-          </a:xfrm>
-          <a:prstGeom prst="ellipse">
-            <a:avLst/>
-          </a:prstGeom>
-          <a:solidFill>
-            <a:schemeClr val="accent5"/>
-          </a:solidFill>
-          <a:ln w="12700">
-            <a:solidFill>
-              <a:schemeClr val="accent5"/>
-            </a:solidFill>
-            <a:prstDash val="solid"/>
-          </a:ln>
-        </p:spPr>
-      </p:sp>
-      <p:pic>
-        <p:nvPicPr>
-          <p:cNvPr id="21" name="Image 3" descr="Subagents icon">    </p:cNvPr>
-          <p:cNvPicPr>
-            <a:picLocks noChangeAspect="1"/>
-          </p:cNvPicPr>
-          <p:nvPr/>
-        </p:nvPicPr>
-        <p:blipFill>
-          <a:blip r:embed="rId4"/>
-          <a:stretch>
-            <a:fillRect/>
-          </a:stretch>
-        </p:blipFill>
-        <p:spPr>
-          <a:xfrm>
-            <a:off x="9578111" y="2423160"/>
-            <a:ext cx="365760" cy="365760"/>
-          </a:xfrm>
-          <a:prstGeom prst="rect">
-            <a:avLst/>
-          </a:prstGeom>
-        </p:spPr>
-      </p:pic>
-      <p:sp>
-        <p:nvSpPr>
-          <p:cNvPr id="22" name="Text 16"/>
-          <p:cNvSpPr txBox="1"/>
-          <p:nvPr/>
-        </p:nvSpPr>
-        <p:spPr>
-          <a:xfrm>
-            <a:off x="9395231" y="3154680"/>
-            <a:ext cx="1927784" cy="457200"/>
-          </a:xfrm>
-          <a:prstGeom prst="rect">
-            <a:avLst/>
-          </a:prstGeom>
-          <a:noFill/>
-          <a:ln/>
-        </p:spPr>
-        <p:txBody>
-          <a:bodyPr wrap="square" lIns="0" tIns="0" rIns="0" bIns="0" rtlCol="0" anchor="ctr"/>
-          <a:lstStyle/>
-          <a:p>
-            <a:pPr indent="0" marL="0">
-              <a:buNone/>
-            </a:pPr>
-            <a:r>
-              <a:rPr lang="en-US" sz="2100" b="1" dirty="0">
-                <a:solidFill>
-                  <a:schemeClr val="tx1"/>
-                </a:solidFill>
-              </a:rPr>
-              <a:t>Subagents</a:t>
-            </a:r>
-            <a:endParaRPr lang="en-US" sz="2100" dirty="0"/>
-          </a:p>
-        </p:txBody>
-      </p:sp>
-      <p:sp>
-        <p:nvSpPr>
-          <p:cNvPr id="23" name="Text 17"/>
-          <p:cNvSpPr txBox="1"/>
-          <p:nvPr/>
-        </p:nvSpPr>
-        <p:spPr>
-          <a:xfrm>
-            <a:off x="9395231" y="3657600"/>
-            <a:ext cx="1927784" cy="1188720"/>
-          </a:xfrm>
-          <a:prstGeom prst="rect">
-            <a:avLst/>
-          </a:prstGeom>
-          <a:noFill/>
-          <a:ln/>
-        </p:spPr>
-        <p:txBody>
-          <a:bodyPr wrap="square" lIns="0" tIns="0" rIns="0" bIns="0" rtlCol="0" anchor="t"/>
-          <a:lstStyle/>
-          <a:p>
-            <a:pPr indent="0" marL="0">
-              <a:buNone/>
-            </a:pPr>
-            <a:r>
-              <a:rPr lang="en-US" sz="1600" dirty="0">
-                <a:solidFill>
-                  <a:schemeClr val="tx2"/>
-                </a:solidFill>
-              </a:rPr>
-              <a:t>Helpers for repeated jobs, each in its own context.</a:t>
-            </a:r>
-            <a:endParaRPr lang="en-US" sz="1600" dirty="0"/>
-          </a:p>
-        </p:txBody>
-      </p:sp>
-      <p:sp>
-        <p:nvSpPr>
-          <p:cNvPr id="24" name="Text 18"/>
-          <p:cNvSpPr txBox="1"/>
-          <p:nvPr/>
-        </p:nvSpPr>
-        <p:spPr>
-          <a:xfrm>
-            <a:off x="548640" y="5349240"/>
-            <a:ext cx="11094415" cy="640080"/>
-          </a:xfrm>
-          <a:prstGeom prst="rect">
-            <a:avLst/>
-          </a:prstGeom>
-          <a:noFill/>
-          <a:ln/>
-        </p:spPr>
-        <p:txBody>
-          <a:bodyPr wrap="square" lIns="0" tIns="0" rIns="0" bIns="0" rtlCol="0" anchor="ctr"/>
-          <a:lstStyle/>
-          <a:p>
-            <a:pPr indent="0" marL="0">
-              <a:buNone/>
-            </a:pPr>
-            <a:r>
-              <a:rPr lang="en-US" sz="1800" b="1" dirty="0">
-                <a:solidFill>
-                  <a:schemeClr val="tx1"/>
-                </a:solidFill>
-              </a:rPr>
-              <a:t>Watch out: </a:t>
-            </a:r>
-            <a:pPr indent="0" marL="0">
-              <a:buNone/>
-            </a:pPr>
-            <a:r>
-              <a:rPr lang="en-US" sz="1800" dirty="0">
-                <a:solidFill>
-                  <a:schemeClr val="tx1"/>
-                </a:solidFill>
-              </a:rPr>
-              <a:t>each subagent starts fresh, so more helpers means more tokens. Use them for big tasks that split cleanly.</a:t>
-            </a:r>
-            <a:endParaRPr lang="en-US" sz="1800" dirty="0"/>
+              <a:lnSpc>
+                <a:spcPct val="115000"/>
+              </a:lnSpc>
+              <a:buNone/>
+            </a:pPr>
+            <a:r>
+              <a:rPr lang="en-US" sz="1400" dirty="0">
+                <a:solidFill>
+                  <a:schemeClr val="accent1"/>
+                </a:solidFill>
+                <a:latin typeface="Courier New" pitchFamily="34" charset="0"/>
+                <a:ea typeface="Courier New" pitchFamily="34" charset="-122"/>
+                <a:cs typeface="Courier New" pitchFamily="34" charset="-120"/>
+              </a:rPr>
+              <a:t>## </a:t>
+            </a:r>
+            <a:pPr indent="0" marL="0">
+              <a:lnSpc>
+                <a:spcPct val="115000"/>
+              </a:lnSpc>
+              <a:buNone/>
+            </a:pPr>
+            <a:r>
+              <a:rPr lang="en-US" sz="1400" dirty="0">
+                <a:solidFill>
+                  <a:schemeClr val="accent6"/>
+                </a:solidFill>
+                <a:latin typeface="Courier New" pitchFamily="34" charset="0"/>
+                <a:ea typeface="Courier New" pitchFamily="34" charset="-122"/>
+                <a:cs typeface="Courier New" pitchFamily="34" charset="-120"/>
+              </a:rPr>
+              <a:t>Commands</a:t>
+            </a:r>
+            <a:endParaRPr lang="en-US" sz="1400" dirty="0"/>
+          </a:p>
+          <a:p>
+            <a:pPr indent="0" marL="0">
+              <a:lnSpc>
+                <a:spcPct val="115000"/>
+              </a:lnSpc>
+              <a:buNone/>
+            </a:pPr>
+            <a:r>
+              <a:rPr lang="en-US" sz="1400" dirty="0">
+                <a:solidFill>
+                  <a:schemeClr val="accent6"/>
+                </a:solidFill>
+                <a:latin typeface="Courier New" pitchFamily="34" charset="0"/>
+                <a:ea typeface="Courier New" pitchFamily="34" charset="-122"/>
+                <a:cs typeface="Courier New" pitchFamily="34" charset="-120"/>
+              </a:rPr>
+              <a:t>Build: make build · Test: make test</a:t>
+            </a:r>
+            <a:endParaRPr lang="en-US" sz="1400" dirty="0"/>
+          </a:p>
+          <a:p>
+            <a:pPr indent="0" marL="0">
+              <a:lnSpc>
+                <a:spcPct val="115000"/>
+              </a:lnSpc>
+              <a:buNone/>
+            </a:pPr>
+            <a:r>
+              <a:rPr lang="en-US" sz="1400" dirty="0">
+                <a:solidFill>
+                  <a:schemeClr val="accent1"/>
+                </a:solidFill>
+                <a:latin typeface="Courier New" pitchFamily="34" charset="0"/>
+                <a:ea typeface="Courier New" pitchFamily="34" charset="-122"/>
+                <a:cs typeface="Courier New" pitchFamily="34" charset="-120"/>
+              </a:rPr>
+              <a:t>## </a:t>
+            </a:r>
+            <a:pPr indent="0" marL="0">
+              <a:lnSpc>
+                <a:spcPct val="115000"/>
+              </a:lnSpc>
+              <a:buNone/>
+            </a:pPr>
+            <a:r>
+              <a:rPr lang="en-US" sz="1400" dirty="0">
+                <a:solidFill>
+                  <a:schemeClr val="accent6"/>
+                </a:solidFill>
+                <a:latin typeface="Courier New" pitchFamily="34" charset="0"/>
+                <a:ea typeface="Courier New" pitchFamily="34" charset="-122"/>
+                <a:cs typeface="Courier New" pitchFamily="34" charset="-120"/>
+              </a:rPr>
+              <a:t>Conventions</a:t>
+            </a:r>
+            <a:endParaRPr lang="en-US" sz="1400" dirty="0"/>
+          </a:p>
+          <a:p>
+            <a:pPr indent="0" marL="0">
+              <a:lnSpc>
+                <a:spcPct val="115000"/>
+              </a:lnSpc>
+              <a:buNone/>
+            </a:pPr>
+            <a:r>
+              <a:rPr lang="en-US" sz="1400" dirty="0">
+                <a:solidFill>
+                  <a:schemeClr val="accent6"/>
+                </a:solidFill>
+                <a:latin typeface="Courier New" pitchFamily="34" charset="0"/>
+                <a:ea typeface="Courier New" pitchFamily="34" charset="-122"/>
+                <a:cs typeface="Courier New" pitchFamily="34" charset="-120"/>
+              </a:rPr>
+              <a:t>Money is always BigDecimal, never double.</a:t>
+            </a:r>
+            <a:endParaRPr lang="en-US" sz="1400" dirty="0"/>
+          </a:p>
+          <a:p>
+            <a:pPr indent="0" marL="0">
+              <a:lnSpc>
+                <a:spcPct val="115000"/>
+              </a:lnSpc>
+              <a:buNone/>
+            </a:pPr>
+            <a:r>
+              <a:rPr lang="en-US" sz="1400" dirty="0">
+                <a:solidFill>
+                  <a:schemeClr val="accent1"/>
+                </a:solidFill>
+                <a:latin typeface="Courier New" pitchFamily="34" charset="0"/>
+                <a:ea typeface="Courier New" pitchFamily="34" charset="-122"/>
+                <a:cs typeface="Courier New" pitchFamily="34" charset="-120"/>
+              </a:rPr>
+              <a:t>## </a:t>
+            </a:r>
+            <a:pPr indent="0" marL="0">
+              <a:lnSpc>
+                <a:spcPct val="115000"/>
+              </a:lnSpc>
+              <a:buNone/>
+            </a:pPr>
+            <a:r>
+              <a:rPr lang="en-US" sz="1400" dirty="0">
+                <a:solidFill>
+                  <a:schemeClr val="accent6"/>
+                </a:solidFill>
+                <a:latin typeface="Courier New" pitchFamily="34" charset="0"/>
+                <a:ea typeface="Courier New" pitchFamily="34" charset="-122"/>
+                <a:cs typeface="Courier New" pitchFamily="34" charset="-120"/>
+              </a:rPr>
+              <a:t>Architecture</a:t>
+            </a:r>
+            <a:endParaRPr lang="en-US" sz="1400" dirty="0"/>
+          </a:p>
+          <a:p>
+            <a:pPr indent="0" marL="0">
+              <a:lnSpc>
+                <a:spcPct val="115000"/>
+              </a:lnSpc>
+              <a:buNone/>
+            </a:pPr>
+            <a:r>
+              <a:rPr lang="en-US" sz="1400" dirty="0">
+                <a:solidFill>
+                  <a:schemeClr val="accent6"/>
+                </a:solidFill>
+                <a:latin typeface="Courier New" pitchFamily="34" charset="0"/>
+                <a:ea typeface="Courier New" pitchFamily="34" charset="-122"/>
+                <a:cs typeface="Courier New" pitchFamily="34" charset="-120"/>
+              </a:rPr>
+              <a:t>api/ controllers · core/ domain logic</a:t>
+            </a:r>
+            <a:endParaRPr lang="en-US" sz="1400" dirty="0"/>
+          </a:p>
+          <a:p>
+            <a:pPr indent="0" marL="0">
+              <a:lnSpc>
+                <a:spcPct val="115000"/>
+              </a:lnSpc>
+              <a:buNone/>
+            </a:pPr>
+            <a:r>
+              <a:rPr lang="en-US" sz="1400" dirty="0">
+                <a:solidFill>
+                  <a:schemeClr val="accent1"/>
+                </a:solidFill>
+                <a:latin typeface="Courier New" pitchFamily="34" charset="0"/>
+                <a:ea typeface="Courier New" pitchFamily="34" charset="-122"/>
+                <a:cs typeface="Courier New" pitchFamily="34" charset="-120"/>
+              </a:rPr>
+              <a:t>## </a:t>
+            </a:r>
+            <a:pPr indent="0" marL="0">
+              <a:lnSpc>
+                <a:spcPct val="115000"/>
+              </a:lnSpc>
+              <a:buNone/>
+            </a:pPr>
+            <a:r>
+              <a:rPr lang="en-US" sz="1400" dirty="0">
+                <a:solidFill>
+                  <a:schemeClr val="accent6"/>
+                </a:solidFill>
+                <a:latin typeface="Courier New" pitchFamily="34" charset="0"/>
+                <a:ea typeface="Courier New" pitchFamily="34" charset="-122"/>
+                <a:cs typeface="Courier New" pitchFamily="34" charset="-120"/>
+              </a:rPr>
+              <a:t>Things the agent gets wrong</a:t>
+            </a:r>
+            <a:endParaRPr lang="en-US" sz="1400" dirty="0"/>
+          </a:p>
+          <a:p>
+            <a:pPr indent="0" marL="0">
+              <a:lnSpc>
+                <a:spcPct val="115000"/>
+              </a:lnSpc>
+              <a:buNone/>
+            </a:pPr>
+            <a:r>
+              <a:rPr lang="en-US" sz="1400" dirty="0">
+                <a:solidFill>
+                  <a:schemeClr val="accent6"/>
+                </a:solidFill>
+                <a:latin typeface="Courier New" pitchFamily="34" charset="0"/>
+                <a:ea typeface="Courier New" pitchFamily="34" charset="-122"/>
+                <a:cs typeface="Courier New" pitchFamily="34" charset="-120"/>
+              </a:rPr>
+              <a:t>Do not bump dependency versions.</a:t>
+            </a:r>
+            <a:endParaRPr lang="en-US" sz="1400" dirty="0"/>
+          </a:p>
+          <a:p>
+            <a:pPr indent="0" marL="0">
+              <a:lnSpc>
+                <a:spcPct val="115000"/>
+              </a:lnSpc>
+              <a:buNone/>
+            </a:pPr>
+            <a:r>
+              <a:rPr lang="en-US" sz="1400" dirty="0">
+                <a:solidFill>
+                  <a:schemeClr val="accent6"/>
+                </a:solidFill>
+                <a:latin typeface="Courier New" pitchFamily="34" charset="0"/>
+                <a:ea typeface="Courier New" pitchFamily="34" charset="-122"/>
+                <a:cs typeface="Courier New" pitchFamily="34" charset="-120"/>
+              </a:rPr>
+              <a:t>The legacy v1/ package is frozen.</a:t>
+            </a:r>
+            <a:endParaRPr lang="en-US" sz="1400" dirty="0"/>
           </a:p>
         </p:txBody>
       </p:sp>
